--- a/submissions/2026-09-18-progress-review-deck.pptx
+++ b/submissions/2026-09-18-progress-review-deck.pptx
@@ -19,9 +19,10 @@
     <p:sldId id="267" r:id="rId13"/>
     <p:sldId id="268" r:id="rId14"/>
     <p:sldId id="269" r:id="rId15"/>
+    <p:sldId id="270" r:id="rId16"/>
   </p:sldIdLst>
   <p:notesMasterIdLst>
-    <p:notesMasterId r:id="rId16"/>
+    <p:notesMasterId r:id="rId17"/>
   </p:notesMasterIdLst>
   <p:sldSz cx="9144000" cy="5143500"/>
   <p:notesSz cx="5143500" cy="9144000"/>
@@ -979,6 +980,94 @@
             <a:fld id="{F7021451-1387-4CA6-816F-3879F97B5CBC}" type="slidenum">
               <a:rPr lang="en-US"/>
               <a:t>14</a:t>
+            </a:fld>
+            <a:endParaRPr lang="en-US"/>
+          </a:p>
+        </p:txBody>
+      </p:sp>
+    </p:spTree>
+    <p:extLst>
+      <p:ext uri="{BB962C8B-B14F-4D97-AF65-F5344CB8AC3E}">
+        <p14:creationId xmlns:p14="http://schemas.microsoft.com/office/powerpoint/2010/main" val="1024086991"/>
+      </p:ext>
+    </p:extLst>
+  </p:cSld>
+  <p:clrMapOvr>
+    <a:masterClrMapping/>
+  </p:clrMapOvr>
+</p:notes>
+</file>
+
+<file path=ppt/notesSlides/notesSlide15.xml><?xml version="1.0" encoding="utf-8"?>
+<p:notes xmlns:a="http://schemas.openxmlformats.org/drawingml/2006/main" xmlns:r="http://schemas.openxmlformats.org/officeDocument/2006/relationships" xmlns:p="http://schemas.openxmlformats.org/presentationml/2006/main">
+  <p:cSld>
+    <p:spTree>
+      <p:nvGrpSpPr>
+        <p:cNvPr id="1" name=""/>
+        <p:cNvGrpSpPr/>
+        <p:nvPr/>
+      </p:nvGrpSpPr>
+      <p:grpSpPr>
+        <a:xfrm>
+          <a:off x="0" y="0"/>
+          <a:ext cx="0" cy="0"/>
+          <a:chOff x="0" y="0"/>
+          <a:chExt cx="0" cy="0"/>
+        </a:xfrm>
+      </p:grpSpPr>
+      <p:sp>
+        <p:nvSpPr>
+          <p:cNvPr id="2" name="Slide Image Placeholder 1"/>
+          <p:cNvSpPr>
+            <a:spLocks noGrp="1" noRot="1" noChangeAspect="1"/>
+          </p:cNvSpPr>
+          <p:nvPr>
+            <p:ph type="sldImg"/>
+          </p:nvPr>
+        </p:nvSpPr>
+        <p:spPr/>
+      </p:sp>
+      <p:sp>
+        <p:nvSpPr>
+          <p:cNvPr id="3" name="Notes Placeholder 2"/>
+          <p:cNvSpPr>
+            <a:spLocks noGrp="1"/>
+          </p:cNvSpPr>
+          <p:nvPr>
+            <p:ph type="body" idx="1"/>
+          </p:nvPr>
+        </p:nvSpPr>
+        <p:spPr/>
+        <p:txBody>
+          <a:bodyPr/>
+          <a:lstStyle/>
+          <a:p>
+            <a:r>
+              <a:rPr lang="en-US" dirty="0"/>
+              <a:t/>
+            </a:r>
+            <a:endParaRPr lang="en-US" dirty="0"/>
+          </a:p>
+        </p:txBody>
+      </p:sp>
+      <p:sp>
+        <p:nvSpPr>
+          <p:cNvPr id="4" name="Slide Number Placeholder 3"/>
+          <p:cNvSpPr>
+            <a:spLocks noGrp="1"/>
+          </p:cNvSpPr>
+          <p:nvPr>
+            <p:ph type="sldNum" sz="quarter" idx="10"/>
+          </p:nvPr>
+        </p:nvSpPr>
+        <p:spPr/>
+        <p:txBody>
+          <a:bodyPr/>
+          <a:lstStyle/>
+          <a:p>
+            <a:fld id="{F7021451-1387-4CA6-816F-3879F97B5CBC}" type="slidenum">
+              <a:rPr lang="en-US"/>
+              <a:t>15</a:t>
             </a:fld>
             <a:endParaRPr lang="en-US"/>
           </a:p>
@@ -2332,7 +2421,7 @@
                 <a:ea typeface="Helvetica" pitchFamily="34" charset="-122"/>
                 <a:cs typeface="Helvetica" pitchFamily="34" charset="-120"/>
               </a:rPr>
-              <a:t>THE MAIN CHANGE SINCE THE PROPOSAL</a:t>
+              <a:t>QUESTION 2 · THE PROCESS WORKING</a:t>
             </a:r>
             <a:endParaRPr lang="en-US" sz="1100" dirty="0"/>
           </a:p>
@@ -2371,7 +2460,7 @@
                 <a:ea typeface="Helvetica" pitchFamily="34" charset="-122"/>
                 <a:cs typeface="Helvetica" pitchFamily="34" charset="-120"/>
               </a:rPr>
-              <a:t>Change of plan: three lanes became one shared front</a:t>
+              <a:t>Every change was reviewed — including the ones we got wrong</a:t>
             </a:r>
             <a:endParaRPr lang="en-US" sz="3000" dirty="0"/>
           </a:p>
@@ -2405,35 +2494,57 @@
         </p:nvSpPr>
         <p:spPr>
           <a:xfrm>
-            <a:off x="566928" y="1572768"/>
-            <a:ext cx="5257800" cy="2743200"/>
-          </a:xfrm>
-          <a:prstGeom prst="roundRect">
-            <a:avLst>
-              <a:gd name="adj" fmla="val 1667"/>
-            </a:avLst>
+            <a:off x="534924" y="1540764"/>
+            <a:ext cx="5550408" cy="2752344"/>
+          </a:xfrm>
+          <a:prstGeom prst="rect">
+            <a:avLst/>
           </a:prstGeom>
           <a:solidFill>
-            <a:srgbClr val="FDF2F2"/>
+            <a:srgbClr val="E6ECF0"/>
           </a:solidFill>
-          <a:ln w="12700">
+          <a:ln w="9525">
             <a:solidFill>
-              <a:srgbClr val="F5D0D0"/>
+              <a:srgbClr val="D3DCE3"/>
             </a:solidFill>
             <a:prstDash val="solid"/>
           </a:ln>
         </p:spPr>
       </p:sp>
-      <p:sp>
-        <p:nvSpPr>
-          <p:cNvPr id="6" name="Text 4"/>
-          <p:cNvSpPr/>
-          <p:nvPr/>
-        </p:nvSpPr>
-        <p:spPr>
-          <a:xfrm>
-            <a:off x="768096" y="1700784"/>
-            <a:ext cx="4846320" cy="310896"/>
+      <p:pic>
+        <p:nvPicPr>
+          <p:cNvPr id="6" name="Image 0" descr="/Users/tabeenraoof/Desktop/SFBU/semester04/CS595/ProofShape/submissions/assets/2026-09-18/peer-review-demands-tests.jpg">    </p:cNvPr>
+          <p:cNvPicPr>
+            <a:picLocks noChangeAspect="1"/>
+          </p:cNvPicPr>
+          <p:nvPr/>
+        </p:nvPicPr>
+        <p:blipFill>
+          <a:blip r:embed="rId1"/>
+          <a:stretch>
+            <a:fillRect/>
+          </a:stretch>
+        </p:blipFill>
+        <p:spPr>
+          <a:xfrm>
+            <a:off x="566928" y="1572768"/>
+            <a:ext cx="5486400" cy="2688336"/>
+          </a:xfrm>
+          <a:prstGeom prst="rect">
+            <a:avLst/>
+          </a:prstGeom>
+        </p:spPr>
+      </p:pic>
+      <p:sp>
+        <p:nvSpPr>
+          <p:cNvPr id="7" name="Text 4"/>
+          <p:cNvSpPr/>
+          <p:nvPr/>
+        </p:nvSpPr>
+        <p:spPr>
+          <a:xfrm>
+            <a:off x="534924" y="4343400"/>
+            <a:ext cx="5550408" cy="384048"/>
           </a:xfrm>
           <a:prstGeom prst="rect">
             <a:avLst/>
@@ -2442,62 +2553,86 @@
           <a:ln/>
         </p:spPr>
         <p:txBody>
-          <a:bodyPr wrap="square" rtlCol="0" anchor="ctr"/>
-          <a:lstStyle/>
-          <a:p>
-            <a:pPr indent="0" marL="0">
+          <a:bodyPr wrap="square" rtlCol="0" anchor="t"/>
+          <a:lstStyle/>
+          <a:p>
+            <a:pPr algn="l" indent="0" marL="0">
               <a:buNone/>
             </a:pPr>
             <a:r>
-              <a:rPr lang="en-US" sz="1300" b="1" spc="100" kern="0" dirty="0">
-                <a:solidFill>
-                  <a:srgbClr val="B91C1C"/>
-                </a:solidFill>
-                <a:latin typeface="Helvetica" pitchFamily="34" charset="0"/>
-                <a:ea typeface="Helvetica" pitchFamily="34" charset="-122"/>
-                <a:cs typeface="Helvetica" pitchFamily="34" charset="-120"/>
-              </a:rPr>
-              <a:t>BEFORE — as proposed</a:t>
-            </a:r>
-            <a:endParaRPr lang="en-US" sz="1300" dirty="0"/>
-          </a:p>
-        </p:txBody>
-      </p:sp>
-      <p:sp>
-        <p:nvSpPr>
-          <p:cNvPr id="7" name="Shape 5"/>
-          <p:cNvSpPr/>
-          <p:nvPr/>
-        </p:nvSpPr>
-        <p:spPr>
-          <a:xfrm>
-            <a:off x="768096" y="2103120"/>
-            <a:ext cx="4846320" cy="566928"/>
+              <a:rPr lang="en-US" sz="1050" dirty="0">
+                <a:solidFill>
+                  <a:srgbClr val="6B7280"/>
+                </a:solidFill>
+                <a:latin typeface="Helvetica" pitchFamily="34" charset="0"/>
+                <a:ea typeface="Helvetica" pitchFamily="34" charset="-122"/>
+                <a:cs typeface="Helvetica" pitchFamily="34" charset="-120"/>
+              </a:rPr>
+              <a:t>A reviewer blocking a merge on our own rules: “it adds 134 lines of state-management logic without any automated tests, which violates the current definition of done in AGENTS.md” — followed by the exact test cases required.</a:t>
+            </a:r>
+            <a:endParaRPr lang="en-US" sz="1050" dirty="0"/>
+          </a:p>
+        </p:txBody>
+      </p:sp>
+      <p:sp>
+        <p:nvSpPr>
+          <p:cNvPr id="8" name="Shape 5"/>
+          <p:cNvSpPr/>
+          <p:nvPr/>
+        </p:nvSpPr>
+        <p:spPr>
+          <a:xfrm>
+            <a:off x="6368796" y="1540764"/>
+            <a:ext cx="5285232" cy="2752344"/>
           </a:xfrm>
           <a:prstGeom prst="rect">
             <a:avLst/>
           </a:prstGeom>
           <a:solidFill>
-            <a:srgbClr val="FFFFFF"/>
+            <a:srgbClr val="E6ECF0"/>
           </a:solidFill>
-          <a:ln w="12700">
+          <a:ln w="9525">
             <a:solidFill>
-              <a:srgbClr val="F0DADA"/>
+              <a:srgbClr val="D3DCE3"/>
             </a:solidFill>
             <a:prstDash val="solid"/>
           </a:ln>
         </p:spPr>
       </p:sp>
-      <p:sp>
-        <p:nvSpPr>
-          <p:cNvPr id="8" name="Text 6"/>
-          <p:cNvSpPr/>
-          <p:nvPr/>
-        </p:nvSpPr>
-        <p:spPr>
-          <a:xfrm>
-            <a:off x="914400" y="2157984"/>
-            <a:ext cx="3291840" cy="274320"/>
+      <p:pic>
+        <p:nvPicPr>
+          <p:cNvPr id="9" name="Image 1" descr="/Users/tabeenraoof/Desktop/SFBU/semester04/CS595/ProofShape/submissions/assets/2026-09-18/pr-approval-gate.jpg">    </p:cNvPr>
+          <p:cNvPicPr>
+            <a:picLocks noChangeAspect="1"/>
+          </p:cNvPicPr>
+          <p:nvPr/>
+        </p:nvPicPr>
+        <p:blipFill>
+          <a:blip r:embed="rId2"/>
+          <a:stretch>
+            <a:fillRect/>
+          </a:stretch>
+        </p:blipFill>
+        <p:spPr>
+          <a:xfrm>
+            <a:off x="6400800" y="1572768"/>
+            <a:ext cx="5221224" cy="2688336"/>
+          </a:xfrm>
+          <a:prstGeom prst="rect">
+            <a:avLst/>
+          </a:prstGeom>
+        </p:spPr>
+      </p:pic>
+      <p:sp>
+        <p:nvSpPr>
+          <p:cNvPr id="10" name="Text 6"/>
+          <p:cNvSpPr/>
+          <p:nvPr/>
+        </p:nvSpPr>
+        <p:spPr>
+          <a:xfrm>
+            <a:off x="6368796" y="4343400"/>
+            <a:ext cx="5285232" cy="384048"/>
           </a:xfrm>
           <a:prstGeom prst="rect">
             <a:avLst/>
@@ -2506,53 +2641,14 @@
           <a:ln/>
         </p:spPr>
         <p:txBody>
-          <a:bodyPr wrap="square" rtlCol="0" anchor="ctr"/>
-          <a:lstStyle/>
-          <a:p>
-            <a:pPr indent="0" marL="0">
+          <a:bodyPr wrap="square" rtlCol="0" anchor="t"/>
+          <a:lstStyle/>
+          <a:p>
+            <a:pPr algn="l" indent="0" marL="0">
               <a:buNone/>
             </a:pPr>
             <a:r>
-              <a:rPr lang="en-US" sz="1300" b="1" dirty="0">
-                <a:solidFill>
-                  <a:srgbClr val="1B1B1F"/>
-                </a:solidFill>
-                <a:latin typeface="Helvetica" pitchFamily="34" charset="0"/>
-                <a:ea typeface="Helvetica" pitchFamily="34" charset="-122"/>
-                <a:cs typeface="Helvetica" pitchFamily="34" charset="-120"/>
-              </a:rPr>
-              <a:t>Lane 1 — Capture front end</a:t>
-            </a:r>
-            <a:endParaRPr lang="en-US" sz="1300" dirty="0"/>
-          </a:p>
-        </p:txBody>
-      </p:sp>
-      <p:sp>
-        <p:nvSpPr>
-          <p:cNvPr id="9" name="Text 7"/>
-          <p:cNvSpPr/>
-          <p:nvPr/>
-        </p:nvSpPr>
-        <p:spPr>
-          <a:xfrm>
-            <a:off x="914400" y="2395728"/>
-            <a:ext cx="4480560" cy="237744"/>
-          </a:xfrm>
-          <a:prstGeom prst="rect">
-            <a:avLst/>
-          </a:prstGeom>
-          <a:noFill/>
-          <a:ln/>
-        </p:spPr>
-        <p:txBody>
-          <a:bodyPr wrap="square" rtlCol="0" anchor="ctr"/>
-          <a:lstStyle/>
-          <a:p>
-            <a:pPr indent="0" marL="0">
-              <a:buNone/>
-            </a:pPr>
-            <a:r>
-              <a:rPr lang="en-US" sz="1100" dirty="0">
+              <a:rPr lang="en-US" sz="1050" dirty="0">
                 <a:solidFill>
                   <a:srgbClr val="6B7280"/>
                 </a:solidFill>
@@ -2560,759 +2656,22 @@
                 <a:ea typeface="Helvetica" pitchFamily="34" charset="-122"/>
                 <a:cs typeface="Helvetica" pitchFamily="34" charset="-120"/>
               </a:rPr>
-              <a:t>one owner · 97 h</a:t>
-            </a:r>
-            <a:endParaRPr lang="en-US" sz="1100" dirty="0"/>
-          </a:p>
-        </p:txBody>
-      </p:sp>
-      <p:sp>
-        <p:nvSpPr>
-          <p:cNvPr id="10" name="Shape 8"/>
-          <p:cNvSpPr/>
-          <p:nvPr/>
-        </p:nvSpPr>
-        <p:spPr>
-          <a:xfrm>
-            <a:off x="768096" y="2761488"/>
-            <a:ext cx="4846320" cy="566928"/>
-          </a:xfrm>
-          <a:prstGeom prst="rect">
-            <a:avLst/>
-          </a:prstGeom>
-          <a:solidFill>
-            <a:srgbClr val="FFFFFF"/>
-          </a:solidFill>
-          <a:ln w="12700">
-            <a:solidFill>
-              <a:srgbClr val="F0DADA"/>
-            </a:solidFill>
-            <a:prstDash val="solid"/>
-          </a:ln>
-        </p:spPr>
-      </p:sp>
-      <p:sp>
-        <p:nvSpPr>
-          <p:cNvPr id="11" name="Text 9"/>
-          <p:cNvSpPr/>
-          <p:nvPr/>
-        </p:nvSpPr>
-        <p:spPr>
-          <a:xfrm>
-            <a:off x="914400" y="2816352"/>
-            <a:ext cx="3291840" cy="274320"/>
-          </a:xfrm>
-          <a:prstGeom prst="rect">
-            <a:avLst/>
-          </a:prstGeom>
-          <a:noFill/>
-          <a:ln/>
-        </p:spPr>
-        <p:txBody>
-          <a:bodyPr wrap="square" rtlCol="0" anchor="ctr"/>
-          <a:lstStyle/>
-          <a:p>
-            <a:pPr indent="0" marL="0">
-              <a:buNone/>
-            </a:pPr>
-            <a:r>
-              <a:rPr lang="en-US" sz="1300" b="1" dirty="0">
-                <a:solidFill>
-                  <a:srgbClr val="1B1B1F"/>
-                </a:solidFill>
-                <a:latin typeface="Helvetica" pitchFamily="34" charset="0"/>
-                <a:ea typeface="Helvetica" pitchFamily="34" charset="-122"/>
-                <a:cs typeface="Helvetica" pitchFamily="34" charset="-120"/>
-              </a:rPr>
-              <a:t>Lane 2 — Reconstruction backend</a:t>
-            </a:r>
-            <a:endParaRPr lang="en-US" sz="1300" dirty="0"/>
-          </a:p>
-        </p:txBody>
-      </p:sp>
-      <p:sp>
-        <p:nvSpPr>
-          <p:cNvPr id="12" name="Text 10"/>
-          <p:cNvSpPr/>
-          <p:nvPr/>
-        </p:nvSpPr>
-        <p:spPr>
-          <a:xfrm>
-            <a:off x="914400" y="3054096"/>
-            <a:ext cx="4480560" cy="237744"/>
-          </a:xfrm>
-          <a:prstGeom prst="rect">
-            <a:avLst/>
-          </a:prstGeom>
-          <a:noFill/>
-          <a:ln/>
-        </p:spPr>
-        <p:txBody>
-          <a:bodyPr wrap="square" rtlCol="0" anchor="ctr"/>
-          <a:lstStyle/>
-          <a:p>
-            <a:pPr indent="0" marL="0">
-              <a:buNone/>
-            </a:pPr>
-            <a:r>
-              <a:rPr lang="en-US" sz="1100" dirty="0">
-                <a:solidFill>
-                  <a:srgbClr val="6B7280"/>
-                </a:solidFill>
-                <a:latin typeface="Helvetica" pitchFamily="34" charset="0"/>
-                <a:ea typeface="Helvetica" pitchFamily="34" charset="-122"/>
-                <a:cs typeface="Helvetica" pitchFamily="34" charset="-120"/>
-              </a:rPr>
-              <a:t>one owner · 97 h</a:t>
-            </a:r>
-            <a:endParaRPr lang="en-US" sz="1100" dirty="0"/>
-          </a:p>
-        </p:txBody>
-      </p:sp>
-      <p:sp>
-        <p:nvSpPr>
-          <p:cNvPr id="13" name="Shape 11"/>
-          <p:cNvSpPr/>
-          <p:nvPr/>
-        </p:nvSpPr>
-        <p:spPr>
-          <a:xfrm>
-            <a:off x="768096" y="3419856"/>
-            <a:ext cx="4846320" cy="566928"/>
-          </a:xfrm>
-          <a:prstGeom prst="rect">
-            <a:avLst/>
-          </a:prstGeom>
-          <a:solidFill>
-            <a:srgbClr val="FFFFFF"/>
-          </a:solidFill>
-          <a:ln w="12700">
-            <a:solidFill>
-              <a:srgbClr val="F0DADA"/>
-            </a:solidFill>
-            <a:prstDash val="solid"/>
-          </a:ln>
-        </p:spPr>
-      </p:sp>
-      <p:sp>
-        <p:nvSpPr>
-          <p:cNvPr id="14" name="Text 12"/>
-          <p:cNvSpPr/>
-          <p:nvPr/>
-        </p:nvSpPr>
-        <p:spPr>
-          <a:xfrm>
-            <a:off x="914400" y="3474720"/>
-            <a:ext cx="3291840" cy="274320"/>
-          </a:xfrm>
-          <a:prstGeom prst="rect">
-            <a:avLst/>
-          </a:prstGeom>
-          <a:noFill/>
-          <a:ln/>
-        </p:spPr>
-        <p:txBody>
-          <a:bodyPr wrap="square" rtlCol="0" anchor="ctr"/>
-          <a:lstStyle/>
-          <a:p>
-            <a:pPr indent="0" marL="0">
-              <a:buNone/>
-            </a:pPr>
-            <a:r>
-              <a:rPr lang="en-US" sz="1300" b="1" dirty="0">
-                <a:solidFill>
-                  <a:srgbClr val="1B1B1F"/>
-                </a:solidFill>
-                <a:latin typeface="Helvetica" pitchFamily="34" charset="0"/>
-                <a:ea typeface="Helvetica" pitchFamily="34" charset="-122"/>
-                <a:cs typeface="Helvetica" pitchFamily="34" charset="-120"/>
-              </a:rPr>
-              <a:t>Lane 3 — Inspection and truth</a:t>
-            </a:r>
-            <a:endParaRPr lang="en-US" sz="1300" dirty="0"/>
-          </a:p>
-        </p:txBody>
-      </p:sp>
-      <p:sp>
-        <p:nvSpPr>
-          <p:cNvPr id="15" name="Text 13"/>
-          <p:cNvSpPr/>
-          <p:nvPr/>
-        </p:nvSpPr>
-        <p:spPr>
-          <a:xfrm>
-            <a:off x="914400" y="3712464"/>
-            <a:ext cx="4480560" cy="237744"/>
-          </a:xfrm>
-          <a:prstGeom prst="rect">
-            <a:avLst/>
-          </a:prstGeom>
-          <a:noFill/>
-          <a:ln/>
-        </p:spPr>
-        <p:txBody>
-          <a:bodyPr wrap="square" rtlCol="0" anchor="ctr"/>
-          <a:lstStyle/>
-          <a:p>
-            <a:pPr indent="0" marL="0">
-              <a:buNone/>
-            </a:pPr>
-            <a:r>
-              <a:rPr lang="en-US" sz="1100" dirty="0">
-                <a:solidFill>
-                  <a:srgbClr val="6B7280"/>
-                </a:solidFill>
-                <a:latin typeface="Helvetica" pitchFamily="34" charset="0"/>
-                <a:ea typeface="Helvetica" pitchFamily="34" charset="-122"/>
-                <a:cs typeface="Helvetica" pitchFamily="34" charset="-120"/>
-              </a:rPr>
-              <a:t>one owner · 97 h</a:t>
-            </a:r>
-            <a:endParaRPr lang="en-US" sz="1100" dirty="0"/>
-          </a:p>
-        </p:txBody>
-      </p:sp>
-      <p:sp>
-        <p:nvSpPr>
-          <p:cNvPr id="16" name="Text 14"/>
-          <p:cNvSpPr/>
-          <p:nvPr/>
-        </p:nvSpPr>
-        <p:spPr>
-          <a:xfrm>
-            <a:off x="768096" y="4078224"/>
-            <a:ext cx="4846320" cy="274320"/>
-          </a:xfrm>
-          <a:prstGeom prst="rect">
-            <a:avLst/>
-          </a:prstGeom>
-          <a:noFill/>
-          <a:ln/>
-        </p:spPr>
-        <p:txBody>
-          <a:bodyPr wrap="square" rtlCol="0" anchor="ctr"/>
-          <a:lstStyle/>
-          <a:p>
-            <a:pPr indent="0" marL="0">
-              <a:buNone/>
-            </a:pPr>
-            <a:r>
-              <a:rPr lang="en-US" sz="1150" i="1" dirty="0">
-                <a:solidFill>
-                  <a:srgbClr val="6B7280"/>
-                </a:solidFill>
-                <a:latin typeface="Helvetica" pitchFamily="34" charset="0"/>
-                <a:ea typeface="Helvetica" pitchFamily="34" charset="-122"/>
-                <a:cs typeface="Helvetica" pitchFamily="34" charset="-120"/>
-              </a:rPr>
-              <a:t>Three people building three different things in parallel from day one.</a:t>
-            </a:r>
-            <a:endParaRPr lang="en-US" sz="1150" dirty="0"/>
-          </a:p>
-        </p:txBody>
-      </p:sp>
-      <p:sp>
-        <p:nvSpPr>
-          <p:cNvPr id="17" name="Text 15"/>
-          <p:cNvSpPr/>
-          <p:nvPr/>
-        </p:nvSpPr>
-        <p:spPr>
-          <a:xfrm>
-            <a:off x="5897880" y="2651760"/>
-            <a:ext cx="548640" cy="548640"/>
-          </a:xfrm>
-          <a:prstGeom prst="rect">
-            <a:avLst/>
-          </a:prstGeom>
-          <a:noFill/>
-          <a:ln/>
-        </p:spPr>
-        <p:txBody>
-          <a:bodyPr wrap="square" rtlCol="0" anchor="ctr"/>
-          <a:lstStyle/>
-          <a:p>
-            <a:pPr algn="ctr" indent="0" marL="0">
-              <a:buNone/>
-            </a:pPr>
-            <a:r>
-              <a:rPr lang="en-US" sz="3400" b="1" dirty="0">
-                <a:solidFill>
-                  <a:srgbClr val="16697A"/>
-                </a:solidFill>
-                <a:latin typeface="Helvetica" pitchFamily="34" charset="0"/>
-                <a:ea typeface="Helvetica" pitchFamily="34" charset="-122"/>
-                <a:cs typeface="Helvetica" pitchFamily="34" charset="-120"/>
-              </a:rPr>
-              <a:t>→</a:t>
-            </a:r>
-            <a:endParaRPr lang="en-US" sz="3400" dirty="0"/>
-          </a:p>
-        </p:txBody>
-      </p:sp>
-      <p:sp>
-        <p:nvSpPr>
-          <p:cNvPr id="18" name="Shape 16"/>
-          <p:cNvSpPr/>
-          <p:nvPr/>
-        </p:nvSpPr>
-        <p:spPr>
-          <a:xfrm>
-            <a:off x="6446520" y="1572768"/>
-            <a:ext cx="5175504" cy="2743200"/>
-          </a:xfrm>
-          <a:prstGeom prst="roundRect">
-            <a:avLst>
-              <a:gd name="adj" fmla="val 1667"/>
-            </a:avLst>
-          </a:prstGeom>
-          <a:solidFill>
-            <a:srgbClr val="EFF7F8"/>
-          </a:solidFill>
-          <a:ln w="12700">
-            <a:solidFill>
-              <a:srgbClr val="BFDCE2"/>
-            </a:solidFill>
-            <a:prstDash val="solid"/>
-          </a:ln>
-        </p:spPr>
-      </p:sp>
-      <p:sp>
-        <p:nvSpPr>
-          <p:cNvPr id="19" name="Text 17"/>
-          <p:cNvSpPr/>
-          <p:nvPr/>
-        </p:nvSpPr>
-        <p:spPr>
-          <a:xfrm>
-            <a:off x="6647688" y="1700784"/>
-            <a:ext cx="4754880" cy="310896"/>
-          </a:xfrm>
-          <a:prstGeom prst="rect">
-            <a:avLst/>
-          </a:prstGeom>
-          <a:noFill/>
-          <a:ln/>
-        </p:spPr>
-        <p:txBody>
-          <a:bodyPr wrap="square" rtlCol="0" anchor="ctr"/>
-          <a:lstStyle/>
-          <a:p>
-            <a:pPr indent="0" marL="0">
-              <a:buNone/>
-            </a:pPr>
-            <a:r>
-              <a:rPr lang="en-US" sz="1300" b="1" spc="100" kern="0" dirty="0">
-                <a:solidFill>
-                  <a:srgbClr val="16697A"/>
-                </a:solidFill>
-                <a:latin typeface="Helvetica" pitchFamily="34" charset="0"/>
-                <a:ea typeface="Helvetica" pitchFamily="34" charset="-122"/>
-                <a:cs typeface="Helvetica" pitchFamily="34" charset="-120"/>
-              </a:rPr>
-              <a:t>NOW — as we are actually working</a:t>
-            </a:r>
-            <a:endParaRPr lang="en-US" sz="1300" dirty="0"/>
-          </a:p>
-        </p:txBody>
-      </p:sp>
-      <p:sp>
-        <p:nvSpPr>
-          <p:cNvPr id="20" name="Shape 18"/>
-          <p:cNvSpPr/>
-          <p:nvPr/>
-        </p:nvSpPr>
-        <p:spPr>
-          <a:xfrm>
-            <a:off x="6647688" y="2103120"/>
-            <a:ext cx="4773168" cy="566928"/>
-          </a:xfrm>
-          <a:prstGeom prst="rect">
-            <a:avLst/>
-          </a:prstGeom>
-          <a:solidFill>
-            <a:srgbClr val="FFFFFF"/>
-          </a:solidFill>
-          <a:ln w="12700">
-            <a:solidFill>
-              <a:srgbClr val="CFE4E9"/>
-            </a:solidFill>
-            <a:prstDash val="solid"/>
-          </a:ln>
-        </p:spPr>
-      </p:sp>
-      <p:sp>
-        <p:nvSpPr>
-          <p:cNvPr id="21" name="Text 19"/>
-          <p:cNvSpPr/>
-          <p:nvPr/>
-        </p:nvSpPr>
-        <p:spPr>
-          <a:xfrm>
-            <a:off x="6793992" y="2157984"/>
-            <a:ext cx="3657600" cy="274320"/>
-          </a:xfrm>
-          <a:prstGeom prst="rect">
-            <a:avLst/>
-          </a:prstGeom>
-          <a:noFill/>
-          <a:ln/>
-        </p:spPr>
-        <p:txBody>
-          <a:bodyPr wrap="square" rtlCol="0" anchor="ctr"/>
-          <a:lstStyle/>
-          <a:p>
-            <a:pPr indent="0" marL="0">
-              <a:buNone/>
-            </a:pPr>
-            <a:r>
-              <a:rPr lang="en-US" sz="1300" b="1" dirty="0">
-                <a:solidFill>
-                  <a:srgbClr val="1B1B1F"/>
-                </a:solidFill>
-                <a:latin typeface="Helvetica" pitchFamily="34" charset="0"/>
-                <a:ea typeface="Helvetica" pitchFamily="34" charset="-122"/>
-                <a:cs typeface="Helvetica" pitchFamily="34" charset="-120"/>
-              </a:rPr>
-              <a:t>Stage 1 — Foundations</a:t>
-            </a:r>
-            <a:endParaRPr lang="en-US" sz="1300" dirty="0"/>
-          </a:p>
-        </p:txBody>
-      </p:sp>
-      <p:sp>
-        <p:nvSpPr>
-          <p:cNvPr id="22" name="Text 20"/>
-          <p:cNvSpPr/>
-          <p:nvPr/>
-        </p:nvSpPr>
-        <p:spPr>
-          <a:xfrm>
-            <a:off x="6793992" y="2395728"/>
-            <a:ext cx="4480560" cy="237744"/>
-          </a:xfrm>
-          <a:prstGeom prst="rect">
-            <a:avLst/>
-          </a:prstGeom>
-          <a:noFill/>
-          <a:ln/>
-        </p:spPr>
-        <p:txBody>
-          <a:bodyPr wrap="square" rtlCol="0" anchor="ctr"/>
-          <a:lstStyle/>
-          <a:p>
-            <a:pPr indent="0" marL="0">
-              <a:buNone/>
-            </a:pPr>
-            <a:r>
-              <a:rPr lang="en-US" sz="1100" dirty="0">
-                <a:solidFill>
-                  <a:srgbClr val="6B7280"/>
-                </a:solidFill>
-                <a:latin typeface="Helvetica" pitchFamily="34" charset="0"/>
-                <a:ea typeface="Helvetica" pitchFamily="34" charset="-122"/>
-                <a:cs typeface="Helvetica" pitchFamily="34" charset="-120"/>
-              </a:rPr>
-              <a:t>all three · repo, contract, CI, pod, fixtures</a:t>
-            </a:r>
-            <a:endParaRPr lang="en-US" sz="1100" dirty="0"/>
-          </a:p>
-        </p:txBody>
-      </p:sp>
-      <p:sp>
-        <p:nvSpPr>
-          <p:cNvPr id="23" name="Shape 21"/>
-          <p:cNvSpPr/>
-          <p:nvPr/>
-        </p:nvSpPr>
-        <p:spPr>
-          <a:xfrm>
-            <a:off x="6647688" y="2761488"/>
-            <a:ext cx="4773168" cy="566928"/>
-          </a:xfrm>
-          <a:prstGeom prst="rect">
-            <a:avLst/>
-          </a:prstGeom>
-          <a:solidFill>
-            <a:srgbClr val="FFFFFF"/>
-          </a:solidFill>
-          <a:ln w="12700">
-            <a:solidFill>
-              <a:srgbClr val="CFE4E9"/>
-            </a:solidFill>
-            <a:prstDash val="solid"/>
-          </a:ln>
-        </p:spPr>
-      </p:sp>
-      <p:sp>
-        <p:nvSpPr>
-          <p:cNvPr id="24" name="Text 22"/>
-          <p:cNvSpPr/>
-          <p:nvPr/>
-        </p:nvSpPr>
-        <p:spPr>
-          <a:xfrm>
-            <a:off x="6793992" y="2816352"/>
-            <a:ext cx="3657600" cy="274320"/>
-          </a:xfrm>
-          <a:prstGeom prst="rect">
-            <a:avLst/>
-          </a:prstGeom>
-          <a:noFill/>
-          <a:ln/>
-        </p:spPr>
-        <p:txBody>
-          <a:bodyPr wrap="square" rtlCol="0" anchor="ctr"/>
-          <a:lstStyle/>
-          <a:p>
-            <a:pPr indent="0" marL="0">
-              <a:buNone/>
-            </a:pPr>
-            <a:r>
-              <a:rPr lang="en-US" sz="1300" b="1" dirty="0">
-                <a:solidFill>
-                  <a:srgbClr val="1B1B1F"/>
-                </a:solidFill>
-                <a:latin typeface="Helvetica" pitchFamily="34" charset="0"/>
-                <a:ea typeface="Helvetica" pitchFamily="34" charset="-122"/>
-                <a:cs typeface="Helvetica" pitchFamily="34" charset="-120"/>
-              </a:rPr>
-              <a:t>Stage 2 — Reconstruction engine</a:t>
-            </a:r>
-            <a:endParaRPr lang="en-US" sz="1300" dirty="0"/>
-          </a:p>
-        </p:txBody>
-      </p:sp>
-      <p:sp>
-        <p:nvSpPr>
-          <p:cNvPr id="25" name="Text 23"/>
-          <p:cNvSpPr/>
-          <p:nvPr/>
-        </p:nvSpPr>
-        <p:spPr>
-          <a:xfrm>
-            <a:off x="6793992" y="3054096"/>
-            <a:ext cx="4480560" cy="237744"/>
-          </a:xfrm>
-          <a:prstGeom prst="rect">
-            <a:avLst/>
-          </a:prstGeom>
-          <a:noFill/>
-          <a:ln/>
-        </p:spPr>
-        <p:txBody>
-          <a:bodyPr wrap="square" rtlCol="0" anchor="ctr"/>
-          <a:lstStyle/>
-          <a:p>
-            <a:pPr indent="0" marL="0">
-              <a:buNone/>
-            </a:pPr>
-            <a:r>
-              <a:rPr lang="en-US" sz="1100" dirty="0">
-                <a:solidFill>
-                  <a:srgbClr val="6B7280"/>
-                </a:solidFill>
-                <a:latin typeface="Helvetica" pitchFamily="34" charset="0"/>
-                <a:ea typeface="Helvetica" pitchFamily="34" charset="-122"/>
-                <a:cs typeface="Helvetica" pitchFamily="34" charset="-120"/>
-              </a:rPr>
-              <a:t>all three · the hardest risk, retired first</a:t>
-            </a:r>
-            <a:endParaRPr lang="en-US" sz="1100" dirty="0"/>
-          </a:p>
-        </p:txBody>
-      </p:sp>
-      <p:sp>
-        <p:nvSpPr>
-          <p:cNvPr id="26" name="Shape 24"/>
-          <p:cNvSpPr/>
-          <p:nvPr/>
-        </p:nvSpPr>
-        <p:spPr>
-          <a:xfrm>
-            <a:off x="6647688" y="3419856"/>
-            <a:ext cx="4773168" cy="566928"/>
-          </a:xfrm>
-          <a:prstGeom prst="rect">
-            <a:avLst/>
-          </a:prstGeom>
-          <a:solidFill>
-            <a:srgbClr val="FFFFFF"/>
-          </a:solidFill>
-          <a:ln w="12700">
-            <a:solidFill>
-              <a:srgbClr val="CFE4E9"/>
-            </a:solidFill>
-            <a:prstDash val="solid"/>
-          </a:ln>
-        </p:spPr>
-      </p:sp>
-      <p:sp>
-        <p:nvSpPr>
-          <p:cNvPr id="27" name="Text 25"/>
-          <p:cNvSpPr/>
-          <p:nvPr/>
-        </p:nvSpPr>
-        <p:spPr>
-          <a:xfrm>
-            <a:off x="6793992" y="3474720"/>
-            <a:ext cx="3657600" cy="274320"/>
-          </a:xfrm>
-          <a:prstGeom prst="rect">
-            <a:avLst/>
-          </a:prstGeom>
-          <a:noFill/>
-          <a:ln/>
-        </p:spPr>
-        <p:txBody>
-          <a:bodyPr wrap="square" rtlCol="0" anchor="ctr"/>
-          <a:lstStyle/>
-          <a:p>
-            <a:pPr indent="0" marL="0">
-              <a:buNone/>
-            </a:pPr>
-            <a:r>
-              <a:rPr lang="en-US" sz="1300" b="1" dirty="0">
-                <a:solidFill>
-                  <a:srgbClr val="1B1B1F"/>
-                </a:solidFill>
-                <a:latin typeface="Helvetica" pitchFamily="34" charset="0"/>
-                <a:ea typeface="Helvetica" pitchFamily="34" charset="-122"/>
-                <a:cs typeface="Helvetica" pitchFamily="34" charset="-120"/>
-              </a:rPr>
-              <a:t>Stage 3 — Capture · Inspection · AI</a:t>
-            </a:r>
-            <a:endParaRPr lang="en-US" sz="1300" dirty="0"/>
-          </a:p>
-        </p:txBody>
-      </p:sp>
-      <p:sp>
-        <p:nvSpPr>
-          <p:cNvPr id="28" name="Text 26"/>
-          <p:cNvSpPr/>
-          <p:nvPr/>
-        </p:nvSpPr>
-        <p:spPr>
-          <a:xfrm>
-            <a:off x="6793992" y="3712464"/>
-            <a:ext cx="4480560" cy="237744"/>
-          </a:xfrm>
-          <a:prstGeom prst="rect">
-            <a:avLst/>
-          </a:prstGeom>
-          <a:noFill/>
-          <a:ln/>
-        </p:spPr>
-        <p:txBody>
-          <a:bodyPr wrap="square" rtlCol="0" anchor="ctr"/>
-          <a:lstStyle/>
-          <a:p>
-            <a:pPr indent="0" marL="0">
-              <a:buNone/>
-            </a:pPr>
-            <a:r>
-              <a:rPr lang="en-US" sz="1100" dirty="0">
-                <a:solidFill>
-                  <a:srgbClr val="6B7280"/>
-                </a:solidFill>
-                <a:latin typeface="Helvetica" pitchFamily="34" charset="0"/>
-                <a:ea typeface="Helvetica" pitchFamily="34" charset="-122"/>
-                <a:cs typeface="Helvetica" pitchFamily="34" charset="-120"/>
-              </a:rPr>
-              <a:t>built against something that already works</a:t>
-            </a:r>
-            <a:endParaRPr lang="en-US" sz="1100" dirty="0"/>
-          </a:p>
-        </p:txBody>
-      </p:sp>
-      <p:sp>
-        <p:nvSpPr>
-          <p:cNvPr id="29" name="Text 27"/>
-          <p:cNvSpPr/>
-          <p:nvPr/>
-        </p:nvSpPr>
-        <p:spPr>
-          <a:xfrm>
-            <a:off x="6647688" y="4078224"/>
-            <a:ext cx="4754880" cy="274320"/>
-          </a:xfrm>
-          <a:prstGeom prst="rect">
-            <a:avLst/>
-          </a:prstGeom>
-          <a:noFill/>
-          <a:ln/>
-        </p:spPr>
-        <p:txBody>
-          <a:bodyPr wrap="square" rtlCol="0" anchor="ctr"/>
-          <a:lstStyle/>
-          <a:p>
-            <a:pPr indent="0" marL="0">
-              <a:buNone/>
-            </a:pPr>
-            <a:r>
-              <a:rPr lang="en-US" sz="1150" i="1" dirty="0">
-                <a:solidFill>
-                  <a:srgbClr val="6B7280"/>
-                </a:solidFill>
-                <a:latin typeface="Helvetica" pitchFamily="34" charset="0"/>
-                <a:ea typeface="Helvetica" pitchFamily="34" charset="-122"/>
-                <a:cs typeface="Helvetica" pitchFamily="34" charset="-120"/>
-              </a:rPr>
-              <a:t>Lanes are now places in the repository, not people.</a:t>
-            </a:r>
-            <a:endParaRPr lang="en-US" sz="1150" dirty="0"/>
-          </a:p>
-        </p:txBody>
-      </p:sp>
-      <p:sp>
-        <p:nvSpPr>
-          <p:cNvPr id="30" name="Text 28"/>
-          <p:cNvSpPr/>
-          <p:nvPr/>
-        </p:nvSpPr>
-        <p:spPr>
-          <a:xfrm>
-            <a:off x="566928" y="4517136"/>
-            <a:ext cx="5486400" cy="310896"/>
-          </a:xfrm>
-          <a:prstGeom prst="rect">
-            <a:avLst/>
-          </a:prstGeom>
-          <a:noFill/>
-          <a:ln/>
-        </p:spPr>
-        <p:txBody>
-          <a:bodyPr wrap="square" rtlCol="0" anchor="ctr"/>
-          <a:lstStyle/>
-          <a:p>
-            <a:pPr indent="0" marL="0">
-              <a:buNone/>
-            </a:pPr>
-            <a:r>
-              <a:rPr lang="en-US" sz="1500" b="1" dirty="0">
-                <a:solidFill>
-                  <a:srgbClr val="16697A"/>
-                </a:solidFill>
-                <a:latin typeface="Helvetica" pitchFamily="34" charset="0"/>
-                <a:ea typeface="Helvetica" pitchFamily="34" charset="-122"/>
-                <a:cs typeface="Helvetica" pitchFamily="34" charset="-120"/>
-              </a:rPr>
-              <a:t>Why we changed it</a:t>
-            </a:r>
-            <a:endParaRPr lang="en-US" sz="1500" dirty="0"/>
-          </a:p>
-        </p:txBody>
-      </p:sp>
-      <p:sp>
-        <p:nvSpPr>
-          <p:cNvPr id="31" name="Text 29"/>
-          <p:cNvSpPr/>
-          <p:nvPr/>
-        </p:nvSpPr>
-        <p:spPr>
-          <a:xfrm>
-            <a:off x="566928" y="4846320"/>
-            <a:ext cx="11055096" cy="1371600"/>
+              <a:t>The gate itself: “At least 1 approving review is required to merge this pull request.” It applies to the repository owner too — nobody has an override.</a:t>
+            </a:r>
+            <a:endParaRPr lang="en-US" sz="1050" dirty="0"/>
+          </a:p>
+        </p:txBody>
+      </p:sp>
+      <p:sp>
+        <p:nvSpPr>
+          <p:cNvPr id="11" name="Text 7"/>
+          <p:cNvSpPr/>
+          <p:nvPr/>
+        </p:nvSpPr>
+        <p:spPr>
+          <a:xfrm>
+            <a:off x="566928" y="5029200"/>
+            <a:ext cx="11055096" cy="1188720"/>
           </a:xfrm>
           <a:prstGeom prst="rect">
             <a:avLst/>
@@ -3332,7 +2691,7 @@
               <a:buChar char="•"/>
             </a:pPr>
             <a:r>
-              <a:rPr lang="en-US" sz="1300" dirty="0">
+              <a:rPr lang="en-US" sz="1250" dirty="0">
                 <a:solidFill>
                   <a:srgbClr val="1B1B1F"/>
                 </a:solidFill>
@@ -3340,9 +2699,9 @@
                 <a:ea typeface="Helvetica" pitchFamily="34" charset="-122"/>
                 <a:cs typeface="Helvetica" pitchFamily="34" charset="-120"/>
               </a:rPr>
-              <a:t>Total hours do not set the finish date — the serial chain does. About 42 of the 93 engine hours can only run one story after another, so that chain advances at one person's pace no matter how many people are free. Adding people to it changes nothing.</a:t>
-            </a:r>
-            <a:endParaRPr lang="en-US" sz="1300" dirty="0"/>
+              <a:t>Review also caught two defects that looked clean: a merge that silently duplicated a story's status block, and a second that silently dropped an entire decision entry. Both reported as mergeable by GitHub; both found by reading the merge, not trusting it.</a:t>
+            </a:r>
+            <a:endParaRPr lang="en-US" sz="1250" dirty="0"/>
           </a:p>
           <a:p>
             <a:pPr marL="342900" indent="-342900">
@@ -3353,23 +2712,23 @@
               <a:buChar char="•"/>
             </a:pPr>
             <a:r>
-              <a:rPr lang="en-US" sz="1300" dirty="0">
-                <a:solidFill>
-                  <a:srgbClr val="1B1B1F"/>
-                </a:solidFill>
-                <a:latin typeface="Helvetica" pitchFamily="34" charset="0"/>
-                <a:ea typeface="Helvetica" pitchFamily="34" charset="-122"/>
-                <a:cs typeface="Helvetica" pitchFamily="34" charset="-120"/>
-              </a:rPr>
-              <a:t>The reconstruction engine is the hardest risk in the project. Retiring it first means everything downstream is built against something real instead of a guess.</a:t>
-            </a:r>
-            <a:endParaRPr lang="en-US" sz="1300" dirty="0"/>
-          </a:p>
-        </p:txBody>
-      </p:sp>
-      <p:sp>
-        <p:nvSpPr>
-          <p:cNvPr id="32" name="Text 30"/>
+              <a:rPr lang="en-US" sz="1250" dirty="0">
+                <a:solidFill>
+                  <a:srgbClr val="16697A"/>
+                </a:solidFill>
+                <a:latin typeface="Helvetica" pitchFamily="34" charset="0"/>
+                <a:ea typeface="Helvetica" pitchFamily="34" charset="-122"/>
+                <a:cs typeface="Helvetica" pitchFamily="34" charset="-120"/>
+              </a:rPr>
+              <a:t>Two pull requests were closed rather than merged — one redundant, one based on a misreading of our own approval rule. That disagreement was settled by quoting the rule, not by seniority.</a:t>
+            </a:r>
+            <a:endParaRPr lang="en-US" sz="1250" dirty="0"/>
+          </a:p>
+        </p:txBody>
+      </p:sp>
+      <p:sp>
+        <p:nvSpPr>
+          <p:cNvPr id="12" name="Text 8"/>
           <p:cNvSpPr/>
           <p:nvPr/>
         </p:nvSpPr>
@@ -3408,7 +2767,7 @@
       </p:sp>
       <p:sp>
         <p:nvSpPr>
-          <p:cNvPr id="33" name="Text 31"/>
+          <p:cNvPr id="13" name="Text 9"/>
           <p:cNvSpPr/>
           <p:nvPr/>
         </p:nvSpPr>
@@ -3510,7 +2869,7 @@
                 <a:ea typeface="Helvetica" pitchFamily="34" charset="-122"/>
                 <a:cs typeface="Helvetica" pitchFamily="34" charset="-120"/>
               </a:rPr>
-              <a:t>THE SAME MILESTONES, A DIFFERENT SHAPE OF WORK</a:t>
+              <a:t>THE MAIN CHANGE SINCE THE PROPOSAL</a:t>
             </a:r>
             <a:endParaRPr lang="en-US" sz="1100" dirty="0"/>
           </a:p>
@@ -3549,7 +2908,7 @@
                 <a:ea typeface="Helvetica" pitchFamily="34" charset="-122"/>
                 <a:cs typeface="Helvetica" pitchFamily="34" charset="-120"/>
               </a:rPr>
-              <a:t>Re-planned timeline</a:t>
+              <a:t>Change of plan: three lanes became one shared front</a:t>
             </a:r>
             <a:endParaRPr lang="en-US" sz="3000" dirty="0"/>
           </a:p>
@@ -3583,16 +2942,20 @@
         </p:nvSpPr>
         <p:spPr>
           <a:xfrm>
-            <a:off x="2898648" y="1591056"/>
-            <a:ext cx="0" cy="3479292"/>
-          </a:xfrm>
-          <a:prstGeom prst="line">
-            <a:avLst/>
-          </a:prstGeom>
-          <a:noFill/>
-          <a:ln w="9525">
+            <a:off x="566928" y="1572768"/>
+            <a:ext cx="5257800" cy="2743200"/>
+          </a:xfrm>
+          <a:prstGeom prst="roundRect">
+            <a:avLst>
+              <a:gd name="adj" fmla="val 1667"/>
+            </a:avLst>
+          </a:prstGeom>
+          <a:solidFill>
+            <a:srgbClr val="FDF2F2"/>
+          </a:solidFill>
+          <a:ln w="12700">
             <a:solidFill>
-              <a:srgbClr val="E3E9ED"/>
+              <a:srgbClr val="F5D0D0"/>
             </a:solidFill>
             <a:prstDash val="solid"/>
           </a:ln>
@@ -3606,8 +2969,8 @@
         </p:nvSpPr>
         <p:spPr>
           <a:xfrm>
-            <a:off x="2926080" y="1371600"/>
-            <a:ext cx="731520" cy="219456"/>
+            <a:off x="768096" y="1700784"/>
+            <a:ext cx="4846320" cy="310896"/>
           </a:xfrm>
           <a:prstGeom prst="rect">
             <a:avLst/>
@@ -3623,17 +2986,17 @@
               <a:buNone/>
             </a:pPr>
             <a:r>
-              <a:rPr lang="en-US" sz="1050" dirty="0">
-                <a:solidFill>
-                  <a:srgbClr val="6B7280"/>
-                </a:solidFill>
-                <a:latin typeface="Helvetica" pitchFamily="34" charset="0"/>
-                <a:ea typeface="Helvetica" pitchFamily="34" charset="-122"/>
-                <a:cs typeface="Helvetica" pitchFamily="34" charset="-120"/>
-              </a:rPr>
-              <a:t>Sep</a:t>
-            </a:r>
-            <a:endParaRPr lang="en-US" sz="1050" dirty="0"/>
+              <a:rPr lang="en-US" sz="1300" b="1" spc="100" kern="0" dirty="0">
+                <a:solidFill>
+                  <a:srgbClr val="B91C1C"/>
+                </a:solidFill>
+                <a:latin typeface="Helvetica" pitchFamily="34" charset="0"/>
+                <a:ea typeface="Helvetica" pitchFamily="34" charset="-122"/>
+                <a:cs typeface="Helvetica" pitchFamily="34" charset="-120"/>
+              </a:rPr>
+              <a:t>BEFORE — as proposed</a:t>
+            </a:r>
+            <a:endParaRPr lang="en-US" sz="1300" dirty="0"/>
           </a:p>
         </p:txBody>
       </p:sp>
@@ -3645,16 +3008,18 @@
         </p:nvSpPr>
         <p:spPr>
           <a:xfrm>
-            <a:off x="5166705" y="1591056"/>
-            <a:ext cx="0" cy="3479292"/>
-          </a:xfrm>
-          <a:prstGeom prst="line">
-            <a:avLst/>
-          </a:prstGeom>
-          <a:noFill/>
-          <a:ln w="9525">
+            <a:off x="768096" y="2103120"/>
+            <a:ext cx="4846320" cy="566928"/>
+          </a:xfrm>
+          <a:prstGeom prst="rect">
+            <a:avLst/>
+          </a:prstGeom>
+          <a:solidFill>
+            <a:srgbClr val="FFFFFF"/>
+          </a:solidFill>
+          <a:ln w="12700">
             <a:solidFill>
-              <a:srgbClr val="E3E9ED"/>
+              <a:srgbClr val="F0DADA"/>
             </a:solidFill>
             <a:prstDash val="solid"/>
           </a:ln>
@@ -3668,8 +3033,8 @@
         </p:nvSpPr>
         <p:spPr>
           <a:xfrm>
-            <a:off x="5194137" y="1371600"/>
-            <a:ext cx="731520" cy="219456"/>
+            <a:off x="914400" y="2157984"/>
+            <a:ext cx="3291840" cy="274320"/>
           </a:xfrm>
           <a:prstGeom prst="rect">
             <a:avLst/>
@@ -3685,7 +3050,46 @@
               <a:buNone/>
             </a:pPr>
             <a:r>
-              <a:rPr lang="en-US" sz="1050" dirty="0">
+              <a:rPr lang="en-US" sz="1300" b="1" dirty="0">
+                <a:solidFill>
+                  <a:srgbClr val="1B1B1F"/>
+                </a:solidFill>
+                <a:latin typeface="Helvetica" pitchFamily="34" charset="0"/>
+                <a:ea typeface="Helvetica" pitchFamily="34" charset="-122"/>
+                <a:cs typeface="Helvetica" pitchFamily="34" charset="-120"/>
+              </a:rPr>
+              <a:t>Lane 1 — Capture front end</a:t>
+            </a:r>
+            <a:endParaRPr lang="en-US" sz="1300" dirty="0"/>
+          </a:p>
+        </p:txBody>
+      </p:sp>
+      <p:sp>
+        <p:nvSpPr>
+          <p:cNvPr id="9" name="Text 7"/>
+          <p:cNvSpPr/>
+          <p:nvPr/>
+        </p:nvSpPr>
+        <p:spPr>
+          <a:xfrm>
+            <a:off x="914400" y="2395728"/>
+            <a:ext cx="4480560" cy="237744"/>
+          </a:xfrm>
+          <a:prstGeom prst="rect">
+            <a:avLst/>
+          </a:prstGeom>
+          <a:noFill/>
+          <a:ln/>
+        </p:spPr>
+        <p:txBody>
+          <a:bodyPr wrap="square" rtlCol="0" anchor="ctr"/>
+          <a:lstStyle/>
+          <a:p>
+            <a:pPr indent="0" marL="0">
+              <a:buNone/>
+            </a:pPr>
+            <a:r>
+              <a:rPr lang="en-US" sz="1100" dirty="0">
                 <a:solidFill>
                   <a:srgbClr val="6B7280"/>
                 </a:solidFill>
@@ -3693,30 +3097,32 @@
                 <a:ea typeface="Helvetica" pitchFamily="34" charset="-122"/>
                 <a:cs typeface="Helvetica" pitchFamily="34" charset="-120"/>
               </a:rPr>
-              <a:t>Oct</a:t>
-            </a:r>
-            <a:endParaRPr lang="en-US" sz="1050" dirty="0"/>
-          </a:p>
-        </p:txBody>
-      </p:sp>
-      <p:sp>
-        <p:nvSpPr>
-          <p:cNvPr id="9" name="Shape 7"/>
-          <p:cNvSpPr/>
-          <p:nvPr/>
-        </p:nvSpPr>
-        <p:spPr>
-          <a:xfrm>
-            <a:off x="7677768" y="1591056"/>
-            <a:ext cx="0" cy="3479292"/>
-          </a:xfrm>
-          <a:prstGeom prst="line">
-            <a:avLst/>
-          </a:prstGeom>
-          <a:noFill/>
-          <a:ln w="9525">
+              <a:t>one owner · 97 h</a:t>
+            </a:r>
+            <a:endParaRPr lang="en-US" sz="1100" dirty="0"/>
+          </a:p>
+        </p:txBody>
+      </p:sp>
+      <p:sp>
+        <p:nvSpPr>
+          <p:cNvPr id="10" name="Shape 8"/>
+          <p:cNvSpPr/>
+          <p:nvPr/>
+        </p:nvSpPr>
+        <p:spPr>
+          <a:xfrm>
+            <a:off x="768096" y="2761488"/>
+            <a:ext cx="4846320" cy="566928"/>
+          </a:xfrm>
+          <a:prstGeom prst="rect">
+            <a:avLst/>
+          </a:prstGeom>
+          <a:solidFill>
+            <a:srgbClr val="FFFFFF"/>
+          </a:solidFill>
+          <a:ln w="12700">
             <a:solidFill>
-              <a:srgbClr val="E3E9ED"/>
+              <a:srgbClr val="F0DADA"/>
             </a:solidFill>
             <a:prstDash val="solid"/>
           </a:ln>
@@ -3724,14 +3130,14 @@
       </p:sp>
       <p:sp>
         <p:nvSpPr>
-          <p:cNvPr id="10" name="Text 8"/>
-          <p:cNvSpPr/>
-          <p:nvPr/>
-        </p:nvSpPr>
-        <p:spPr>
-          <a:xfrm>
-            <a:off x="7705200" y="1371600"/>
-            <a:ext cx="731520" cy="219456"/>
+          <p:cNvPr id="11" name="Text 9"/>
+          <p:cNvSpPr/>
+          <p:nvPr/>
+        </p:nvSpPr>
+        <p:spPr>
+          <a:xfrm>
+            <a:off x="914400" y="2816352"/>
+            <a:ext cx="3291840" cy="274320"/>
           </a:xfrm>
           <a:prstGeom prst="rect">
             <a:avLst/>
@@ -3747,7 +3153,46 @@
               <a:buNone/>
             </a:pPr>
             <a:r>
-              <a:rPr lang="en-US" sz="1050" dirty="0">
+              <a:rPr lang="en-US" sz="1300" b="1" dirty="0">
+                <a:solidFill>
+                  <a:srgbClr val="1B1B1F"/>
+                </a:solidFill>
+                <a:latin typeface="Helvetica" pitchFamily="34" charset="0"/>
+                <a:ea typeface="Helvetica" pitchFamily="34" charset="-122"/>
+                <a:cs typeface="Helvetica" pitchFamily="34" charset="-120"/>
+              </a:rPr>
+              <a:t>Lane 2 — Reconstruction backend</a:t>
+            </a:r>
+            <a:endParaRPr lang="en-US" sz="1300" dirty="0"/>
+          </a:p>
+        </p:txBody>
+      </p:sp>
+      <p:sp>
+        <p:nvSpPr>
+          <p:cNvPr id="12" name="Text 10"/>
+          <p:cNvSpPr/>
+          <p:nvPr/>
+        </p:nvSpPr>
+        <p:spPr>
+          <a:xfrm>
+            <a:off x="914400" y="3054096"/>
+            <a:ext cx="4480560" cy="237744"/>
+          </a:xfrm>
+          <a:prstGeom prst="rect">
+            <a:avLst/>
+          </a:prstGeom>
+          <a:noFill/>
+          <a:ln/>
+        </p:spPr>
+        <p:txBody>
+          <a:bodyPr wrap="square" rtlCol="0" anchor="ctr"/>
+          <a:lstStyle/>
+          <a:p>
+            <a:pPr indent="0" marL="0">
+              <a:buNone/>
+            </a:pPr>
+            <a:r>
+              <a:rPr lang="en-US" sz="1100" dirty="0">
                 <a:solidFill>
                   <a:srgbClr val="6B7280"/>
                 </a:solidFill>
@@ -3755,30 +3200,32 @@
                 <a:ea typeface="Helvetica" pitchFamily="34" charset="-122"/>
                 <a:cs typeface="Helvetica" pitchFamily="34" charset="-120"/>
               </a:rPr>
-              <a:t>Nov</a:t>
-            </a:r>
-            <a:endParaRPr lang="en-US" sz="1050" dirty="0"/>
-          </a:p>
-        </p:txBody>
-      </p:sp>
-      <p:sp>
-        <p:nvSpPr>
-          <p:cNvPr id="11" name="Shape 9"/>
-          <p:cNvSpPr/>
-          <p:nvPr/>
-        </p:nvSpPr>
-        <p:spPr>
-          <a:xfrm>
-            <a:off x="10107829" y="1591056"/>
-            <a:ext cx="0" cy="3479292"/>
-          </a:xfrm>
-          <a:prstGeom prst="line">
-            <a:avLst/>
-          </a:prstGeom>
-          <a:noFill/>
-          <a:ln w="9525">
+              <a:t>one owner · 97 h</a:t>
+            </a:r>
+            <a:endParaRPr lang="en-US" sz="1100" dirty="0"/>
+          </a:p>
+        </p:txBody>
+      </p:sp>
+      <p:sp>
+        <p:nvSpPr>
+          <p:cNvPr id="13" name="Shape 11"/>
+          <p:cNvSpPr/>
+          <p:nvPr/>
+        </p:nvSpPr>
+        <p:spPr>
+          <a:xfrm>
+            <a:off x="768096" y="3419856"/>
+            <a:ext cx="4846320" cy="566928"/>
+          </a:xfrm>
+          <a:prstGeom prst="rect">
+            <a:avLst/>
+          </a:prstGeom>
+          <a:solidFill>
+            <a:srgbClr val="FFFFFF"/>
+          </a:solidFill>
+          <a:ln w="12700">
             <a:solidFill>
-              <a:srgbClr val="E3E9ED"/>
+              <a:srgbClr val="F0DADA"/>
             </a:solidFill>
             <a:prstDash val="solid"/>
           </a:ln>
@@ -3786,14 +3233,14 @@
       </p:sp>
       <p:sp>
         <p:nvSpPr>
-          <p:cNvPr id="12" name="Text 10"/>
-          <p:cNvSpPr/>
-          <p:nvPr/>
-        </p:nvSpPr>
-        <p:spPr>
-          <a:xfrm>
-            <a:off x="10135261" y="1371600"/>
-            <a:ext cx="731520" cy="219456"/>
+          <p:cNvPr id="14" name="Text 12"/>
+          <p:cNvSpPr/>
+          <p:nvPr/>
+        </p:nvSpPr>
+        <p:spPr>
+          <a:xfrm>
+            <a:off x="914400" y="3474720"/>
+            <a:ext cx="3291840" cy="274320"/>
           </a:xfrm>
           <a:prstGeom prst="rect">
             <a:avLst/>
@@ -3809,7 +3256,46 @@
               <a:buNone/>
             </a:pPr>
             <a:r>
-              <a:rPr lang="en-US" sz="1050" dirty="0">
+              <a:rPr lang="en-US" sz="1300" b="1" dirty="0">
+                <a:solidFill>
+                  <a:srgbClr val="1B1B1F"/>
+                </a:solidFill>
+                <a:latin typeface="Helvetica" pitchFamily="34" charset="0"/>
+                <a:ea typeface="Helvetica" pitchFamily="34" charset="-122"/>
+                <a:cs typeface="Helvetica" pitchFamily="34" charset="-120"/>
+              </a:rPr>
+              <a:t>Lane 3 — Inspection and truth</a:t>
+            </a:r>
+            <a:endParaRPr lang="en-US" sz="1300" dirty="0"/>
+          </a:p>
+        </p:txBody>
+      </p:sp>
+      <p:sp>
+        <p:nvSpPr>
+          <p:cNvPr id="15" name="Text 13"/>
+          <p:cNvSpPr/>
+          <p:nvPr/>
+        </p:nvSpPr>
+        <p:spPr>
+          <a:xfrm>
+            <a:off x="914400" y="3712464"/>
+            <a:ext cx="4480560" cy="237744"/>
+          </a:xfrm>
+          <a:prstGeom prst="rect">
+            <a:avLst/>
+          </a:prstGeom>
+          <a:noFill/>
+          <a:ln/>
+        </p:spPr>
+        <p:txBody>
+          <a:bodyPr wrap="square" rtlCol="0" anchor="ctr"/>
+          <a:lstStyle/>
+          <a:p>
+            <a:pPr indent="0" marL="0">
+              <a:buNone/>
+            </a:pPr>
+            <a:r>
+              <a:rPr lang="en-US" sz="1100" dirty="0">
                 <a:solidFill>
                   <a:srgbClr val="6B7280"/>
                 </a:solidFill>
@@ -3817,30 +3303,112 @@
                 <a:ea typeface="Helvetica" pitchFamily="34" charset="-122"/>
                 <a:cs typeface="Helvetica" pitchFamily="34" charset="-120"/>
               </a:rPr>
-              <a:t>Dec</a:t>
-            </a:r>
-            <a:endParaRPr lang="en-US" sz="1050" dirty="0"/>
-          </a:p>
-        </p:txBody>
-      </p:sp>
-      <p:sp>
-        <p:nvSpPr>
-          <p:cNvPr id="13" name="Shape 11"/>
-          <p:cNvSpPr/>
-          <p:nvPr/>
-        </p:nvSpPr>
-        <p:spPr>
-          <a:xfrm>
-            <a:off x="11484864" y="1591056"/>
-            <a:ext cx="0" cy="3479292"/>
-          </a:xfrm>
-          <a:prstGeom prst="line">
+              <a:t>one owner · 97 h</a:t>
+            </a:r>
+            <a:endParaRPr lang="en-US" sz="1100" dirty="0"/>
+          </a:p>
+        </p:txBody>
+      </p:sp>
+      <p:sp>
+        <p:nvSpPr>
+          <p:cNvPr id="16" name="Text 14"/>
+          <p:cNvSpPr/>
+          <p:nvPr/>
+        </p:nvSpPr>
+        <p:spPr>
+          <a:xfrm>
+            <a:off x="768096" y="4078224"/>
+            <a:ext cx="4846320" cy="274320"/>
+          </a:xfrm>
+          <a:prstGeom prst="rect">
             <a:avLst/>
           </a:prstGeom>
           <a:noFill/>
-          <a:ln w="9525">
+          <a:ln/>
+        </p:spPr>
+        <p:txBody>
+          <a:bodyPr wrap="square" rtlCol="0" anchor="ctr"/>
+          <a:lstStyle/>
+          <a:p>
+            <a:pPr indent="0" marL="0">
+              <a:buNone/>
+            </a:pPr>
+            <a:r>
+              <a:rPr lang="en-US" sz="1150" i="1" dirty="0">
+                <a:solidFill>
+                  <a:srgbClr val="6B7280"/>
+                </a:solidFill>
+                <a:latin typeface="Helvetica" pitchFamily="34" charset="0"/>
+                <a:ea typeface="Helvetica" pitchFamily="34" charset="-122"/>
+                <a:cs typeface="Helvetica" pitchFamily="34" charset="-120"/>
+              </a:rPr>
+              <a:t>Three people building three different things in parallel from day one.</a:t>
+            </a:r>
+            <a:endParaRPr lang="en-US" sz="1150" dirty="0"/>
+          </a:p>
+        </p:txBody>
+      </p:sp>
+      <p:sp>
+        <p:nvSpPr>
+          <p:cNvPr id="17" name="Text 15"/>
+          <p:cNvSpPr/>
+          <p:nvPr/>
+        </p:nvSpPr>
+        <p:spPr>
+          <a:xfrm>
+            <a:off x="5897880" y="2651760"/>
+            <a:ext cx="548640" cy="548640"/>
+          </a:xfrm>
+          <a:prstGeom prst="rect">
+            <a:avLst/>
+          </a:prstGeom>
+          <a:noFill/>
+          <a:ln/>
+        </p:spPr>
+        <p:txBody>
+          <a:bodyPr wrap="square" rtlCol="0" anchor="ctr"/>
+          <a:lstStyle/>
+          <a:p>
+            <a:pPr algn="ctr" indent="0" marL="0">
+              <a:buNone/>
+            </a:pPr>
+            <a:r>
+              <a:rPr lang="en-US" sz="3400" b="1" dirty="0">
+                <a:solidFill>
+                  <a:srgbClr val="16697A"/>
+                </a:solidFill>
+                <a:latin typeface="Helvetica" pitchFamily="34" charset="0"/>
+                <a:ea typeface="Helvetica" pitchFamily="34" charset="-122"/>
+                <a:cs typeface="Helvetica" pitchFamily="34" charset="-120"/>
+              </a:rPr>
+              <a:t>→</a:t>
+            </a:r>
+            <a:endParaRPr lang="en-US" sz="3400" dirty="0"/>
+          </a:p>
+        </p:txBody>
+      </p:sp>
+      <p:sp>
+        <p:nvSpPr>
+          <p:cNvPr id="18" name="Shape 16"/>
+          <p:cNvSpPr/>
+          <p:nvPr/>
+        </p:nvSpPr>
+        <p:spPr>
+          <a:xfrm>
+            <a:off x="6446520" y="1572768"/>
+            <a:ext cx="5175504" cy="2743200"/>
+          </a:xfrm>
+          <a:prstGeom prst="roundRect">
+            <a:avLst>
+              <a:gd name="adj" fmla="val 1667"/>
+            </a:avLst>
+          </a:prstGeom>
+          <a:solidFill>
+            <a:srgbClr val="EFF7F8"/>
+          </a:solidFill>
+          <a:ln w="12700">
             <a:solidFill>
-              <a:srgbClr val="E3E9ED"/>
+              <a:srgbClr val="BFDCE2"/>
             </a:solidFill>
             <a:prstDash val="solid"/>
           </a:ln>
@@ -3848,14 +3416,14 @@
       </p:sp>
       <p:sp>
         <p:nvSpPr>
-          <p:cNvPr id="14" name="Text 12"/>
-          <p:cNvSpPr/>
-          <p:nvPr/>
-        </p:nvSpPr>
-        <p:spPr>
-          <a:xfrm>
-            <a:off x="566928" y="1988820"/>
-            <a:ext cx="2286000" cy="182880"/>
+          <p:cNvPr id="19" name="Text 17"/>
+          <p:cNvSpPr/>
+          <p:nvPr/>
+        </p:nvSpPr>
+        <p:spPr>
+          <a:xfrm>
+            <a:off x="6647688" y="1700784"/>
+            <a:ext cx="4754880" cy="310896"/>
           </a:xfrm>
           <a:prstGeom prst="rect">
             <a:avLst/>
@@ -3871,81 +3439,40 @@
               <a:buNone/>
             </a:pPr>
             <a:r>
-              <a:rPr lang="en-US" sz="1050" b="1" dirty="0">
-                <a:solidFill>
-                  <a:srgbClr val="1B1B1F"/>
-                </a:solidFill>
-                <a:latin typeface="Helvetica" pitchFamily="34" charset="0"/>
-                <a:ea typeface="Helvetica" pitchFamily="34" charset="-122"/>
-                <a:cs typeface="Helvetica" pitchFamily="34" charset="-120"/>
-              </a:rPr>
-              <a:t>Foundations</a:t>
-            </a:r>
-            <a:endParaRPr lang="en-US" sz="1050" dirty="0"/>
-          </a:p>
-        </p:txBody>
-      </p:sp>
-      <p:sp>
-        <p:nvSpPr>
-          <p:cNvPr id="15" name="Text 13"/>
-          <p:cNvSpPr/>
-          <p:nvPr/>
-        </p:nvSpPr>
-        <p:spPr>
-          <a:xfrm>
-            <a:off x="566928" y="2144268"/>
-            <a:ext cx="2286000" cy="164592"/>
-          </a:xfrm>
-          <a:prstGeom prst="rect">
-            <a:avLst/>
-          </a:prstGeom>
-          <a:noFill/>
-          <a:ln/>
-        </p:spPr>
-        <p:txBody>
-          <a:bodyPr wrap="square" rtlCol="0" anchor="ctr"/>
-          <a:lstStyle/>
-          <a:p>
-            <a:pPr indent="0" marL="0">
-              <a:buNone/>
-            </a:pPr>
-            <a:r>
-              <a:rPr lang="en-US" sz="850" dirty="0">
-                <a:solidFill>
-                  <a:srgbClr val="6B7280"/>
-                </a:solidFill>
-                <a:latin typeface="Helvetica" pitchFamily="34" charset="0"/>
-                <a:ea typeface="Helvetica" pitchFamily="34" charset="-122"/>
-                <a:cs typeface="Helvetica" pitchFamily="34" charset="-120"/>
-              </a:rPr>
-              <a:t>all three</a:t>
-            </a:r>
-            <a:endParaRPr lang="en-US" sz="850" dirty="0"/>
-          </a:p>
-        </p:txBody>
-      </p:sp>
-      <p:sp>
-        <p:nvSpPr>
-          <p:cNvPr id="16" name="Shape 14"/>
-          <p:cNvSpPr/>
-          <p:nvPr/>
-        </p:nvSpPr>
-        <p:spPr>
-          <a:xfrm>
-            <a:off x="3060652" y="2016252"/>
-            <a:ext cx="1539039" cy="224028"/>
-          </a:xfrm>
-          <a:prstGeom prst="roundRect">
-            <a:avLst>
-              <a:gd name="adj" fmla="val 12245"/>
-            </a:avLst>
+              <a:rPr lang="en-US" sz="1300" b="1" spc="100" kern="0" dirty="0">
+                <a:solidFill>
+                  <a:srgbClr val="16697A"/>
+                </a:solidFill>
+                <a:latin typeface="Helvetica" pitchFamily="34" charset="0"/>
+                <a:ea typeface="Helvetica" pitchFamily="34" charset="-122"/>
+                <a:cs typeface="Helvetica" pitchFamily="34" charset="-120"/>
+              </a:rPr>
+              <a:t>NOW — as we are actually working</a:t>
+            </a:r>
+            <a:endParaRPr lang="en-US" sz="1300" dirty="0"/>
+          </a:p>
+        </p:txBody>
+      </p:sp>
+      <p:sp>
+        <p:nvSpPr>
+          <p:cNvPr id="20" name="Shape 18"/>
+          <p:cNvSpPr/>
+          <p:nvPr/>
+        </p:nvSpPr>
+        <p:spPr>
+          <a:xfrm>
+            <a:off x="6647688" y="2103120"/>
+            <a:ext cx="4773168" cy="566928"/>
+          </a:xfrm>
+          <a:prstGeom prst="rect">
+            <a:avLst/>
           </a:prstGeom>
           <a:solidFill>
-            <a:srgbClr val="15803D"/>
+            <a:srgbClr val="FFFFFF"/>
           </a:solidFill>
           <a:ln w="12700">
             <a:solidFill>
-              <a:srgbClr val="15803D"/>
+              <a:srgbClr val="CFE4E9"/>
             </a:solidFill>
             <a:prstDash val="solid"/>
           </a:ln>
@@ -3953,14 +3480,14 @@
       </p:sp>
       <p:sp>
         <p:nvSpPr>
-          <p:cNvPr id="17" name="Text 15"/>
-          <p:cNvSpPr/>
-          <p:nvPr/>
-        </p:nvSpPr>
-        <p:spPr>
-          <a:xfrm>
-            <a:off x="3115516" y="2029968"/>
-            <a:ext cx="914400" cy="201168"/>
+          <p:cNvPr id="21" name="Text 19"/>
+          <p:cNvSpPr/>
+          <p:nvPr/>
+        </p:nvSpPr>
+        <p:spPr>
+          <a:xfrm>
+            <a:off x="6793992" y="2157984"/>
+            <a:ext cx="3657600" cy="274320"/>
           </a:xfrm>
           <a:prstGeom prst="rect">
             <a:avLst/>
@@ -3976,30 +3503,30 @@
               <a:buNone/>
             </a:pPr>
             <a:r>
-              <a:rPr lang="en-US" sz="850" b="1" dirty="0">
-                <a:solidFill>
-                  <a:srgbClr val="FFFFFF"/>
-                </a:solidFill>
-                <a:latin typeface="Helvetica" pitchFamily="34" charset="0"/>
-                <a:ea typeface="Helvetica" pitchFamily="34" charset="-122"/>
-                <a:cs typeface="Helvetica" pitchFamily="34" charset="-120"/>
-              </a:rPr>
-              <a:t>done</a:t>
-            </a:r>
-            <a:endParaRPr lang="en-US" sz="850" dirty="0"/>
-          </a:p>
-        </p:txBody>
-      </p:sp>
-      <p:sp>
-        <p:nvSpPr>
-          <p:cNvPr id="18" name="Text 16"/>
-          <p:cNvSpPr/>
-          <p:nvPr/>
-        </p:nvSpPr>
-        <p:spPr>
-          <a:xfrm>
-            <a:off x="566928" y="2322576"/>
-            <a:ext cx="2286000" cy="182880"/>
+              <a:rPr lang="en-US" sz="1300" b="1" dirty="0">
+                <a:solidFill>
+                  <a:srgbClr val="1B1B1F"/>
+                </a:solidFill>
+                <a:latin typeface="Helvetica" pitchFamily="34" charset="0"/>
+                <a:ea typeface="Helvetica" pitchFamily="34" charset="-122"/>
+                <a:cs typeface="Helvetica" pitchFamily="34" charset="-120"/>
+              </a:rPr>
+              <a:t>Stage 1 — Foundations</a:t>
+            </a:r>
+            <a:endParaRPr lang="en-US" sz="1300" dirty="0"/>
+          </a:p>
+        </p:txBody>
+      </p:sp>
+      <p:sp>
+        <p:nvSpPr>
+          <p:cNvPr id="22" name="Text 20"/>
+          <p:cNvSpPr/>
+          <p:nvPr/>
+        </p:nvSpPr>
+        <p:spPr>
+          <a:xfrm>
+            <a:off x="6793992" y="2395728"/>
+            <a:ext cx="4480560" cy="237744"/>
           </a:xfrm>
           <a:prstGeom prst="rect">
             <a:avLst/>
@@ -4015,46 +3542,7 @@
               <a:buNone/>
             </a:pPr>
             <a:r>
-              <a:rPr lang="en-US" sz="1050" b="1" dirty="0">
-                <a:solidFill>
-                  <a:srgbClr val="1B1B1F"/>
-                </a:solidFill>
-                <a:latin typeface="Helvetica" pitchFamily="34" charset="0"/>
-                <a:ea typeface="Helvetica" pitchFamily="34" charset="-122"/>
-                <a:cs typeface="Helvetica" pitchFamily="34" charset="-120"/>
-              </a:rPr>
-              <a:t>Engine — parallel starts</a:t>
-            </a:r>
-            <a:endParaRPr lang="en-US" sz="1050" dirty="0"/>
-          </a:p>
-        </p:txBody>
-      </p:sp>
-      <p:sp>
-        <p:nvSpPr>
-          <p:cNvPr id="19" name="Text 17"/>
-          <p:cNvSpPr/>
-          <p:nvPr/>
-        </p:nvSpPr>
-        <p:spPr>
-          <a:xfrm>
-            <a:off x="566928" y="2478024"/>
-            <a:ext cx="2286000" cy="164592"/>
-          </a:xfrm>
-          <a:prstGeom prst="rect">
-            <a:avLst/>
-          </a:prstGeom>
-          <a:noFill/>
-          <a:ln/>
-        </p:spPr>
-        <p:txBody>
-          <a:bodyPr wrap="square" rtlCol="0" anchor="ctr"/>
-          <a:lstStyle/>
-          <a:p>
-            <a:pPr indent="0" marL="0">
-              <a:buNone/>
-            </a:pPr>
-            <a:r>
-              <a:rPr lang="en-US" sz="850" dirty="0">
+              <a:rPr lang="en-US" sz="1100" dirty="0">
                 <a:solidFill>
                   <a:srgbClr val="6B7280"/>
                 </a:solidFill>
@@ -4062,34 +3550,32 @@
                 <a:ea typeface="Helvetica" pitchFamily="34" charset="-122"/>
                 <a:cs typeface="Helvetica" pitchFamily="34" charset="-120"/>
               </a:rPr>
-              <a:t>R-01 · R-02 · R-11 · R-12</a:t>
-            </a:r>
-            <a:endParaRPr lang="en-US" sz="850" dirty="0"/>
-          </a:p>
-        </p:txBody>
-      </p:sp>
-      <p:sp>
-        <p:nvSpPr>
-          <p:cNvPr id="20" name="Shape 18"/>
-          <p:cNvSpPr/>
-          <p:nvPr/>
-        </p:nvSpPr>
-        <p:spPr>
-          <a:xfrm>
-            <a:off x="4437687" y="2350008"/>
-            <a:ext cx="1296033" cy="224028"/>
-          </a:xfrm>
-          <a:prstGeom prst="roundRect">
-            <a:avLst>
-              <a:gd name="adj" fmla="val 12245"/>
-            </a:avLst>
+              <a:t>all three · repo, contract, CI, pod, fixtures</a:t>
+            </a:r>
+            <a:endParaRPr lang="en-US" sz="1100" dirty="0"/>
+          </a:p>
+        </p:txBody>
+      </p:sp>
+      <p:sp>
+        <p:nvSpPr>
+          <p:cNvPr id="23" name="Shape 21"/>
+          <p:cNvSpPr/>
+          <p:nvPr/>
+        </p:nvSpPr>
+        <p:spPr>
+          <a:xfrm>
+            <a:off x="6647688" y="2761488"/>
+            <a:ext cx="4773168" cy="566928"/>
+          </a:xfrm>
+          <a:prstGeom prst="rect">
+            <a:avLst/>
           </a:prstGeom>
           <a:solidFill>
-            <a:srgbClr val="489FB5"/>
+            <a:srgbClr val="FFFFFF"/>
           </a:solidFill>
           <a:ln w="12700">
             <a:solidFill>
-              <a:srgbClr val="489FB5"/>
+              <a:srgbClr val="CFE4E9"/>
             </a:solidFill>
             <a:prstDash val="solid"/>
           </a:ln>
@@ -4097,14 +3583,14 @@
       </p:sp>
       <p:sp>
         <p:nvSpPr>
-          <p:cNvPr id="21" name="Text 19"/>
-          <p:cNvSpPr/>
-          <p:nvPr/>
-        </p:nvSpPr>
-        <p:spPr>
-          <a:xfrm>
-            <a:off x="566928" y="2656332"/>
-            <a:ext cx="2286000" cy="182880"/>
+          <p:cNvPr id="24" name="Text 22"/>
+          <p:cNvSpPr/>
+          <p:nvPr/>
+        </p:nvSpPr>
+        <p:spPr>
+          <a:xfrm>
+            <a:off x="6793992" y="2816352"/>
+            <a:ext cx="3657600" cy="274320"/>
           </a:xfrm>
           <a:prstGeom prst="rect">
             <a:avLst/>
@@ -4120,7 +3606,7 @@
               <a:buNone/>
             </a:pPr>
             <a:r>
-              <a:rPr lang="en-US" sz="1050" b="1" dirty="0">
+              <a:rPr lang="en-US" sz="1300" b="1" dirty="0">
                 <a:solidFill>
                   <a:srgbClr val="1B1B1F"/>
                 </a:solidFill>
@@ -4128,22 +3614,22 @@
                 <a:ea typeface="Helvetica" pitchFamily="34" charset="-122"/>
                 <a:cs typeface="Helvetica" pitchFamily="34" charset="-120"/>
               </a:rPr>
-              <a:t>Engine — the serial chain</a:t>
-            </a:r>
-            <a:endParaRPr lang="en-US" sz="1050" dirty="0"/>
-          </a:p>
-        </p:txBody>
-      </p:sp>
-      <p:sp>
-        <p:nvSpPr>
-          <p:cNvPr id="22" name="Text 20"/>
-          <p:cNvSpPr/>
-          <p:nvPr/>
-        </p:nvSpPr>
-        <p:spPr>
-          <a:xfrm>
-            <a:off x="566928" y="2811780"/>
-            <a:ext cx="2286000" cy="164592"/>
+              <a:t>Stage 2 — Reconstruction engine</a:t>
+            </a:r>
+            <a:endParaRPr lang="en-US" sz="1300" dirty="0"/>
+          </a:p>
+        </p:txBody>
+      </p:sp>
+      <p:sp>
+        <p:nvSpPr>
+          <p:cNvPr id="25" name="Text 23"/>
+          <p:cNvSpPr/>
+          <p:nvPr/>
+        </p:nvSpPr>
+        <p:spPr>
+          <a:xfrm>
+            <a:off x="6793992" y="3054096"/>
+            <a:ext cx="4480560" cy="237744"/>
           </a:xfrm>
           <a:prstGeom prst="rect">
             <a:avLst/>
@@ -4159,7 +3645,7 @@
               <a:buNone/>
             </a:pPr>
             <a:r>
-              <a:rPr lang="en-US" sz="850" dirty="0">
+              <a:rPr lang="en-US" sz="1100" dirty="0">
                 <a:solidFill>
                   <a:srgbClr val="6B7280"/>
                 </a:solidFill>
@@ -4167,34 +3653,32 @@
                 <a:ea typeface="Helvetica" pitchFamily="34" charset="-122"/>
                 <a:cs typeface="Helvetica" pitchFamily="34" charset="-120"/>
               </a:rPr>
-              <a:t>R-04→R-06→R-07→R-08→R-14→R-15</a:t>
-            </a:r>
-            <a:endParaRPr lang="en-US" sz="850" dirty="0"/>
-          </a:p>
-        </p:txBody>
-      </p:sp>
-      <p:sp>
-        <p:nvSpPr>
-          <p:cNvPr id="23" name="Shape 21"/>
-          <p:cNvSpPr/>
-          <p:nvPr/>
-        </p:nvSpPr>
-        <p:spPr>
-          <a:xfrm>
-            <a:off x="5085703" y="2683764"/>
-            <a:ext cx="2511063" cy="224028"/>
-          </a:xfrm>
-          <a:prstGeom prst="roundRect">
-            <a:avLst>
-              <a:gd name="adj" fmla="val 12245"/>
-            </a:avLst>
+              <a:t>all three · the hardest risk, retired first</a:t>
+            </a:r>
+            <a:endParaRPr lang="en-US" sz="1100" dirty="0"/>
+          </a:p>
+        </p:txBody>
+      </p:sp>
+      <p:sp>
+        <p:nvSpPr>
+          <p:cNvPr id="26" name="Shape 24"/>
+          <p:cNvSpPr/>
+          <p:nvPr/>
+        </p:nvSpPr>
+        <p:spPr>
+          <a:xfrm>
+            <a:off x="6647688" y="3419856"/>
+            <a:ext cx="4773168" cy="566928"/>
+          </a:xfrm>
+          <a:prstGeom prst="rect">
+            <a:avLst/>
           </a:prstGeom>
           <a:solidFill>
-            <a:srgbClr val="16697A"/>
+            <a:srgbClr val="FFFFFF"/>
           </a:solidFill>
           <a:ln w="12700">
             <a:solidFill>
-              <a:srgbClr val="16697A"/>
+              <a:srgbClr val="CFE4E9"/>
             </a:solidFill>
             <a:prstDash val="solid"/>
           </a:ln>
@@ -4202,14 +3686,14 @@
       </p:sp>
       <p:sp>
         <p:nvSpPr>
-          <p:cNvPr id="24" name="Text 22"/>
-          <p:cNvSpPr/>
-          <p:nvPr/>
-        </p:nvSpPr>
-        <p:spPr>
-          <a:xfrm>
-            <a:off x="5158855" y="2697480"/>
-            <a:ext cx="3108960" cy="201168"/>
+          <p:cNvPr id="27" name="Text 25"/>
+          <p:cNvSpPr/>
+          <p:nvPr/>
+        </p:nvSpPr>
+        <p:spPr>
+          <a:xfrm>
+            <a:off x="6793992" y="3474720"/>
+            <a:ext cx="3657600" cy="274320"/>
           </a:xfrm>
           <a:prstGeom prst="rect">
             <a:avLst/>
@@ -4225,30 +3709,30 @@
               <a:buNone/>
             </a:pPr>
             <a:r>
-              <a:rPr lang="en-US" sz="850" b="1" dirty="0">
-                <a:solidFill>
-                  <a:srgbClr val="FFFFFF"/>
-                </a:solidFill>
-                <a:latin typeface="Helvetica" pitchFamily="34" charset="0"/>
-                <a:ea typeface="Helvetica" pitchFamily="34" charset="-122"/>
-                <a:cs typeface="Helvetica" pitchFamily="34" charset="-120"/>
-              </a:rPr>
-              <a:t>critical chain — sets the finish date</a:t>
-            </a:r>
-            <a:endParaRPr lang="en-US" sz="850" dirty="0"/>
-          </a:p>
-        </p:txBody>
-      </p:sp>
-      <p:sp>
-        <p:nvSpPr>
-          <p:cNvPr id="25" name="Text 23"/>
-          <p:cNvSpPr/>
-          <p:nvPr/>
-        </p:nvSpPr>
-        <p:spPr>
-          <a:xfrm>
-            <a:off x="566928" y="2990088"/>
-            <a:ext cx="2286000" cy="182880"/>
+              <a:rPr lang="en-US" sz="1300" b="1" dirty="0">
+                <a:solidFill>
+                  <a:srgbClr val="1B1B1F"/>
+                </a:solidFill>
+                <a:latin typeface="Helvetica" pitchFamily="34" charset="0"/>
+                <a:ea typeface="Helvetica" pitchFamily="34" charset="-122"/>
+                <a:cs typeface="Helvetica" pitchFamily="34" charset="-120"/>
+              </a:rPr>
+              <a:t>Stage 3 — Capture · Inspection · AI</a:t>
+            </a:r>
+            <a:endParaRPr lang="en-US" sz="1300" dirty="0"/>
+          </a:p>
+        </p:txBody>
+      </p:sp>
+      <p:sp>
+        <p:nvSpPr>
+          <p:cNvPr id="28" name="Text 26"/>
+          <p:cNvSpPr/>
+          <p:nvPr/>
+        </p:nvSpPr>
+        <p:spPr>
+          <a:xfrm>
+            <a:off x="6793992" y="3712464"/>
+            <a:ext cx="4480560" cy="237744"/>
           </a:xfrm>
           <a:prstGeom prst="rect">
             <a:avLst/>
@@ -4264,30 +3748,30 @@
               <a:buNone/>
             </a:pPr>
             <a:r>
-              <a:rPr lang="en-US" sz="1050" b="1" dirty="0">
-                <a:solidFill>
-                  <a:srgbClr val="1B1B1F"/>
-                </a:solidFill>
-                <a:latin typeface="Helvetica" pitchFamily="34" charset="0"/>
-                <a:ea typeface="Helvetica" pitchFamily="34" charset="-122"/>
-                <a:cs typeface="Helvetica" pitchFamily="34" charset="-120"/>
-              </a:rPr>
-              <a:t>Engine — off-chain work</a:t>
-            </a:r>
-            <a:endParaRPr lang="en-US" sz="1050" dirty="0"/>
-          </a:p>
-        </p:txBody>
-      </p:sp>
-      <p:sp>
-        <p:nvSpPr>
-          <p:cNvPr id="26" name="Text 24"/>
-          <p:cNvSpPr/>
-          <p:nvPr/>
-        </p:nvSpPr>
-        <p:spPr>
-          <a:xfrm>
-            <a:off x="566928" y="3145536"/>
-            <a:ext cx="2286000" cy="164592"/>
+              <a:rPr lang="en-US" sz="1100" dirty="0">
+                <a:solidFill>
+                  <a:srgbClr val="6B7280"/>
+                </a:solidFill>
+                <a:latin typeface="Helvetica" pitchFamily="34" charset="0"/>
+                <a:ea typeface="Helvetica" pitchFamily="34" charset="-122"/>
+                <a:cs typeface="Helvetica" pitchFamily="34" charset="-120"/>
+              </a:rPr>
+              <a:t>built against something that already works</a:t>
+            </a:r>
+            <a:endParaRPr lang="en-US" sz="1100" dirty="0"/>
+          </a:p>
+        </p:txBody>
+      </p:sp>
+      <p:sp>
+        <p:nvSpPr>
+          <p:cNvPr id="29" name="Text 27"/>
+          <p:cNvSpPr/>
+          <p:nvPr/>
+        </p:nvSpPr>
+        <p:spPr>
+          <a:xfrm>
+            <a:off x="6647688" y="4078224"/>
+            <a:ext cx="4754880" cy="274320"/>
           </a:xfrm>
           <a:prstGeom prst="rect">
             <a:avLst/>
@@ -4303,7 +3787,7 @@
               <a:buNone/>
             </a:pPr>
             <a:r>
-              <a:rPr lang="en-US" sz="850" dirty="0">
+              <a:rPr lang="en-US" sz="1150" i="1" dirty="0">
                 <a:solidFill>
                   <a:srgbClr val="6B7280"/>
                 </a:solidFill>
@@ -4311,49 +3795,22 @@
                 <a:ea typeface="Helvetica" pitchFamily="34" charset="-122"/>
                 <a:cs typeface="Helvetica" pitchFamily="34" charset="-120"/>
               </a:rPr>
-              <a:t>R-03 · R-05 · R-09 · R-10 · R-13</a:t>
-            </a:r>
-            <a:endParaRPr lang="en-US" sz="850" dirty="0"/>
-          </a:p>
-        </p:txBody>
-      </p:sp>
-      <p:sp>
-        <p:nvSpPr>
-          <p:cNvPr id="27" name="Shape 25"/>
-          <p:cNvSpPr/>
-          <p:nvPr/>
-        </p:nvSpPr>
-        <p:spPr>
-          <a:xfrm>
-            <a:off x="5490713" y="3017520"/>
-            <a:ext cx="1782045" cy="224028"/>
-          </a:xfrm>
-          <a:prstGeom prst="roundRect">
-            <a:avLst>
-              <a:gd name="adj" fmla="val 12245"/>
-            </a:avLst>
-          </a:prstGeom>
-          <a:solidFill>
-            <a:srgbClr val="489FB5"/>
-          </a:solidFill>
-          <a:ln w="12700">
-            <a:solidFill>
-              <a:srgbClr val="489FB5"/>
-            </a:solidFill>
-            <a:prstDash val="solid"/>
-          </a:ln>
-        </p:spPr>
-      </p:sp>
-      <p:sp>
-        <p:nvSpPr>
-          <p:cNvPr id="28" name="Text 26"/>
-          <p:cNvSpPr/>
-          <p:nvPr/>
-        </p:nvSpPr>
-        <p:spPr>
-          <a:xfrm>
-            <a:off x="566928" y="3323844"/>
-            <a:ext cx="2286000" cy="182880"/>
+              <a:t>Lanes are now places in the repository, not people.</a:t>
+            </a:r>
+            <a:endParaRPr lang="en-US" sz="1150" dirty="0"/>
+          </a:p>
+        </p:txBody>
+      </p:sp>
+      <p:sp>
+        <p:nvSpPr>
+          <p:cNvPr id="30" name="Text 28"/>
+          <p:cNvSpPr/>
+          <p:nvPr/>
+        </p:nvSpPr>
+        <p:spPr>
+          <a:xfrm>
+            <a:off x="566928" y="4517136"/>
+            <a:ext cx="5486400" cy="310896"/>
           </a:xfrm>
           <a:prstGeom prst="rect">
             <a:avLst/>
@@ -4369,30 +3826,30 @@
               <a:buNone/>
             </a:pPr>
             <a:r>
-              <a:rPr lang="en-US" sz="1050" b="1" dirty="0">
-                <a:solidFill>
-                  <a:srgbClr val="1B1B1F"/>
-                </a:solidFill>
-                <a:latin typeface="Helvetica" pitchFamily="34" charset="0"/>
-                <a:ea typeface="Helvetica" pitchFamily="34" charset="-122"/>
-                <a:cs typeface="Helvetica" pitchFamily="34" charset="-120"/>
-              </a:rPr>
-              <a:t>Thin capture thread</a:t>
-            </a:r>
-            <a:endParaRPr lang="en-US" sz="1050" dirty="0"/>
-          </a:p>
-        </p:txBody>
-      </p:sp>
-      <p:sp>
-        <p:nvSpPr>
-          <p:cNvPr id="29" name="Text 27"/>
-          <p:cNvSpPr/>
-          <p:nvPr/>
-        </p:nvSpPr>
-        <p:spPr>
-          <a:xfrm>
-            <a:off x="566928" y="3479292"/>
-            <a:ext cx="2286000" cy="164592"/>
+              <a:rPr lang="en-US" sz="1500" b="1" dirty="0">
+                <a:solidFill>
+                  <a:srgbClr val="16697A"/>
+                </a:solidFill>
+                <a:latin typeface="Helvetica" pitchFamily="34" charset="0"/>
+                <a:ea typeface="Helvetica" pitchFamily="34" charset="-122"/>
+                <a:cs typeface="Helvetica" pitchFamily="34" charset="-120"/>
+              </a:rPr>
+              <a:t>Why we changed it</a:t>
+            </a:r>
+            <a:endParaRPr lang="en-US" sz="1500" dirty="0"/>
+          </a:p>
+        </p:txBody>
+      </p:sp>
+      <p:sp>
+        <p:nvSpPr>
+          <p:cNvPr id="31" name="Text 29"/>
+          <p:cNvSpPr/>
+          <p:nvPr/>
+        </p:nvSpPr>
+        <p:spPr>
+          <a:xfrm>
+            <a:off x="566928" y="4846320"/>
+            <a:ext cx="11055096" cy="1371600"/>
           </a:xfrm>
           <a:prstGeom prst="rect">
             <a:avLst/>
@@ -4404,11 +3861,75 @@
           <a:bodyPr wrap="square" rtlCol="0" anchor="ctr"/>
           <a:lstStyle/>
           <a:p>
+            <a:pPr marL="342900" indent="-342900">
+              <a:lnSpc>
+                <a:spcPct val="135000"/>
+              </a:lnSpc>
+              <a:buSzPct val="100000"/>
+              <a:buChar char="•"/>
+            </a:pPr>
+            <a:r>
+              <a:rPr lang="en-US" sz="1300" dirty="0">
+                <a:solidFill>
+                  <a:srgbClr val="1B1B1F"/>
+                </a:solidFill>
+                <a:latin typeface="Helvetica" pitchFamily="34" charset="0"/>
+                <a:ea typeface="Helvetica" pitchFamily="34" charset="-122"/>
+                <a:cs typeface="Helvetica" pitchFamily="34" charset="-120"/>
+              </a:rPr>
+              <a:t>Total hours do not set the finish date — the serial chain does. About 42 of the 93 engine hours can only run one story after another, so that chain advances at one person's pace no matter how many people are free. Adding people to it changes nothing.</a:t>
+            </a:r>
+            <a:endParaRPr lang="en-US" sz="1300" dirty="0"/>
+          </a:p>
+          <a:p>
+            <a:pPr marL="342900" indent="-342900">
+              <a:lnSpc>
+                <a:spcPct val="135000"/>
+              </a:lnSpc>
+              <a:buSzPct val="100000"/>
+              <a:buChar char="•"/>
+            </a:pPr>
+            <a:r>
+              <a:rPr lang="en-US" sz="1300" dirty="0">
+                <a:solidFill>
+                  <a:srgbClr val="1B1B1F"/>
+                </a:solidFill>
+                <a:latin typeface="Helvetica" pitchFamily="34" charset="0"/>
+                <a:ea typeface="Helvetica" pitchFamily="34" charset="-122"/>
+                <a:cs typeface="Helvetica" pitchFamily="34" charset="-120"/>
+              </a:rPr>
+              <a:t>The reconstruction engine is the hardest risk in the project. Retiring it first means everything downstream is built against something real instead of a guess.</a:t>
+            </a:r>
+            <a:endParaRPr lang="en-US" sz="1300" dirty="0"/>
+          </a:p>
+        </p:txBody>
+      </p:sp>
+      <p:sp>
+        <p:nvSpPr>
+          <p:cNvPr id="32" name="Text 30"/>
+          <p:cNvSpPr/>
+          <p:nvPr/>
+        </p:nvSpPr>
+        <p:spPr>
+          <a:xfrm>
+            <a:off x="566928" y="6400800"/>
+            <a:ext cx="5486400" cy="274320"/>
+          </a:xfrm>
+          <a:prstGeom prst="rect">
+            <a:avLst/>
+          </a:prstGeom>
+          <a:noFill/>
+          <a:ln/>
+        </p:spPr>
+        <p:txBody>
+          <a:bodyPr wrap="square" rtlCol="0" anchor="ctr"/>
+          <a:lstStyle/>
+          <a:p>
             <a:pPr indent="0" marL="0">
               <a:buNone/>
             </a:pPr>
             <a:r>
-              <a:rPr lang="en-US" sz="850" dirty="0">
+              <a:rPr lang="en-US" sz="950" dirty="0">
                 <a:solidFill>
                   <a:srgbClr val="6B7280"/>
                 </a:solidFill>
@@ -4416,1041 +3937,6 @@
                 <a:ea typeface="Helvetica" pitchFamily="34" charset="-122"/>
                 <a:cs typeface="Helvetica" pitchFamily="34" charset="-120"/>
               </a:rPr>
-              <a:t>C-01→C-03, in spare time</a:t>
-            </a:r>
-            <a:endParaRPr lang="en-US" sz="850" dirty="0"/>
-          </a:p>
-        </p:txBody>
-      </p:sp>
-      <p:sp>
-        <p:nvSpPr>
-          <p:cNvPr id="30" name="Shape 28"/>
-          <p:cNvSpPr/>
-          <p:nvPr/>
-        </p:nvSpPr>
-        <p:spPr>
-          <a:xfrm>
-            <a:off x="5490713" y="3351276"/>
-            <a:ext cx="972024" cy="224028"/>
-          </a:xfrm>
-          <a:prstGeom prst="roundRect">
-            <a:avLst>
-              <a:gd name="adj" fmla="val 12245"/>
-            </a:avLst>
-          </a:prstGeom>
-          <a:solidFill>
-            <a:srgbClr val="94A3B8"/>
-          </a:solidFill>
-          <a:ln w="12700">
-            <a:solidFill>
-              <a:srgbClr val="94A3B8"/>
-            </a:solidFill>
-            <a:prstDash val="solid"/>
-          </a:ln>
-        </p:spPr>
-      </p:sp>
-      <p:sp>
-        <p:nvSpPr>
-          <p:cNvPr id="31" name="Text 29"/>
-          <p:cNvSpPr/>
-          <p:nvPr/>
-        </p:nvSpPr>
-        <p:spPr>
-          <a:xfrm>
-            <a:off x="566928" y="3657600"/>
-            <a:ext cx="2286000" cy="182880"/>
-          </a:xfrm>
-          <a:prstGeom prst="rect">
-            <a:avLst/>
-          </a:prstGeom>
-          <a:noFill/>
-          <a:ln/>
-        </p:spPr>
-        <p:txBody>
-          <a:bodyPr wrap="square" rtlCol="0" anchor="ctr"/>
-          <a:lstStyle/>
-          <a:p>
-            <a:pPr indent="0" marL="0">
-              <a:buNone/>
-            </a:pPr>
-            <a:r>
-              <a:rPr lang="en-US" sz="1050" b="1" dirty="0">
-                <a:solidFill>
-                  <a:srgbClr val="1B1B1F"/>
-                </a:solidFill>
-                <a:latin typeface="Helvetica" pitchFamily="34" charset="0"/>
-                <a:ea typeface="Helvetica" pitchFamily="34" charset="-122"/>
-                <a:cs typeface="Helvetica" pitchFamily="34" charset="-120"/>
-              </a:rPr>
-              <a:t>Capture app</a:t>
-            </a:r>
-            <a:endParaRPr lang="en-US" sz="1050" dirty="0"/>
-          </a:p>
-        </p:txBody>
-      </p:sp>
-      <p:sp>
-        <p:nvSpPr>
-          <p:cNvPr id="32" name="Text 30"/>
-          <p:cNvSpPr/>
-          <p:nvPr/>
-        </p:nvSpPr>
-        <p:spPr>
-          <a:xfrm>
-            <a:off x="566928" y="3813048"/>
-            <a:ext cx="2286000" cy="164592"/>
-          </a:xfrm>
-          <a:prstGeom prst="rect">
-            <a:avLst/>
-          </a:prstGeom>
-          <a:noFill/>
-          <a:ln/>
-        </p:spPr>
-        <p:txBody>
-          <a:bodyPr wrap="square" rtlCol="0" anchor="ctr"/>
-          <a:lstStyle/>
-          <a:p>
-            <a:pPr indent="0" marL="0">
-              <a:buNone/>
-            </a:pPr>
-            <a:r>
-              <a:rPr lang="en-US" sz="850" dirty="0">
-                <a:solidFill>
-                  <a:srgbClr val="6B7280"/>
-                </a:solidFill>
-                <a:latin typeface="Helvetica" pitchFamily="34" charset="0"/>
-                <a:ea typeface="Helvetica" pitchFamily="34" charset="-122"/>
-                <a:cs typeface="Helvetica" pitchFamily="34" charset="-120"/>
-              </a:rPr>
-              <a:t>C-04→C-12</a:t>
-            </a:r>
-            <a:endParaRPr lang="en-US" sz="850" dirty="0"/>
-          </a:p>
-        </p:txBody>
-      </p:sp>
-      <p:sp>
-        <p:nvSpPr>
-          <p:cNvPr id="33" name="Shape 31"/>
-          <p:cNvSpPr/>
-          <p:nvPr/>
-        </p:nvSpPr>
-        <p:spPr>
-          <a:xfrm>
-            <a:off x="7353760" y="3685032"/>
-            <a:ext cx="2268057" cy="224028"/>
-          </a:xfrm>
-          <a:prstGeom prst="roundRect">
-            <a:avLst>
-              <a:gd name="adj" fmla="val 12245"/>
-            </a:avLst>
-          </a:prstGeom>
-          <a:solidFill>
-            <a:srgbClr val="489FB5"/>
-          </a:solidFill>
-          <a:ln w="12700">
-            <a:solidFill>
-              <a:srgbClr val="489FB5"/>
-            </a:solidFill>
-            <a:prstDash val="solid"/>
-          </a:ln>
-        </p:spPr>
-      </p:sp>
-      <p:sp>
-        <p:nvSpPr>
-          <p:cNvPr id="34" name="Text 32"/>
-          <p:cNvSpPr/>
-          <p:nvPr/>
-        </p:nvSpPr>
-        <p:spPr>
-          <a:xfrm>
-            <a:off x="566928" y="3991356"/>
-            <a:ext cx="2286000" cy="182880"/>
-          </a:xfrm>
-          <a:prstGeom prst="rect">
-            <a:avLst/>
-          </a:prstGeom>
-          <a:noFill/>
-          <a:ln/>
-        </p:spPr>
-        <p:txBody>
-          <a:bodyPr wrap="square" rtlCol="0" anchor="ctr"/>
-          <a:lstStyle/>
-          <a:p>
-            <a:pPr indent="0" marL="0">
-              <a:buNone/>
-            </a:pPr>
-            <a:r>
-              <a:rPr lang="en-US" sz="1050" b="1" dirty="0">
-                <a:solidFill>
-                  <a:srgbClr val="1B1B1F"/>
-                </a:solidFill>
-                <a:latin typeface="Helvetica" pitchFamily="34" charset="0"/>
-                <a:ea typeface="Helvetica" pitchFamily="34" charset="-122"/>
-                <a:cs typeface="Helvetica" pitchFamily="34" charset="-120"/>
-              </a:rPr>
-              <a:t>Inspection</a:t>
-            </a:r>
-            <a:endParaRPr lang="en-US" sz="1050" dirty="0"/>
-          </a:p>
-        </p:txBody>
-      </p:sp>
-      <p:sp>
-        <p:nvSpPr>
-          <p:cNvPr id="35" name="Text 33"/>
-          <p:cNvSpPr/>
-          <p:nvPr/>
-        </p:nvSpPr>
-        <p:spPr>
-          <a:xfrm>
-            <a:off x="566928" y="4146804"/>
-            <a:ext cx="2286000" cy="164592"/>
-          </a:xfrm>
-          <a:prstGeom prst="rect">
-            <a:avLst/>
-          </a:prstGeom>
-          <a:noFill/>
-          <a:ln/>
-        </p:spPr>
-        <p:txBody>
-          <a:bodyPr wrap="square" rtlCol="0" anchor="ctr"/>
-          <a:lstStyle/>
-          <a:p>
-            <a:pPr indent="0" marL="0">
-              <a:buNone/>
-            </a:pPr>
-            <a:r>
-              <a:rPr lang="en-US" sz="850" dirty="0">
-                <a:solidFill>
-                  <a:srgbClr val="6B7280"/>
-                </a:solidFill>
-                <a:latin typeface="Helvetica" pitchFamily="34" charset="0"/>
-                <a:ea typeface="Helvetica" pitchFamily="34" charset="-122"/>
-                <a:cs typeface="Helvetica" pitchFamily="34" charset="-120"/>
-              </a:rPr>
-              <a:t>I-01→I-10</a:t>
-            </a:r>
-            <a:endParaRPr lang="en-US" sz="850" dirty="0"/>
-          </a:p>
-        </p:txBody>
-      </p:sp>
-      <p:sp>
-        <p:nvSpPr>
-          <p:cNvPr id="36" name="Shape 34"/>
-          <p:cNvSpPr/>
-          <p:nvPr/>
-        </p:nvSpPr>
-        <p:spPr>
-          <a:xfrm>
-            <a:off x="7839772" y="4018788"/>
-            <a:ext cx="2349059" cy="224028"/>
-          </a:xfrm>
-          <a:prstGeom prst="roundRect">
-            <a:avLst>
-              <a:gd name="adj" fmla="val 12245"/>
-            </a:avLst>
-          </a:prstGeom>
-          <a:solidFill>
-            <a:srgbClr val="489FB5"/>
-          </a:solidFill>
-          <a:ln w="12700">
-            <a:solidFill>
-              <a:srgbClr val="489FB5"/>
-            </a:solidFill>
-            <a:prstDash val="solid"/>
-          </a:ln>
-        </p:spPr>
-      </p:sp>
-      <p:sp>
-        <p:nvSpPr>
-          <p:cNvPr id="37" name="Text 35"/>
-          <p:cNvSpPr/>
-          <p:nvPr/>
-        </p:nvSpPr>
-        <p:spPr>
-          <a:xfrm>
-            <a:off x="566928" y="4325112"/>
-            <a:ext cx="2286000" cy="182880"/>
-          </a:xfrm>
-          <a:prstGeom prst="rect">
-            <a:avLst/>
-          </a:prstGeom>
-          <a:noFill/>
-          <a:ln/>
-        </p:spPr>
-        <p:txBody>
-          <a:bodyPr wrap="square" rtlCol="0" anchor="ctr"/>
-          <a:lstStyle/>
-          <a:p>
-            <a:pPr indent="0" marL="0">
-              <a:buNone/>
-            </a:pPr>
-            <a:r>
-              <a:rPr lang="en-US" sz="1050" b="1" dirty="0">
-                <a:solidFill>
-                  <a:srgbClr val="1B1B1F"/>
-                </a:solidFill>
-                <a:latin typeface="Helvetica" pitchFamily="34" charset="0"/>
-                <a:ea typeface="Helvetica" pitchFamily="34" charset="-122"/>
-                <a:cs typeface="Helvetica" pitchFamily="34" charset="-120"/>
-              </a:rPr>
-              <a:t>Generative AI</a:t>
-            </a:r>
-            <a:endParaRPr lang="en-US" sz="1050" dirty="0"/>
-          </a:p>
-        </p:txBody>
-      </p:sp>
-      <p:sp>
-        <p:nvSpPr>
-          <p:cNvPr id="38" name="Text 36"/>
-          <p:cNvSpPr/>
-          <p:nvPr/>
-        </p:nvSpPr>
-        <p:spPr>
-          <a:xfrm>
-            <a:off x="566928" y="4480560"/>
-            <a:ext cx="2286000" cy="164592"/>
-          </a:xfrm>
-          <a:prstGeom prst="rect">
-            <a:avLst/>
-          </a:prstGeom>
-          <a:noFill/>
-          <a:ln/>
-        </p:spPr>
-        <p:txBody>
-          <a:bodyPr wrap="square" rtlCol="0" anchor="ctr"/>
-          <a:lstStyle/>
-          <a:p>
-            <a:pPr indent="0" marL="0">
-              <a:buNone/>
-            </a:pPr>
-            <a:r>
-              <a:rPr lang="en-US" sz="850" dirty="0">
-                <a:solidFill>
-                  <a:srgbClr val="6B7280"/>
-                </a:solidFill>
-                <a:latin typeface="Helvetica" pitchFamily="34" charset="0"/>
-                <a:ea typeface="Helvetica" pitchFamily="34" charset="-122"/>
-                <a:cs typeface="Helvetica" pitchFamily="34" charset="-120"/>
-              </a:rPr>
-              <a:t>A-01→A-09 · never cut</a:t>
-            </a:r>
-            <a:endParaRPr lang="en-US" sz="850" dirty="0"/>
-          </a:p>
-        </p:txBody>
-      </p:sp>
-      <p:sp>
-        <p:nvSpPr>
-          <p:cNvPr id="39" name="Shape 37"/>
-          <p:cNvSpPr/>
-          <p:nvPr/>
-        </p:nvSpPr>
-        <p:spPr>
-          <a:xfrm>
-            <a:off x="7191756" y="4352544"/>
-            <a:ext cx="2997075" cy="224028"/>
-          </a:xfrm>
-          <a:prstGeom prst="roundRect">
-            <a:avLst>
-              <a:gd name="adj" fmla="val 12245"/>
-            </a:avLst>
-          </a:prstGeom>
-          <a:solidFill>
-            <a:srgbClr val="7C3AED"/>
-          </a:solidFill>
-          <a:ln w="12700">
-            <a:solidFill>
-              <a:srgbClr val="7C3AED"/>
-            </a:solidFill>
-            <a:prstDash val="solid"/>
-          </a:ln>
-        </p:spPr>
-      </p:sp>
-      <p:sp>
-        <p:nvSpPr>
-          <p:cNvPr id="40" name="Text 38"/>
-          <p:cNvSpPr/>
-          <p:nvPr/>
-        </p:nvSpPr>
-        <p:spPr>
-          <a:xfrm>
-            <a:off x="566928" y="4658868"/>
-            <a:ext cx="2286000" cy="182880"/>
-          </a:xfrm>
-          <a:prstGeom prst="rect">
-            <a:avLst/>
-          </a:prstGeom>
-          <a:noFill/>
-          <a:ln/>
-        </p:spPr>
-        <p:txBody>
-          <a:bodyPr wrap="square" rtlCol="0" anchor="ctr"/>
-          <a:lstStyle/>
-          <a:p>
-            <a:pPr indent="0" marL="0">
-              <a:buNone/>
-            </a:pPr>
-            <a:r>
-              <a:rPr lang="en-US" sz="1050" b="1" dirty="0">
-                <a:solidFill>
-                  <a:srgbClr val="1B1B1F"/>
-                </a:solidFill>
-                <a:latin typeface="Helvetica" pitchFamily="34" charset="0"/>
-                <a:ea typeface="Helvetica" pitchFamily="34" charset="-122"/>
-                <a:cs typeface="Helvetica" pitchFamily="34" charset="-120"/>
-              </a:rPr>
-              <a:t>Integration · demo · defence</a:t>
-            </a:r>
-            <a:endParaRPr lang="en-US" sz="1050" dirty="0"/>
-          </a:p>
-        </p:txBody>
-      </p:sp>
-      <p:sp>
-        <p:nvSpPr>
-          <p:cNvPr id="41" name="Text 39"/>
-          <p:cNvSpPr/>
-          <p:nvPr/>
-        </p:nvSpPr>
-        <p:spPr>
-          <a:xfrm>
-            <a:off x="566928" y="4814316"/>
-            <a:ext cx="2286000" cy="164592"/>
-          </a:xfrm>
-          <a:prstGeom prst="rect">
-            <a:avLst/>
-          </a:prstGeom>
-          <a:noFill/>
-          <a:ln/>
-        </p:spPr>
-        <p:txBody>
-          <a:bodyPr wrap="square" rtlCol="0" anchor="ctr"/>
-          <a:lstStyle/>
-          <a:p>
-            <a:pPr indent="0" marL="0">
-              <a:buNone/>
-            </a:pPr>
-            <a:r>
-              <a:rPr lang="en-US" sz="850" dirty="0">
-                <a:solidFill>
-                  <a:srgbClr val="6B7280"/>
-                </a:solidFill>
-                <a:latin typeface="Helvetica" pitchFamily="34" charset="0"/>
-                <a:ea typeface="Helvetica" pitchFamily="34" charset="-122"/>
-                <a:cs typeface="Helvetica" pitchFamily="34" charset="-120"/>
-              </a:rPr>
-              <a:t>I1–I4, recorded backup</a:t>
-            </a:r>
-            <a:endParaRPr lang="en-US" sz="850" dirty="0"/>
-          </a:p>
-        </p:txBody>
-      </p:sp>
-      <p:sp>
-        <p:nvSpPr>
-          <p:cNvPr id="42" name="Shape 40"/>
-          <p:cNvSpPr/>
-          <p:nvPr/>
-        </p:nvSpPr>
-        <p:spPr>
-          <a:xfrm>
-            <a:off x="10188831" y="4686300"/>
-            <a:ext cx="1296033" cy="224028"/>
-          </a:xfrm>
-          <a:prstGeom prst="roundRect">
-            <a:avLst>
-              <a:gd name="adj" fmla="val 12245"/>
-            </a:avLst>
-          </a:prstGeom>
-          <a:solidFill>
-            <a:srgbClr val="475569"/>
-          </a:solidFill>
-          <a:ln w="12700">
-            <a:solidFill>
-              <a:srgbClr val="475569"/>
-            </a:solidFill>
-            <a:prstDash val="solid"/>
-          </a:ln>
-        </p:spPr>
-      </p:sp>
-      <p:sp>
-        <p:nvSpPr>
-          <p:cNvPr id="43" name="Shape 41"/>
-          <p:cNvSpPr/>
-          <p:nvPr/>
-        </p:nvSpPr>
-        <p:spPr>
-          <a:xfrm>
-            <a:off x="4621257" y="5052060"/>
-            <a:ext cx="118872" cy="155448"/>
-          </a:xfrm>
-          <a:prstGeom prst="diamond">
-            <a:avLst/>
-          </a:prstGeom>
-          <a:solidFill>
-            <a:srgbClr val="1B1B1F"/>
-          </a:solidFill>
-          <a:ln w="12700">
-            <a:solidFill>
-              <a:srgbClr val="1B1B1F"/>
-            </a:solidFill>
-            <a:prstDash val="solid"/>
-          </a:ln>
-        </p:spPr>
-      </p:sp>
-      <p:sp>
-        <p:nvSpPr>
-          <p:cNvPr id="44" name="Text 42"/>
-          <p:cNvSpPr/>
-          <p:nvPr/>
-        </p:nvSpPr>
-        <p:spPr>
-          <a:xfrm>
-            <a:off x="4424661" y="5216652"/>
-            <a:ext cx="512064" cy="182880"/>
-          </a:xfrm>
-          <a:prstGeom prst="rect">
-            <a:avLst/>
-          </a:prstGeom>
-          <a:noFill/>
-          <a:ln/>
-        </p:spPr>
-        <p:txBody>
-          <a:bodyPr wrap="square" rtlCol="0" anchor="ctr"/>
-          <a:lstStyle/>
-          <a:p>
-            <a:pPr algn="ctr" indent="0" marL="0">
-              <a:buNone/>
-            </a:pPr>
-            <a:r>
-              <a:rPr lang="en-US" sz="850" dirty="0">
-                <a:solidFill>
-                  <a:srgbClr val="1B1B1F"/>
-                </a:solidFill>
-                <a:latin typeface="Helvetica" pitchFamily="34" charset="0"/>
-                <a:ea typeface="Helvetica" pitchFamily="34" charset="-122"/>
-                <a:cs typeface="Helvetica" pitchFamily="34" charset="-120"/>
-              </a:rPr>
-              <a:t>M1</a:t>
-            </a:r>
-            <a:endParaRPr lang="en-US" sz="850" dirty="0"/>
-          </a:p>
-        </p:txBody>
-      </p:sp>
-      <p:sp>
-        <p:nvSpPr>
-          <p:cNvPr id="45" name="Shape 43"/>
-          <p:cNvSpPr/>
-          <p:nvPr/>
-        </p:nvSpPr>
-        <p:spPr>
-          <a:xfrm>
-            <a:off x="5755285" y="5052060"/>
-            <a:ext cx="118872" cy="155448"/>
-          </a:xfrm>
-          <a:prstGeom prst="diamond">
-            <a:avLst/>
-          </a:prstGeom>
-          <a:solidFill>
-            <a:srgbClr val="1B1B1F"/>
-          </a:solidFill>
-          <a:ln w="12700">
-            <a:solidFill>
-              <a:srgbClr val="1B1B1F"/>
-            </a:solidFill>
-            <a:prstDash val="solid"/>
-          </a:ln>
-        </p:spPr>
-      </p:sp>
-      <p:sp>
-        <p:nvSpPr>
-          <p:cNvPr id="46" name="Text 44"/>
-          <p:cNvSpPr/>
-          <p:nvPr/>
-        </p:nvSpPr>
-        <p:spPr>
-          <a:xfrm>
-            <a:off x="5558689" y="5216652"/>
-            <a:ext cx="512064" cy="182880"/>
-          </a:xfrm>
-          <a:prstGeom prst="rect">
-            <a:avLst/>
-          </a:prstGeom>
-          <a:noFill/>
-          <a:ln/>
-        </p:spPr>
-        <p:txBody>
-          <a:bodyPr wrap="square" rtlCol="0" anchor="ctr"/>
-          <a:lstStyle/>
-          <a:p>
-            <a:pPr algn="ctr" indent="0" marL="0">
-              <a:buNone/>
-            </a:pPr>
-            <a:r>
-              <a:rPr lang="en-US" sz="850" dirty="0">
-                <a:solidFill>
-                  <a:srgbClr val="1B1B1F"/>
-                </a:solidFill>
-                <a:latin typeface="Helvetica" pitchFamily="34" charset="0"/>
-                <a:ea typeface="Helvetica" pitchFamily="34" charset="-122"/>
-                <a:cs typeface="Helvetica" pitchFamily="34" charset="-120"/>
-              </a:rPr>
-              <a:t>M2</a:t>
-            </a:r>
-            <a:endParaRPr lang="en-US" sz="850" dirty="0"/>
-          </a:p>
-        </p:txBody>
-      </p:sp>
-      <p:sp>
-        <p:nvSpPr>
-          <p:cNvPr id="47" name="Shape 45"/>
-          <p:cNvSpPr/>
-          <p:nvPr/>
-        </p:nvSpPr>
-        <p:spPr>
-          <a:xfrm>
-            <a:off x="6322300" y="5052060"/>
-            <a:ext cx="118872" cy="155448"/>
-          </a:xfrm>
-          <a:prstGeom prst="diamond">
-            <a:avLst/>
-          </a:prstGeom>
-          <a:solidFill>
-            <a:srgbClr val="1B1B1F"/>
-          </a:solidFill>
-          <a:ln w="12700">
-            <a:solidFill>
-              <a:srgbClr val="1B1B1F"/>
-            </a:solidFill>
-            <a:prstDash val="solid"/>
-          </a:ln>
-        </p:spPr>
-      </p:sp>
-      <p:sp>
-        <p:nvSpPr>
-          <p:cNvPr id="48" name="Text 46"/>
-          <p:cNvSpPr/>
-          <p:nvPr/>
-        </p:nvSpPr>
-        <p:spPr>
-          <a:xfrm>
-            <a:off x="6125704" y="5216652"/>
-            <a:ext cx="512064" cy="182880"/>
-          </a:xfrm>
-          <a:prstGeom prst="rect">
-            <a:avLst/>
-          </a:prstGeom>
-          <a:noFill/>
-          <a:ln/>
-        </p:spPr>
-        <p:txBody>
-          <a:bodyPr wrap="square" rtlCol="0" anchor="ctr"/>
-          <a:lstStyle/>
-          <a:p>
-            <a:pPr algn="ctr" indent="0" marL="0">
-              <a:buNone/>
-            </a:pPr>
-            <a:r>
-              <a:rPr lang="en-US" sz="850" dirty="0">
-                <a:solidFill>
-                  <a:srgbClr val="1B1B1F"/>
-                </a:solidFill>
-                <a:latin typeface="Helvetica" pitchFamily="34" charset="0"/>
-                <a:ea typeface="Helvetica" pitchFamily="34" charset="-122"/>
-                <a:cs typeface="Helvetica" pitchFamily="34" charset="-120"/>
-              </a:rPr>
-              <a:t>M3</a:t>
-            </a:r>
-            <a:endParaRPr lang="en-US" sz="850" dirty="0"/>
-          </a:p>
-        </p:txBody>
-      </p:sp>
-      <p:sp>
-        <p:nvSpPr>
-          <p:cNvPr id="49" name="Shape 47"/>
-          <p:cNvSpPr/>
-          <p:nvPr/>
-        </p:nvSpPr>
-        <p:spPr>
-          <a:xfrm>
-            <a:off x="7456328" y="5052060"/>
-            <a:ext cx="118872" cy="155448"/>
-          </a:xfrm>
-          <a:prstGeom prst="diamond">
-            <a:avLst/>
-          </a:prstGeom>
-          <a:solidFill>
-            <a:srgbClr val="1B1B1F"/>
-          </a:solidFill>
-          <a:ln w="12700">
-            <a:solidFill>
-              <a:srgbClr val="1B1B1F"/>
-            </a:solidFill>
-            <a:prstDash val="solid"/>
-          </a:ln>
-        </p:spPr>
-      </p:sp>
-      <p:sp>
-        <p:nvSpPr>
-          <p:cNvPr id="50" name="Text 48"/>
-          <p:cNvSpPr/>
-          <p:nvPr/>
-        </p:nvSpPr>
-        <p:spPr>
-          <a:xfrm>
-            <a:off x="7259732" y="5216652"/>
-            <a:ext cx="512064" cy="182880"/>
-          </a:xfrm>
-          <a:prstGeom prst="rect">
-            <a:avLst/>
-          </a:prstGeom>
-          <a:noFill/>
-          <a:ln/>
-        </p:spPr>
-        <p:txBody>
-          <a:bodyPr wrap="square" rtlCol="0" anchor="ctr"/>
-          <a:lstStyle/>
-          <a:p>
-            <a:pPr algn="ctr" indent="0" marL="0">
-              <a:buNone/>
-            </a:pPr>
-            <a:r>
-              <a:rPr lang="en-US" sz="850" dirty="0">
-                <a:solidFill>
-                  <a:srgbClr val="1B1B1F"/>
-                </a:solidFill>
-                <a:latin typeface="Helvetica" pitchFamily="34" charset="0"/>
-                <a:ea typeface="Helvetica" pitchFamily="34" charset="-122"/>
-                <a:cs typeface="Helvetica" pitchFamily="34" charset="-120"/>
-              </a:rPr>
-              <a:t>M4</a:t>
-            </a:r>
-            <a:endParaRPr lang="en-US" sz="850" dirty="0"/>
-          </a:p>
-        </p:txBody>
-      </p:sp>
-      <p:sp>
-        <p:nvSpPr>
-          <p:cNvPr id="51" name="Shape 49"/>
-          <p:cNvSpPr/>
-          <p:nvPr/>
-        </p:nvSpPr>
-        <p:spPr>
-          <a:xfrm>
-            <a:off x="8590357" y="5052060"/>
-            <a:ext cx="118872" cy="155448"/>
-          </a:xfrm>
-          <a:prstGeom prst="diamond">
-            <a:avLst/>
-          </a:prstGeom>
-          <a:solidFill>
-            <a:srgbClr val="1B1B1F"/>
-          </a:solidFill>
-          <a:ln w="12700">
-            <a:solidFill>
-              <a:srgbClr val="1B1B1F"/>
-            </a:solidFill>
-            <a:prstDash val="solid"/>
-          </a:ln>
-        </p:spPr>
-      </p:sp>
-      <p:sp>
-        <p:nvSpPr>
-          <p:cNvPr id="52" name="Text 50"/>
-          <p:cNvSpPr/>
-          <p:nvPr/>
-        </p:nvSpPr>
-        <p:spPr>
-          <a:xfrm>
-            <a:off x="8393761" y="5216652"/>
-            <a:ext cx="512064" cy="182880"/>
-          </a:xfrm>
-          <a:prstGeom prst="rect">
-            <a:avLst/>
-          </a:prstGeom>
-          <a:noFill/>
-          <a:ln/>
-        </p:spPr>
-        <p:txBody>
-          <a:bodyPr wrap="square" rtlCol="0" anchor="ctr"/>
-          <a:lstStyle/>
-          <a:p>
-            <a:pPr algn="ctr" indent="0" marL="0">
-              <a:buNone/>
-            </a:pPr>
-            <a:r>
-              <a:rPr lang="en-US" sz="850" dirty="0">
-                <a:solidFill>
-                  <a:srgbClr val="1B1B1F"/>
-                </a:solidFill>
-                <a:latin typeface="Helvetica" pitchFamily="34" charset="0"/>
-                <a:ea typeface="Helvetica" pitchFamily="34" charset="-122"/>
-                <a:cs typeface="Helvetica" pitchFamily="34" charset="-120"/>
-              </a:rPr>
-              <a:t>M5</a:t>
-            </a:r>
-            <a:endParaRPr lang="en-US" sz="850" dirty="0"/>
-          </a:p>
-        </p:txBody>
-      </p:sp>
-      <p:sp>
-        <p:nvSpPr>
-          <p:cNvPr id="53" name="Shape 51"/>
-          <p:cNvSpPr/>
-          <p:nvPr/>
-        </p:nvSpPr>
-        <p:spPr>
-          <a:xfrm>
-            <a:off x="10291399" y="5052060"/>
-            <a:ext cx="118872" cy="155448"/>
-          </a:xfrm>
-          <a:prstGeom prst="diamond">
-            <a:avLst/>
-          </a:prstGeom>
-          <a:solidFill>
-            <a:srgbClr val="1B1B1F"/>
-          </a:solidFill>
-          <a:ln w="12700">
-            <a:solidFill>
-              <a:srgbClr val="1B1B1F"/>
-            </a:solidFill>
-            <a:prstDash val="solid"/>
-          </a:ln>
-        </p:spPr>
-      </p:sp>
-      <p:sp>
-        <p:nvSpPr>
-          <p:cNvPr id="54" name="Text 52"/>
-          <p:cNvSpPr/>
-          <p:nvPr/>
-        </p:nvSpPr>
-        <p:spPr>
-          <a:xfrm>
-            <a:off x="10094803" y="5216652"/>
-            <a:ext cx="512064" cy="182880"/>
-          </a:xfrm>
-          <a:prstGeom prst="rect">
-            <a:avLst/>
-          </a:prstGeom>
-          <a:noFill/>
-          <a:ln/>
-        </p:spPr>
-        <p:txBody>
-          <a:bodyPr wrap="square" rtlCol="0" anchor="ctr"/>
-          <a:lstStyle/>
-          <a:p>
-            <a:pPr algn="ctr" indent="0" marL="0">
-              <a:buNone/>
-            </a:pPr>
-            <a:r>
-              <a:rPr lang="en-US" sz="850" dirty="0">
-                <a:solidFill>
-                  <a:srgbClr val="1B1B1F"/>
-                </a:solidFill>
-                <a:latin typeface="Helvetica" pitchFamily="34" charset="0"/>
-                <a:ea typeface="Helvetica" pitchFamily="34" charset="-122"/>
-                <a:cs typeface="Helvetica" pitchFamily="34" charset="-120"/>
-              </a:rPr>
-              <a:t>M7</a:t>
-            </a:r>
-            <a:endParaRPr lang="en-US" sz="850" dirty="0"/>
-          </a:p>
-        </p:txBody>
-      </p:sp>
-      <p:sp>
-        <p:nvSpPr>
-          <p:cNvPr id="55" name="Shape 53"/>
-          <p:cNvSpPr/>
-          <p:nvPr/>
-        </p:nvSpPr>
-        <p:spPr>
-          <a:xfrm>
-            <a:off x="11425428" y="5052060"/>
-            <a:ext cx="118872" cy="155448"/>
-          </a:xfrm>
-          <a:prstGeom prst="diamond">
-            <a:avLst/>
-          </a:prstGeom>
-          <a:solidFill>
-            <a:srgbClr val="1B1B1F"/>
-          </a:solidFill>
-          <a:ln w="12700">
-            <a:solidFill>
-              <a:srgbClr val="1B1B1F"/>
-            </a:solidFill>
-            <a:prstDash val="solid"/>
-          </a:ln>
-        </p:spPr>
-      </p:sp>
-      <p:sp>
-        <p:nvSpPr>
-          <p:cNvPr id="56" name="Text 54"/>
-          <p:cNvSpPr/>
-          <p:nvPr/>
-        </p:nvSpPr>
-        <p:spPr>
-          <a:xfrm>
-            <a:off x="11228832" y="5216652"/>
-            <a:ext cx="512064" cy="182880"/>
-          </a:xfrm>
-          <a:prstGeom prst="rect">
-            <a:avLst/>
-          </a:prstGeom>
-          <a:noFill/>
-          <a:ln/>
-        </p:spPr>
-        <p:txBody>
-          <a:bodyPr wrap="square" rtlCol="0" anchor="ctr"/>
-          <a:lstStyle/>
-          <a:p>
-            <a:pPr algn="ctr" indent="0" marL="0">
-              <a:buNone/>
-            </a:pPr>
-            <a:r>
-              <a:rPr lang="en-US" sz="850" dirty="0">
-                <a:solidFill>
-                  <a:srgbClr val="1B1B1F"/>
-                </a:solidFill>
-                <a:latin typeface="Helvetica" pitchFamily="34" charset="0"/>
-                <a:ea typeface="Helvetica" pitchFamily="34" charset="-122"/>
-                <a:cs typeface="Helvetica" pitchFamily="34" charset="-120"/>
-              </a:rPr>
-              <a:t>M8</a:t>
-            </a:r>
-            <a:endParaRPr lang="en-US" sz="850" dirty="0"/>
-          </a:p>
-        </p:txBody>
-      </p:sp>
-      <p:sp>
-        <p:nvSpPr>
-          <p:cNvPr id="57" name="Shape 55"/>
-          <p:cNvSpPr/>
-          <p:nvPr/>
-        </p:nvSpPr>
-        <p:spPr>
-          <a:xfrm>
-            <a:off x="4113679" y="1591056"/>
-            <a:ext cx="0" cy="3479292"/>
-          </a:xfrm>
-          <a:prstGeom prst="line">
-            <a:avLst/>
-          </a:prstGeom>
-          <a:noFill/>
-          <a:ln w="19050">
-            <a:solidFill>
-              <a:srgbClr val="B91C1C"/>
-            </a:solidFill>
-            <a:prstDash val="dash"/>
-          </a:ln>
-        </p:spPr>
-      </p:sp>
-      <p:sp>
-        <p:nvSpPr>
-          <p:cNvPr id="58" name="Text 56"/>
-          <p:cNvSpPr/>
-          <p:nvPr/>
-        </p:nvSpPr>
-        <p:spPr>
-          <a:xfrm>
-            <a:off x="3821071" y="1353312"/>
-            <a:ext cx="640080" cy="201168"/>
-          </a:xfrm>
-          <a:prstGeom prst="rect">
-            <a:avLst/>
-          </a:prstGeom>
-          <a:noFill/>
-          <a:ln/>
-        </p:spPr>
-        <p:txBody>
-          <a:bodyPr wrap="square" rtlCol="0" anchor="ctr"/>
-          <a:lstStyle/>
-          <a:p>
-            <a:pPr algn="ctr" indent="0" marL="0">
-              <a:buNone/>
-            </a:pPr>
-            <a:r>
-              <a:rPr lang="en-US" sz="900" b="1" dirty="0">
-                <a:solidFill>
-                  <a:srgbClr val="B91C1C"/>
-                </a:solidFill>
-                <a:latin typeface="Helvetica" pitchFamily="34" charset="0"/>
-                <a:ea typeface="Helvetica" pitchFamily="34" charset="-122"/>
-                <a:cs typeface="Helvetica" pitchFamily="34" charset="-120"/>
-              </a:rPr>
-              <a:t>today</a:t>
-            </a:r>
-            <a:endParaRPr lang="en-US" sz="900" dirty="0"/>
-          </a:p>
-        </p:txBody>
-      </p:sp>
-      <p:sp>
-        <p:nvSpPr>
-          <p:cNvPr id="59" name="Text 57"/>
-          <p:cNvSpPr/>
-          <p:nvPr/>
-        </p:nvSpPr>
-        <p:spPr>
-          <a:xfrm>
-            <a:off x="566928" y="5687568"/>
-            <a:ext cx="11055096" cy="457200"/>
-          </a:xfrm>
-          <a:prstGeom prst="rect">
-            <a:avLst/>
-          </a:prstGeom>
-          <a:noFill/>
-          <a:ln/>
-        </p:spPr>
-        <p:txBody>
-          <a:bodyPr wrap="square" rtlCol="0" anchor="ctr"/>
-          <a:lstStyle/>
-          <a:p>
-            <a:pPr indent="0" marL="0">
-              <a:buNone/>
-            </a:pPr>
-            <a:r>
-              <a:rPr lang="en-US" sz="1200" dirty="0">
-                <a:solidFill>
-                  <a:srgbClr val="B45309"/>
-                </a:solidFill>
-                <a:latin typeface="Helvetica" pitchFamily="34" charset="0"/>
-                <a:ea typeface="Helvetica" pitchFamily="34" charset="-122"/>
-                <a:cs typeface="Helvetica" pitchFamily="34" charset="-120"/>
-              </a:rPr>
-              <a:t>M1 (25 Sept) is at risk. The chain needs ~40 hours to reach a working endpoint — about four and a half weeks from a 3 Sept start, which lands in early October, not late September. We are flagging it now rather than at the gate.</a:t>
-            </a:r>
-            <a:endParaRPr lang="en-US" sz="1200" dirty="0"/>
-          </a:p>
-        </p:txBody>
-      </p:sp>
-      <p:sp>
-        <p:nvSpPr>
-          <p:cNvPr id="60" name="Text 58"/>
-          <p:cNvSpPr/>
-          <p:nvPr/>
-        </p:nvSpPr>
-        <p:spPr>
-          <a:xfrm>
-            <a:off x="566928" y="6400800"/>
-            <a:ext cx="5486400" cy="274320"/>
-          </a:xfrm>
-          <a:prstGeom prst="rect">
-            <a:avLst/>
-          </a:prstGeom>
-          <a:noFill/>
-          <a:ln/>
-        </p:spPr>
-        <p:txBody>
-          <a:bodyPr wrap="square" rtlCol="0" anchor="ctr"/>
-          <a:lstStyle/>
-          <a:p>
-            <a:pPr indent="0" marL="0">
-              <a:buNone/>
-            </a:pPr>
-            <a:r>
-              <a:rPr lang="en-US" sz="950" dirty="0">
-                <a:solidFill>
-                  <a:srgbClr val="6B7280"/>
-                </a:solidFill>
-                <a:latin typeface="Helvetica" pitchFamily="34" charset="0"/>
-                <a:ea typeface="Helvetica" pitchFamily="34" charset="-122"/>
-                <a:cs typeface="Helvetica" pitchFamily="34" charset="-120"/>
-              </a:rPr>
               <a:t>ProofShape · CS595 · 18 Sept 2026</a:t>
             </a:r>
             <a:endParaRPr lang="en-US" sz="950" dirty="0"/>
@@ -5459,7 +3945,7 @@
       </p:sp>
       <p:sp>
         <p:nvSpPr>
-          <p:cNvPr id="61" name="Text 59"/>
+          <p:cNvPr id="33" name="Text 31"/>
           <p:cNvSpPr/>
           <p:nvPr/>
         </p:nvSpPr>
@@ -5561,7 +4047,7 @@
                 <a:ea typeface="Helvetica" pitchFamily="34" charset="-122"/>
                 <a:cs typeface="Helvetica" pitchFamily="34" charset="-120"/>
               </a:rPr>
-              <a:t>QUESTION 3</a:t>
+              <a:t>THE SAME MILESTONES, A DIFFERENT SHAPE OF WORK</a:t>
             </a:r>
             <a:endParaRPr lang="en-US" sz="1100" dirty="0"/>
           </a:p>
@@ -5600,7 +4086,7 @@
                 <a:ea typeface="Helvetica" pitchFamily="34" charset="-122"/>
                 <a:cs typeface="Helvetica" pitchFamily="34" charset="-120"/>
               </a:rPr>
-              <a:t>What slipped, and why</a:t>
+              <a:t>Re-planned timeline</a:t>
             </a:r>
             <a:endParaRPr lang="en-US" sz="3000" dirty="0"/>
           </a:p>
@@ -5628,14 +4114,37 @@
       </p:sp>
       <p:sp>
         <p:nvSpPr>
-          <p:cNvPr id="5" name="Text 3"/>
-          <p:cNvSpPr/>
-          <p:nvPr/>
-        </p:nvSpPr>
-        <p:spPr>
-          <a:xfrm>
-            <a:off x="566928" y="1536192"/>
-            <a:ext cx="11055096" cy="4572000"/>
+          <p:cNvPr id="5" name="Shape 3"/>
+          <p:cNvSpPr/>
+          <p:nvPr/>
+        </p:nvSpPr>
+        <p:spPr>
+          <a:xfrm>
+            <a:off x="2898648" y="1591056"/>
+            <a:ext cx="0" cy="3479292"/>
+          </a:xfrm>
+          <a:prstGeom prst="line">
+            <a:avLst/>
+          </a:prstGeom>
+          <a:noFill/>
+          <a:ln w="9525">
+            <a:solidFill>
+              <a:srgbClr val="E3E9ED"/>
+            </a:solidFill>
+            <a:prstDash val="solid"/>
+          </a:ln>
+        </p:spPr>
+      </p:sp>
+      <p:sp>
+        <p:nvSpPr>
+          <p:cNvPr id="6" name="Text 4"/>
+          <p:cNvSpPr/>
+          <p:nvPr/>
+        </p:nvSpPr>
+        <p:spPr>
+          <a:xfrm>
+            <a:off x="2926080" y="1371600"/>
+            <a:ext cx="731520" cy="219456"/>
           </a:xfrm>
           <a:prstGeom prst="rect">
             <a:avLst/>
@@ -5647,15 +4156,1792 @@
           <a:bodyPr wrap="square" rtlCol="0" anchor="ctr"/>
           <a:lstStyle/>
           <a:p>
-            <a:pPr marL="342900" indent="-342900">
-              <a:lnSpc>
-                <a:spcPct val="135000"/>
-              </a:lnSpc>
-              <a:buSzPct val="100000"/>
-              <a:buChar char="•"/>
-            </a:pPr>
-            <a:r>
-              <a:rPr lang="en-US" sz="1300" b="1" dirty="0">
+            <a:pPr indent="0" marL="0">
+              <a:buNone/>
+            </a:pPr>
+            <a:r>
+              <a:rPr lang="en-US" sz="1050" dirty="0">
+                <a:solidFill>
+                  <a:srgbClr val="6B7280"/>
+                </a:solidFill>
+                <a:latin typeface="Helvetica" pitchFamily="34" charset="0"/>
+                <a:ea typeface="Helvetica" pitchFamily="34" charset="-122"/>
+                <a:cs typeface="Helvetica" pitchFamily="34" charset="-120"/>
+              </a:rPr>
+              <a:t>Sep</a:t>
+            </a:r>
+            <a:endParaRPr lang="en-US" sz="1050" dirty="0"/>
+          </a:p>
+        </p:txBody>
+      </p:sp>
+      <p:sp>
+        <p:nvSpPr>
+          <p:cNvPr id="7" name="Shape 5"/>
+          <p:cNvSpPr/>
+          <p:nvPr/>
+        </p:nvSpPr>
+        <p:spPr>
+          <a:xfrm>
+            <a:off x="5166705" y="1591056"/>
+            <a:ext cx="0" cy="3479292"/>
+          </a:xfrm>
+          <a:prstGeom prst="line">
+            <a:avLst/>
+          </a:prstGeom>
+          <a:noFill/>
+          <a:ln w="9525">
+            <a:solidFill>
+              <a:srgbClr val="E3E9ED"/>
+            </a:solidFill>
+            <a:prstDash val="solid"/>
+          </a:ln>
+        </p:spPr>
+      </p:sp>
+      <p:sp>
+        <p:nvSpPr>
+          <p:cNvPr id="8" name="Text 6"/>
+          <p:cNvSpPr/>
+          <p:nvPr/>
+        </p:nvSpPr>
+        <p:spPr>
+          <a:xfrm>
+            <a:off x="5194137" y="1371600"/>
+            <a:ext cx="731520" cy="219456"/>
+          </a:xfrm>
+          <a:prstGeom prst="rect">
+            <a:avLst/>
+          </a:prstGeom>
+          <a:noFill/>
+          <a:ln/>
+        </p:spPr>
+        <p:txBody>
+          <a:bodyPr wrap="square" rtlCol="0" anchor="ctr"/>
+          <a:lstStyle/>
+          <a:p>
+            <a:pPr indent="0" marL="0">
+              <a:buNone/>
+            </a:pPr>
+            <a:r>
+              <a:rPr lang="en-US" sz="1050" dirty="0">
+                <a:solidFill>
+                  <a:srgbClr val="6B7280"/>
+                </a:solidFill>
+                <a:latin typeface="Helvetica" pitchFamily="34" charset="0"/>
+                <a:ea typeface="Helvetica" pitchFamily="34" charset="-122"/>
+                <a:cs typeface="Helvetica" pitchFamily="34" charset="-120"/>
+              </a:rPr>
+              <a:t>Oct</a:t>
+            </a:r>
+            <a:endParaRPr lang="en-US" sz="1050" dirty="0"/>
+          </a:p>
+        </p:txBody>
+      </p:sp>
+      <p:sp>
+        <p:nvSpPr>
+          <p:cNvPr id="9" name="Shape 7"/>
+          <p:cNvSpPr/>
+          <p:nvPr/>
+        </p:nvSpPr>
+        <p:spPr>
+          <a:xfrm>
+            <a:off x="7677768" y="1591056"/>
+            <a:ext cx="0" cy="3479292"/>
+          </a:xfrm>
+          <a:prstGeom prst="line">
+            <a:avLst/>
+          </a:prstGeom>
+          <a:noFill/>
+          <a:ln w="9525">
+            <a:solidFill>
+              <a:srgbClr val="E3E9ED"/>
+            </a:solidFill>
+            <a:prstDash val="solid"/>
+          </a:ln>
+        </p:spPr>
+      </p:sp>
+      <p:sp>
+        <p:nvSpPr>
+          <p:cNvPr id="10" name="Text 8"/>
+          <p:cNvSpPr/>
+          <p:nvPr/>
+        </p:nvSpPr>
+        <p:spPr>
+          <a:xfrm>
+            <a:off x="7705200" y="1371600"/>
+            <a:ext cx="731520" cy="219456"/>
+          </a:xfrm>
+          <a:prstGeom prst="rect">
+            <a:avLst/>
+          </a:prstGeom>
+          <a:noFill/>
+          <a:ln/>
+        </p:spPr>
+        <p:txBody>
+          <a:bodyPr wrap="square" rtlCol="0" anchor="ctr"/>
+          <a:lstStyle/>
+          <a:p>
+            <a:pPr indent="0" marL="0">
+              <a:buNone/>
+            </a:pPr>
+            <a:r>
+              <a:rPr lang="en-US" sz="1050" dirty="0">
+                <a:solidFill>
+                  <a:srgbClr val="6B7280"/>
+                </a:solidFill>
+                <a:latin typeface="Helvetica" pitchFamily="34" charset="0"/>
+                <a:ea typeface="Helvetica" pitchFamily="34" charset="-122"/>
+                <a:cs typeface="Helvetica" pitchFamily="34" charset="-120"/>
+              </a:rPr>
+              <a:t>Nov</a:t>
+            </a:r>
+            <a:endParaRPr lang="en-US" sz="1050" dirty="0"/>
+          </a:p>
+        </p:txBody>
+      </p:sp>
+      <p:sp>
+        <p:nvSpPr>
+          <p:cNvPr id="11" name="Shape 9"/>
+          <p:cNvSpPr/>
+          <p:nvPr/>
+        </p:nvSpPr>
+        <p:spPr>
+          <a:xfrm>
+            <a:off x="10107829" y="1591056"/>
+            <a:ext cx="0" cy="3479292"/>
+          </a:xfrm>
+          <a:prstGeom prst="line">
+            <a:avLst/>
+          </a:prstGeom>
+          <a:noFill/>
+          <a:ln w="9525">
+            <a:solidFill>
+              <a:srgbClr val="E3E9ED"/>
+            </a:solidFill>
+            <a:prstDash val="solid"/>
+          </a:ln>
+        </p:spPr>
+      </p:sp>
+      <p:sp>
+        <p:nvSpPr>
+          <p:cNvPr id="12" name="Text 10"/>
+          <p:cNvSpPr/>
+          <p:nvPr/>
+        </p:nvSpPr>
+        <p:spPr>
+          <a:xfrm>
+            <a:off x="10135261" y="1371600"/>
+            <a:ext cx="731520" cy="219456"/>
+          </a:xfrm>
+          <a:prstGeom prst="rect">
+            <a:avLst/>
+          </a:prstGeom>
+          <a:noFill/>
+          <a:ln/>
+        </p:spPr>
+        <p:txBody>
+          <a:bodyPr wrap="square" rtlCol="0" anchor="ctr"/>
+          <a:lstStyle/>
+          <a:p>
+            <a:pPr indent="0" marL="0">
+              <a:buNone/>
+            </a:pPr>
+            <a:r>
+              <a:rPr lang="en-US" sz="1050" dirty="0">
+                <a:solidFill>
+                  <a:srgbClr val="6B7280"/>
+                </a:solidFill>
+                <a:latin typeface="Helvetica" pitchFamily="34" charset="0"/>
+                <a:ea typeface="Helvetica" pitchFamily="34" charset="-122"/>
+                <a:cs typeface="Helvetica" pitchFamily="34" charset="-120"/>
+              </a:rPr>
+              <a:t>Dec</a:t>
+            </a:r>
+            <a:endParaRPr lang="en-US" sz="1050" dirty="0"/>
+          </a:p>
+        </p:txBody>
+      </p:sp>
+      <p:sp>
+        <p:nvSpPr>
+          <p:cNvPr id="13" name="Shape 11"/>
+          <p:cNvSpPr/>
+          <p:nvPr/>
+        </p:nvSpPr>
+        <p:spPr>
+          <a:xfrm>
+            <a:off x="11484864" y="1591056"/>
+            <a:ext cx="0" cy="3479292"/>
+          </a:xfrm>
+          <a:prstGeom prst="line">
+            <a:avLst/>
+          </a:prstGeom>
+          <a:noFill/>
+          <a:ln w="9525">
+            <a:solidFill>
+              <a:srgbClr val="E3E9ED"/>
+            </a:solidFill>
+            <a:prstDash val="solid"/>
+          </a:ln>
+        </p:spPr>
+      </p:sp>
+      <p:sp>
+        <p:nvSpPr>
+          <p:cNvPr id="14" name="Text 12"/>
+          <p:cNvSpPr/>
+          <p:nvPr/>
+        </p:nvSpPr>
+        <p:spPr>
+          <a:xfrm>
+            <a:off x="566928" y="1988820"/>
+            <a:ext cx="2286000" cy="182880"/>
+          </a:xfrm>
+          <a:prstGeom prst="rect">
+            <a:avLst/>
+          </a:prstGeom>
+          <a:noFill/>
+          <a:ln/>
+        </p:spPr>
+        <p:txBody>
+          <a:bodyPr wrap="square" rtlCol="0" anchor="ctr"/>
+          <a:lstStyle/>
+          <a:p>
+            <a:pPr indent="0" marL="0">
+              <a:buNone/>
+            </a:pPr>
+            <a:r>
+              <a:rPr lang="en-US" sz="1050" b="1" dirty="0">
+                <a:solidFill>
+                  <a:srgbClr val="1B1B1F"/>
+                </a:solidFill>
+                <a:latin typeface="Helvetica" pitchFamily="34" charset="0"/>
+                <a:ea typeface="Helvetica" pitchFamily="34" charset="-122"/>
+                <a:cs typeface="Helvetica" pitchFamily="34" charset="-120"/>
+              </a:rPr>
+              <a:t>Foundations</a:t>
+            </a:r>
+            <a:endParaRPr lang="en-US" sz="1050" dirty="0"/>
+          </a:p>
+        </p:txBody>
+      </p:sp>
+      <p:sp>
+        <p:nvSpPr>
+          <p:cNvPr id="15" name="Text 13"/>
+          <p:cNvSpPr/>
+          <p:nvPr/>
+        </p:nvSpPr>
+        <p:spPr>
+          <a:xfrm>
+            <a:off x="566928" y="2144268"/>
+            <a:ext cx="2286000" cy="164592"/>
+          </a:xfrm>
+          <a:prstGeom prst="rect">
+            <a:avLst/>
+          </a:prstGeom>
+          <a:noFill/>
+          <a:ln/>
+        </p:spPr>
+        <p:txBody>
+          <a:bodyPr wrap="square" rtlCol="0" anchor="ctr"/>
+          <a:lstStyle/>
+          <a:p>
+            <a:pPr indent="0" marL="0">
+              <a:buNone/>
+            </a:pPr>
+            <a:r>
+              <a:rPr lang="en-US" sz="850" dirty="0">
+                <a:solidFill>
+                  <a:srgbClr val="6B7280"/>
+                </a:solidFill>
+                <a:latin typeface="Helvetica" pitchFamily="34" charset="0"/>
+                <a:ea typeface="Helvetica" pitchFamily="34" charset="-122"/>
+                <a:cs typeface="Helvetica" pitchFamily="34" charset="-120"/>
+              </a:rPr>
+              <a:t>all three</a:t>
+            </a:r>
+            <a:endParaRPr lang="en-US" sz="850" dirty="0"/>
+          </a:p>
+        </p:txBody>
+      </p:sp>
+      <p:sp>
+        <p:nvSpPr>
+          <p:cNvPr id="16" name="Shape 14"/>
+          <p:cNvSpPr/>
+          <p:nvPr/>
+        </p:nvSpPr>
+        <p:spPr>
+          <a:xfrm>
+            <a:off x="3060652" y="2016252"/>
+            <a:ext cx="1539039" cy="224028"/>
+          </a:xfrm>
+          <a:prstGeom prst="roundRect">
+            <a:avLst>
+              <a:gd name="adj" fmla="val 12245"/>
+            </a:avLst>
+          </a:prstGeom>
+          <a:solidFill>
+            <a:srgbClr val="15803D"/>
+          </a:solidFill>
+          <a:ln w="12700">
+            <a:solidFill>
+              <a:srgbClr val="15803D"/>
+            </a:solidFill>
+            <a:prstDash val="solid"/>
+          </a:ln>
+        </p:spPr>
+      </p:sp>
+      <p:sp>
+        <p:nvSpPr>
+          <p:cNvPr id="17" name="Text 15"/>
+          <p:cNvSpPr/>
+          <p:nvPr/>
+        </p:nvSpPr>
+        <p:spPr>
+          <a:xfrm>
+            <a:off x="3115516" y="2029968"/>
+            <a:ext cx="914400" cy="201168"/>
+          </a:xfrm>
+          <a:prstGeom prst="rect">
+            <a:avLst/>
+          </a:prstGeom>
+          <a:noFill/>
+          <a:ln/>
+        </p:spPr>
+        <p:txBody>
+          <a:bodyPr wrap="square" rtlCol="0" anchor="ctr"/>
+          <a:lstStyle/>
+          <a:p>
+            <a:pPr indent="0" marL="0">
+              <a:buNone/>
+            </a:pPr>
+            <a:r>
+              <a:rPr lang="en-US" sz="850" b="1" dirty="0">
+                <a:solidFill>
+                  <a:srgbClr val="FFFFFF"/>
+                </a:solidFill>
+                <a:latin typeface="Helvetica" pitchFamily="34" charset="0"/>
+                <a:ea typeface="Helvetica" pitchFamily="34" charset="-122"/>
+                <a:cs typeface="Helvetica" pitchFamily="34" charset="-120"/>
+              </a:rPr>
+              <a:t>done</a:t>
+            </a:r>
+            <a:endParaRPr lang="en-US" sz="850" dirty="0"/>
+          </a:p>
+        </p:txBody>
+      </p:sp>
+      <p:sp>
+        <p:nvSpPr>
+          <p:cNvPr id="18" name="Text 16"/>
+          <p:cNvSpPr/>
+          <p:nvPr/>
+        </p:nvSpPr>
+        <p:spPr>
+          <a:xfrm>
+            <a:off x="566928" y="2322576"/>
+            <a:ext cx="2286000" cy="182880"/>
+          </a:xfrm>
+          <a:prstGeom prst="rect">
+            <a:avLst/>
+          </a:prstGeom>
+          <a:noFill/>
+          <a:ln/>
+        </p:spPr>
+        <p:txBody>
+          <a:bodyPr wrap="square" rtlCol="0" anchor="ctr"/>
+          <a:lstStyle/>
+          <a:p>
+            <a:pPr indent="0" marL="0">
+              <a:buNone/>
+            </a:pPr>
+            <a:r>
+              <a:rPr lang="en-US" sz="1050" b="1" dirty="0">
+                <a:solidFill>
+                  <a:srgbClr val="1B1B1F"/>
+                </a:solidFill>
+                <a:latin typeface="Helvetica" pitchFamily="34" charset="0"/>
+                <a:ea typeface="Helvetica" pitchFamily="34" charset="-122"/>
+                <a:cs typeface="Helvetica" pitchFamily="34" charset="-120"/>
+              </a:rPr>
+              <a:t>Engine — parallel starts</a:t>
+            </a:r>
+            <a:endParaRPr lang="en-US" sz="1050" dirty="0"/>
+          </a:p>
+        </p:txBody>
+      </p:sp>
+      <p:sp>
+        <p:nvSpPr>
+          <p:cNvPr id="19" name="Text 17"/>
+          <p:cNvSpPr/>
+          <p:nvPr/>
+        </p:nvSpPr>
+        <p:spPr>
+          <a:xfrm>
+            <a:off x="566928" y="2478024"/>
+            <a:ext cx="2286000" cy="164592"/>
+          </a:xfrm>
+          <a:prstGeom prst="rect">
+            <a:avLst/>
+          </a:prstGeom>
+          <a:noFill/>
+          <a:ln/>
+        </p:spPr>
+        <p:txBody>
+          <a:bodyPr wrap="square" rtlCol="0" anchor="ctr"/>
+          <a:lstStyle/>
+          <a:p>
+            <a:pPr indent="0" marL="0">
+              <a:buNone/>
+            </a:pPr>
+            <a:r>
+              <a:rPr lang="en-US" sz="850" dirty="0">
+                <a:solidFill>
+                  <a:srgbClr val="6B7280"/>
+                </a:solidFill>
+                <a:latin typeface="Helvetica" pitchFamily="34" charset="0"/>
+                <a:ea typeface="Helvetica" pitchFamily="34" charset="-122"/>
+                <a:cs typeface="Helvetica" pitchFamily="34" charset="-120"/>
+              </a:rPr>
+              <a:t>R-01 · R-02 · R-11 · R-12</a:t>
+            </a:r>
+            <a:endParaRPr lang="en-US" sz="850" dirty="0"/>
+          </a:p>
+        </p:txBody>
+      </p:sp>
+      <p:sp>
+        <p:nvSpPr>
+          <p:cNvPr id="20" name="Shape 18"/>
+          <p:cNvSpPr/>
+          <p:nvPr/>
+        </p:nvSpPr>
+        <p:spPr>
+          <a:xfrm>
+            <a:off x="4437687" y="2350008"/>
+            <a:ext cx="1296033" cy="224028"/>
+          </a:xfrm>
+          <a:prstGeom prst="roundRect">
+            <a:avLst>
+              <a:gd name="adj" fmla="val 12245"/>
+            </a:avLst>
+          </a:prstGeom>
+          <a:solidFill>
+            <a:srgbClr val="489FB5"/>
+          </a:solidFill>
+          <a:ln w="12700">
+            <a:solidFill>
+              <a:srgbClr val="489FB5"/>
+            </a:solidFill>
+            <a:prstDash val="solid"/>
+          </a:ln>
+        </p:spPr>
+      </p:sp>
+      <p:sp>
+        <p:nvSpPr>
+          <p:cNvPr id="21" name="Text 19"/>
+          <p:cNvSpPr/>
+          <p:nvPr/>
+        </p:nvSpPr>
+        <p:spPr>
+          <a:xfrm>
+            <a:off x="566928" y="2656332"/>
+            <a:ext cx="2286000" cy="182880"/>
+          </a:xfrm>
+          <a:prstGeom prst="rect">
+            <a:avLst/>
+          </a:prstGeom>
+          <a:noFill/>
+          <a:ln/>
+        </p:spPr>
+        <p:txBody>
+          <a:bodyPr wrap="square" rtlCol="0" anchor="ctr"/>
+          <a:lstStyle/>
+          <a:p>
+            <a:pPr indent="0" marL="0">
+              <a:buNone/>
+            </a:pPr>
+            <a:r>
+              <a:rPr lang="en-US" sz="1050" b="1" dirty="0">
+                <a:solidFill>
+                  <a:srgbClr val="1B1B1F"/>
+                </a:solidFill>
+                <a:latin typeface="Helvetica" pitchFamily="34" charset="0"/>
+                <a:ea typeface="Helvetica" pitchFamily="34" charset="-122"/>
+                <a:cs typeface="Helvetica" pitchFamily="34" charset="-120"/>
+              </a:rPr>
+              <a:t>Engine — the serial chain</a:t>
+            </a:r>
+            <a:endParaRPr lang="en-US" sz="1050" dirty="0"/>
+          </a:p>
+        </p:txBody>
+      </p:sp>
+      <p:sp>
+        <p:nvSpPr>
+          <p:cNvPr id="22" name="Text 20"/>
+          <p:cNvSpPr/>
+          <p:nvPr/>
+        </p:nvSpPr>
+        <p:spPr>
+          <a:xfrm>
+            <a:off x="566928" y="2811780"/>
+            <a:ext cx="2286000" cy="164592"/>
+          </a:xfrm>
+          <a:prstGeom prst="rect">
+            <a:avLst/>
+          </a:prstGeom>
+          <a:noFill/>
+          <a:ln/>
+        </p:spPr>
+        <p:txBody>
+          <a:bodyPr wrap="square" rtlCol="0" anchor="ctr"/>
+          <a:lstStyle/>
+          <a:p>
+            <a:pPr indent="0" marL="0">
+              <a:buNone/>
+            </a:pPr>
+            <a:r>
+              <a:rPr lang="en-US" sz="850" dirty="0">
+                <a:solidFill>
+                  <a:srgbClr val="6B7280"/>
+                </a:solidFill>
+                <a:latin typeface="Helvetica" pitchFamily="34" charset="0"/>
+                <a:ea typeface="Helvetica" pitchFamily="34" charset="-122"/>
+                <a:cs typeface="Helvetica" pitchFamily="34" charset="-120"/>
+              </a:rPr>
+              <a:t>R-04→R-06→R-07→R-08→R-14→R-15</a:t>
+            </a:r>
+            <a:endParaRPr lang="en-US" sz="850" dirty="0"/>
+          </a:p>
+        </p:txBody>
+      </p:sp>
+      <p:sp>
+        <p:nvSpPr>
+          <p:cNvPr id="23" name="Shape 21"/>
+          <p:cNvSpPr/>
+          <p:nvPr/>
+        </p:nvSpPr>
+        <p:spPr>
+          <a:xfrm>
+            <a:off x="5085703" y="2683764"/>
+            <a:ext cx="2511063" cy="224028"/>
+          </a:xfrm>
+          <a:prstGeom prst="roundRect">
+            <a:avLst>
+              <a:gd name="adj" fmla="val 12245"/>
+            </a:avLst>
+          </a:prstGeom>
+          <a:solidFill>
+            <a:srgbClr val="16697A"/>
+          </a:solidFill>
+          <a:ln w="12700">
+            <a:solidFill>
+              <a:srgbClr val="16697A"/>
+            </a:solidFill>
+            <a:prstDash val="solid"/>
+          </a:ln>
+        </p:spPr>
+      </p:sp>
+      <p:sp>
+        <p:nvSpPr>
+          <p:cNvPr id="24" name="Text 22"/>
+          <p:cNvSpPr/>
+          <p:nvPr/>
+        </p:nvSpPr>
+        <p:spPr>
+          <a:xfrm>
+            <a:off x="5158855" y="2697480"/>
+            <a:ext cx="3108960" cy="201168"/>
+          </a:xfrm>
+          <a:prstGeom prst="rect">
+            <a:avLst/>
+          </a:prstGeom>
+          <a:noFill/>
+          <a:ln/>
+        </p:spPr>
+        <p:txBody>
+          <a:bodyPr wrap="square" rtlCol="0" anchor="ctr"/>
+          <a:lstStyle/>
+          <a:p>
+            <a:pPr indent="0" marL="0">
+              <a:buNone/>
+            </a:pPr>
+            <a:r>
+              <a:rPr lang="en-US" sz="850" b="1" dirty="0">
+                <a:solidFill>
+                  <a:srgbClr val="FFFFFF"/>
+                </a:solidFill>
+                <a:latin typeface="Helvetica" pitchFamily="34" charset="0"/>
+                <a:ea typeface="Helvetica" pitchFamily="34" charset="-122"/>
+                <a:cs typeface="Helvetica" pitchFamily="34" charset="-120"/>
+              </a:rPr>
+              <a:t>critical chain — sets the finish date</a:t>
+            </a:r>
+            <a:endParaRPr lang="en-US" sz="850" dirty="0"/>
+          </a:p>
+        </p:txBody>
+      </p:sp>
+      <p:sp>
+        <p:nvSpPr>
+          <p:cNvPr id="25" name="Text 23"/>
+          <p:cNvSpPr/>
+          <p:nvPr/>
+        </p:nvSpPr>
+        <p:spPr>
+          <a:xfrm>
+            <a:off x="566928" y="2990088"/>
+            <a:ext cx="2286000" cy="182880"/>
+          </a:xfrm>
+          <a:prstGeom prst="rect">
+            <a:avLst/>
+          </a:prstGeom>
+          <a:noFill/>
+          <a:ln/>
+        </p:spPr>
+        <p:txBody>
+          <a:bodyPr wrap="square" rtlCol="0" anchor="ctr"/>
+          <a:lstStyle/>
+          <a:p>
+            <a:pPr indent="0" marL="0">
+              <a:buNone/>
+            </a:pPr>
+            <a:r>
+              <a:rPr lang="en-US" sz="1050" b="1" dirty="0">
+                <a:solidFill>
+                  <a:srgbClr val="1B1B1F"/>
+                </a:solidFill>
+                <a:latin typeface="Helvetica" pitchFamily="34" charset="0"/>
+                <a:ea typeface="Helvetica" pitchFamily="34" charset="-122"/>
+                <a:cs typeface="Helvetica" pitchFamily="34" charset="-120"/>
+              </a:rPr>
+              <a:t>Engine — off-chain work</a:t>
+            </a:r>
+            <a:endParaRPr lang="en-US" sz="1050" dirty="0"/>
+          </a:p>
+        </p:txBody>
+      </p:sp>
+      <p:sp>
+        <p:nvSpPr>
+          <p:cNvPr id="26" name="Text 24"/>
+          <p:cNvSpPr/>
+          <p:nvPr/>
+        </p:nvSpPr>
+        <p:spPr>
+          <a:xfrm>
+            <a:off x="566928" y="3145536"/>
+            <a:ext cx="2286000" cy="164592"/>
+          </a:xfrm>
+          <a:prstGeom prst="rect">
+            <a:avLst/>
+          </a:prstGeom>
+          <a:noFill/>
+          <a:ln/>
+        </p:spPr>
+        <p:txBody>
+          <a:bodyPr wrap="square" rtlCol="0" anchor="ctr"/>
+          <a:lstStyle/>
+          <a:p>
+            <a:pPr indent="0" marL="0">
+              <a:buNone/>
+            </a:pPr>
+            <a:r>
+              <a:rPr lang="en-US" sz="850" dirty="0">
+                <a:solidFill>
+                  <a:srgbClr val="6B7280"/>
+                </a:solidFill>
+                <a:latin typeface="Helvetica" pitchFamily="34" charset="0"/>
+                <a:ea typeface="Helvetica" pitchFamily="34" charset="-122"/>
+                <a:cs typeface="Helvetica" pitchFamily="34" charset="-120"/>
+              </a:rPr>
+              <a:t>R-03 · R-05 · R-09 · R-10 · R-13</a:t>
+            </a:r>
+            <a:endParaRPr lang="en-US" sz="850" dirty="0"/>
+          </a:p>
+        </p:txBody>
+      </p:sp>
+      <p:sp>
+        <p:nvSpPr>
+          <p:cNvPr id="27" name="Shape 25"/>
+          <p:cNvSpPr/>
+          <p:nvPr/>
+        </p:nvSpPr>
+        <p:spPr>
+          <a:xfrm>
+            <a:off x="5490713" y="3017520"/>
+            <a:ext cx="1782045" cy="224028"/>
+          </a:xfrm>
+          <a:prstGeom prst="roundRect">
+            <a:avLst>
+              <a:gd name="adj" fmla="val 12245"/>
+            </a:avLst>
+          </a:prstGeom>
+          <a:solidFill>
+            <a:srgbClr val="489FB5"/>
+          </a:solidFill>
+          <a:ln w="12700">
+            <a:solidFill>
+              <a:srgbClr val="489FB5"/>
+            </a:solidFill>
+            <a:prstDash val="solid"/>
+          </a:ln>
+        </p:spPr>
+      </p:sp>
+      <p:sp>
+        <p:nvSpPr>
+          <p:cNvPr id="28" name="Text 26"/>
+          <p:cNvSpPr/>
+          <p:nvPr/>
+        </p:nvSpPr>
+        <p:spPr>
+          <a:xfrm>
+            <a:off x="566928" y="3323844"/>
+            <a:ext cx="2286000" cy="182880"/>
+          </a:xfrm>
+          <a:prstGeom prst="rect">
+            <a:avLst/>
+          </a:prstGeom>
+          <a:noFill/>
+          <a:ln/>
+        </p:spPr>
+        <p:txBody>
+          <a:bodyPr wrap="square" rtlCol="0" anchor="ctr"/>
+          <a:lstStyle/>
+          <a:p>
+            <a:pPr indent="0" marL="0">
+              <a:buNone/>
+            </a:pPr>
+            <a:r>
+              <a:rPr lang="en-US" sz="1050" b="1" dirty="0">
+                <a:solidFill>
+                  <a:srgbClr val="1B1B1F"/>
+                </a:solidFill>
+                <a:latin typeface="Helvetica" pitchFamily="34" charset="0"/>
+                <a:ea typeface="Helvetica" pitchFamily="34" charset="-122"/>
+                <a:cs typeface="Helvetica" pitchFamily="34" charset="-120"/>
+              </a:rPr>
+              <a:t>Thin capture thread</a:t>
+            </a:r>
+            <a:endParaRPr lang="en-US" sz="1050" dirty="0"/>
+          </a:p>
+        </p:txBody>
+      </p:sp>
+      <p:sp>
+        <p:nvSpPr>
+          <p:cNvPr id="29" name="Text 27"/>
+          <p:cNvSpPr/>
+          <p:nvPr/>
+        </p:nvSpPr>
+        <p:spPr>
+          <a:xfrm>
+            <a:off x="566928" y="3479292"/>
+            <a:ext cx="2286000" cy="164592"/>
+          </a:xfrm>
+          <a:prstGeom prst="rect">
+            <a:avLst/>
+          </a:prstGeom>
+          <a:noFill/>
+          <a:ln/>
+        </p:spPr>
+        <p:txBody>
+          <a:bodyPr wrap="square" rtlCol="0" anchor="ctr"/>
+          <a:lstStyle/>
+          <a:p>
+            <a:pPr indent="0" marL="0">
+              <a:buNone/>
+            </a:pPr>
+            <a:r>
+              <a:rPr lang="en-US" sz="850" dirty="0">
+                <a:solidFill>
+                  <a:srgbClr val="6B7280"/>
+                </a:solidFill>
+                <a:latin typeface="Helvetica" pitchFamily="34" charset="0"/>
+                <a:ea typeface="Helvetica" pitchFamily="34" charset="-122"/>
+                <a:cs typeface="Helvetica" pitchFamily="34" charset="-120"/>
+              </a:rPr>
+              <a:t>C-01→C-03, in spare time</a:t>
+            </a:r>
+            <a:endParaRPr lang="en-US" sz="850" dirty="0"/>
+          </a:p>
+        </p:txBody>
+      </p:sp>
+      <p:sp>
+        <p:nvSpPr>
+          <p:cNvPr id="30" name="Shape 28"/>
+          <p:cNvSpPr/>
+          <p:nvPr/>
+        </p:nvSpPr>
+        <p:spPr>
+          <a:xfrm>
+            <a:off x="5490713" y="3351276"/>
+            <a:ext cx="972024" cy="224028"/>
+          </a:xfrm>
+          <a:prstGeom prst="roundRect">
+            <a:avLst>
+              <a:gd name="adj" fmla="val 12245"/>
+            </a:avLst>
+          </a:prstGeom>
+          <a:solidFill>
+            <a:srgbClr val="94A3B8"/>
+          </a:solidFill>
+          <a:ln w="12700">
+            <a:solidFill>
+              <a:srgbClr val="94A3B8"/>
+            </a:solidFill>
+            <a:prstDash val="solid"/>
+          </a:ln>
+        </p:spPr>
+      </p:sp>
+      <p:sp>
+        <p:nvSpPr>
+          <p:cNvPr id="31" name="Text 29"/>
+          <p:cNvSpPr/>
+          <p:nvPr/>
+        </p:nvSpPr>
+        <p:spPr>
+          <a:xfrm>
+            <a:off x="566928" y="3657600"/>
+            <a:ext cx="2286000" cy="182880"/>
+          </a:xfrm>
+          <a:prstGeom prst="rect">
+            <a:avLst/>
+          </a:prstGeom>
+          <a:noFill/>
+          <a:ln/>
+        </p:spPr>
+        <p:txBody>
+          <a:bodyPr wrap="square" rtlCol="0" anchor="ctr"/>
+          <a:lstStyle/>
+          <a:p>
+            <a:pPr indent="0" marL="0">
+              <a:buNone/>
+            </a:pPr>
+            <a:r>
+              <a:rPr lang="en-US" sz="1050" b="1" dirty="0">
+                <a:solidFill>
+                  <a:srgbClr val="1B1B1F"/>
+                </a:solidFill>
+                <a:latin typeface="Helvetica" pitchFamily="34" charset="0"/>
+                <a:ea typeface="Helvetica" pitchFamily="34" charset="-122"/>
+                <a:cs typeface="Helvetica" pitchFamily="34" charset="-120"/>
+              </a:rPr>
+              <a:t>Capture app</a:t>
+            </a:r>
+            <a:endParaRPr lang="en-US" sz="1050" dirty="0"/>
+          </a:p>
+        </p:txBody>
+      </p:sp>
+      <p:sp>
+        <p:nvSpPr>
+          <p:cNvPr id="32" name="Text 30"/>
+          <p:cNvSpPr/>
+          <p:nvPr/>
+        </p:nvSpPr>
+        <p:spPr>
+          <a:xfrm>
+            <a:off x="566928" y="3813048"/>
+            <a:ext cx="2286000" cy="164592"/>
+          </a:xfrm>
+          <a:prstGeom prst="rect">
+            <a:avLst/>
+          </a:prstGeom>
+          <a:noFill/>
+          <a:ln/>
+        </p:spPr>
+        <p:txBody>
+          <a:bodyPr wrap="square" rtlCol="0" anchor="ctr"/>
+          <a:lstStyle/>
+          <a:p>
+            <a:pPr indent="0" marL="0">
+              <a:buNone/>
+            </a:pPr>
+            <a:r>
+              <a:rPr lang="en-US" sz="850" dirty="0">
+                <a:solidFill>
+                  <a:srgbClr val="6B7280"/>
+                </a:solidFill>
+                <a:latin typeface="Helvetica" pitchFamily="34" charset="0"/>
+                <a:ea typeface="Helvetica" pitchFamily="34" charset="-122"/>
+                <a:cs typeface="Helvetica" pitchFamily="34" charset="-120"/>
+              </a:rPr>
+              <a:t>C-04→C-12</a:t>
+            </a:r>
+            <a:endParaRPr lang="en-US" sz="850" dirty="0"/>
+          </a:p>
+        </p:txBody>
+      </p:sp>
+      <p:sp>
+        <p:nvSpPr>
+          <p:cNvPr id="33" name="Shape 31"/>
+          <p:cNvSpPr/>
+          <p:nvPr/>
+        </p:nvSpPr>
+        <p:spPr>
+          <a:xfrm>
+            <a:off x="7353760" y="3685032"/>
+            <a:ext cx="2268057" cy="224028"/>
+          </a:xfrm>
+          <a:prstGeom prst="roundRect">
+            <a:avLst>
+              <a:gd name="adj" fmla="val 12245"/>
+            </a:avLst>
+          </a:prstGeom>
+          <a:solidFill>
+            <a:srgbClr val="489FB5"/>
+          </a:solidFill>
+          <a:ln w="12700">
+            <a:solidFill>
+              <a:srgbClr val="489FB5"/>
+            </a:solidFill>
+            <a:prstDash val="solid"/>
+          </a:ln>
+        </p:spPr>
+      </p:sp>
+      <p:sp>
+        <p:nvSpPr>
+          <p:cNvPr id="34" name="Text 32"/>
+          <p:cNvSpPr/>
+          <p:nvPr/>
+        </p:nvSpPr>
+        <p:spPr>
+          <a:xfrm>
+            <a:off x="566928" y="3991356"/>
+            <a:ext cx="2286000" cy="182880"/>
+          </a:xfrm>
+          <a:prstGeom prst="rect">
+            <a:avLst/>
+          </a:prstGeom>
+          <a:noFill/>
+          <a:ln/>
+        </p:spPr>
+        <p:txBody>
+          <a:bodyPr wrap="square" rtlCol="0" anchor="ctr"/>
+          <a:lstStyle/>
+          <a:p>
+            <a:pPr indent="0" marL="0">
+              <a:buNone/>
+            </a:pPr>
+            <a:r>
+              <a:rPr lang="en-US" sz="1050" b="1" dirty="0">
+                <a:solidFill>
+                  <a:srgbClr val="1B1B1F"/>
+                </a:solidFill>
+                <a:latin typeface="Helvetica" pitchFamily="34" charset="0"/>
+                <a:ea typeface="Helvetica" pitchFamily="34" charset="-122"/>
+                <a:cs typeface="Helvetica" pitchFamily="34" charset="-120"/>
+              </a:rPr>
+              <a:t>Inspection</a:t>
+            </a:r>
+            <a:endParaRPr lang="en-US" sz="1050" dirty="0"/>
+          </a:p>
+        </p:txBody>
+      </p:sp>
+      <p:sp>
+        <p:nvSpPr>
+          <p:cNvPr id="35" name="Text 33"/>
+          <p:cNvSpPr/>
+          <p:nvPr/>
+        </p:nvSpPr>
+        <p:spPr>
+          <a:xfrm>
+            <a:off x="566928" y="4146804"/>
+            <a:ext cx="2286000" cy="164592"/>
+          </a:xfrm>
+          <a:prstGeom prst="rect">
+            <a:avLst/>
+          </a:prstGeom>
+          <a:noFill/>
+          <a:ln/>
+        </p:spPr>
+        <p:txBody>
+          <a:bodyPr wrap="square" rtlCol="0" anchor="ctr"/>
+          <a:lstStyle/>
+          <a:p>
+            <a:pPr indent="0" marL="0">
+              <a:buNone/>
+            </a:pPr>
+            <a:r>
+              <a:rPr lang="en-US" sz="850" dirty="0">
+                <a:solidFill>
+                  <a:srgbClr val="6B7280"/>
+                </a:solidFill>
+                <a:latin typeface="Helvetica" pitchFamily="34" charset="0"/>
+                <a:ea typeface="Helvetica" pitchFamily="34" charset="-122"/>
+                <a:cs typeface="Helvetica" pitchFamily="34" charset="-120"/>
+              </a:rPr>
+              <a:t>I-01→I-10</a:t>
+            </a:r>
+            <a:endParaRPr lang="en-US" sz="850" dirty="0"/>
+          </a:p>
+        </p:txBody>
+      </p:sp>
+      <p:sp>
+        <p:nvSpPr>
+          <p:cNvPr id="36" name="Shape 34"/>
+          <p:cNvSpPr/>
+          <p:nvPr/>
+        </p:nvSpPr>
+        <p:spPr>
+          <a:xfrm>
+            <a:off x="7839772" y="4018788"/>
+            <a:ext cx="2349059" cy="224028"/>
+          </a:xfrm>
+          <a:prstGeom prst="roundRect">
+            <a:avLst>
+              <a:gd name="adj" fmla="val 12245"/>
+            </a:avLst>
+          </a:prstGeom>
+          <a:solidFill>
+            <a:srgbClr val="489FB5"/>
+          </a:solidFill>
+          <a:ln w="12700">
+            <a:solidFill>
+              <a:srgbClr val="489FB5"/>
+            </a:solidFill>
+            <a:prstDash val="solid"/>
+          </a:ln>
+        </p:spPr>
+      </p:sp>
+      <p:sp>
+        <p:nvSpPr>
+          <p:cNvPr id="37" name="Text 35"/>
+          <p:cNvSpPr/>
+          <p:nvPr/>
+        </p:nvSpPr>
+        <p:spPr>
+          <a:xfrm>
+            <a:off x="566928" y="4325112"/>
+            <a:ext cx="2286000" cy="182880"/>
+          </a:xfrm>
+          <a:prstGeom prst="rect">
+            <a:avLst/>
+          </a:prstGeom>
+          <a:noFill/>
+          <a:ln/>
+        </p:spPr>
+        <p:txBody>
+          <a:bodyPr wrap="square" rtlCol="0" anchor="ctr"/>
+          <a:lstStyle/>
+          <a:p>
+            <a:pPr indent="0" marL="0">
+              <a:buNone/>
+            </a:pPr>
+            <a:r>
+              <a:rPr lang="en-US" sz="1050" b="1" dirty="0">
+                <a:solidFill>
+                  <a:srgbClr val="1B1B1F"/>
+                </a:solidFill>
+                <a:latin typeface="Helvetica" pitchFamily="34" charset="0"/>
+                <a:ea typeface="Helvetica" pitchFamily="34" charset="-122"/>
+                <a:cs typeface="Helvetica" pitchFamily="34" charset="-120"/>
+              </a:rPr>
+              <a:t>Generative AI</a:t>
+            </a:r>
+            <a:endParaRPr lang="en-US" sz="1050" dirty="0"/>
+          </a:p>
+        </p:txBody>
+      </p:sp>
+      <p:sp>
+        <p:nvSpPr>
+          <p:cNvPr id="38" name="Text 36"/>
+          <p:cNvSpPr/>
+          <p:nvPr/>
+        </p:nvSpPr>
+        <p:spPr>
+          <a:xfrm>
+            <a:off x="566928" y="4480560"/>
+            <a:ext cx="2286000" cy="164592"/>
+          </a:xfrm>
+          <a:prstGeom prst="rect">
+            <a:avLst/>
+          </a:prstGeom>
+          <a:noFill/>
+          <a:ln/>
+        </p:spPr>
+        <p:txBody>
+          <a:bodyPr wrap="square" rtlCol="0" anchor="ctr"/>
+          <a:lstStyle/>
+          <a:p>
+            <a:pPr indent="0" marL="0">
+              <a:buNone/>
+            </a:pPr>
+            <a:r>
+              <a:rPr lang="en-US" sz="850" dirty="0">
+                <a:solidFill>
+                  <a:srgbClr val="6B7280"/>
+                </a:solidFill>
+                <a:latin typeface="Helvetica" pitchFamily="34" charset="0"/>
+                <a:ea typeface="Helvetica" pitchFamily="34" charset="-122"/>
+                <a:cs typeface="Helvetica" pitchFamily="34" charset="-120"/>
+              </a:rPr>
+              <a:t>A-01→A-09 · never cut</a:t>
+            </a:r>
+            <a:endParaRPr lang="en-US" sz="850" dirty="0"/>
+          </a:p>
+        </p:txBody>
+      </p:sp>
+      <p:sp>
+        <p:nvSpPr>
+          <p:cNvPr id="39" name="Shape 37"/>
+          <p:cNvSpPr/>
+          <p:nvPr/>
+        </p:nvSpPr>
+        <p:spPr>
+          <a:xfrm>
+            <a:off x="7191756" y="4352544"/>
+            <a:ext cx="2997075" cy="224028"/>
+          </a:xfrm>
+          <a:prstGeom prst="roundRect">
+            <a:avLst>
+              <a:gd name="adj" fmla="val 12245"/>
+            </a:avLst>
+          </a:prstGeom>
+          <a:solidFill>
+            <a:srgbClr val="7C3AED"/>
+          </a:solidFill>
+          <a:ln w="12700">
+            <a:solidFill>
+              <a:srgbClr val="7C3AED"/>
+            </a:solidFill>
+            <a:prstDash val="solid"/>
+          </a:ln>
+        </p:spPr>
+      </p:sp>
+      <p:sp>
+        <p:nvSpPr>
+          <p:cNvPr id="40" name="Text 38"/>
+          <p:cNvSpPr/>
+          <p:nvPr/>
+        </p:nvSpPr>
+        <p:spPr>
+          <a:xfrm>
+            <a:off x="566928" y="4658868"/>
+            <a:ext cx="2286000" cy="182880"/>
+          </a:xfrm>
+          <a:prstGeom prst="rect">
+            <a:avLst/>
+          </a:prstGeom>
+          <a:noFill/>
+          <a:ln/>
+        </p:spPr>
+        <p:txBody>
+          <a:bodyPr wrap="square" rtlCol="0" anchor="ctr"/>
+          <a:lstStyle/>
+          <a:p>
+            <a:pPr indent="0" marL="0">
+              <a:buNone/>
+            </a:pPr>
+            <a:r>
+              <a:rPr lang="en-US" sz="1050" b="1" dirty="0">
+                <a:solidFill>
+                  <a:srgbClr val="1B1B1F"/>
+                </a:solidFill>
+                <a:latin typeface="Helvetica" pitchFamily="34" charset="0"/>
+                <a:ea typeface="Helvetica" pitchFamily="34" charset="-122"/>
+                <a:cs typeface="Helvetica" pitchFamily="34" charset="-120"/>
+              </a:rPr>
+              <a:t>Integration · demo · defence</a:t>
+            </a:r>
+            <a:endParaRPr lang="en-US" sz="1050" dirty="0"/>
+          </a:p>
+        </p:txBody>
+      </p:sp>
+      <p:sp>
+        <p:nvSpPr>
+          <p:cNvPr id="41" name="Text 39"/>
+          <p:cNvSpPr/>
+          <p:nvPr/>
+        </p:nvSpPr>
+        <p:spPr>
+          <a:xfrm>
+            <a:off x="566928" y="4814316"/>
+            <a:ext cx="2286000" cy="164592"/>
+          </a:xfrm>
+          <a:prstGeom prst="rect">
+            <a:avLst/>
+          </a:prstGeom>
+          <a:noFill/>
+          <a:ln/>
+        </p:spPr>
+        <p:txBody>
+          <a:bodyPr wrap="square" rtlCol="0" anchor="ctr"/>
+          <a:lstStyle/>
+          <a:p>
+            <a:pPr indent="0" marL="0">
+              <a:buNone/>
+            </a:pPr>
+            <a:r>
+              <a:rPr lang="en-US" sz="850" dirty="0">
+                <a:solidFill>
+                  <a:srgbClr val="6B7280"/>
+                </a:solidFill>
+                <a:latin typeface="Helvetica" pitchFamily="34" charset="0"/>
+                <a:ea typeface="Helvetica" pitchFamily="34" charset="-122"/>
+                <a:cs typeface="Helvetica" pitchFamily="34" charset="-120"/>
+              </a:rPr>
+              <a:t>I1–I4, recorded backup</a:t>
+            </a:r>
+            <a:endParaRPr lang="en-US" sz="850" dirty="0"/>
+          </a:p>
+        </p:txBody>
+      </p:sp>
+      <p:sp>
+        <p:nvSpPr>
+          <p:cNvPr id="42" name="Shape 40"/>
+          <p:cNvSpPr/>
+          <p:nvPr/>
+        </p:nvSpPr>
+        <p:spPr>
+          <a:xfrm>
+            <a:off x="10188831" y="4686300"/>
+            <a:ext cx="1296033" cy="224028"/>
+          </a:xfrm>
+          <a:prstGeom prst="roundRect">
+            <a:avLst>
+              <a:gd name="adj" fmla="val 12245"/>
+            </a:avLst>
+          </a:prstGeom>
+          <a:solidFill>
+            <a:srgbClr val="475569"/>
+          </a:solidFill>
+          <a:ln w="12700">
+            <a:solidFill>
+              <a:srgbClr val="475569"/>
+            </a:solidFill>
+            <a:prstDash val="solid"/>
+          </a:ln>
+        </p:spPr>
+      </p:sp>
+      <p:sp>
+        <p:nvSpPr>
+          <p:cNvPr id="43" name="Shape 41"/>
+          <p:cNvSpPr/>
+          <p:nvPr/>
+        </p:nvSpPr>
+        <p:spPr>
+          <a:xfrm>
+            <a:off x="4621257" y="5052060"/>
+            <a:ext cx="118872" cy="155448"/>
+          </a:xfrm>
+          <a:prstGeom prst="diamond">
+            <a:avLst/>
+          </a:prstGeom>
+          <a:solidFill>
+            <a:srgbClr val="1B1B1F"/>
+          </a:solidFill>
+          <a:ln w="12700">
+            <a:solidFill>
+              <a:srgbClr val="1B1B1F"/>
+            </a:solidFill>
+            <a:prstDash val="solid"/>
+          </a:ln>
+        </p:spPr>
+      </p:sp>
+      <p:sp>
+        <p:nvSpPr>
+          <p:cNvPr id="44" name="Text 42"/>
+          <p:cNvSpPr/>
+          <p:nvPr/>
+        </p:nvSpPr>
+        <p:spPr>
+          <a:xfrm>
+            <a:off x="4424661" y="5216652"/>
+            <a:ext cx="512064" cy="182880"/>
+          </a:xfrm>
+          <a:prstGeom prst="rect">
+            <a:avLst/>
+          </a:prstGeom>
+          <a:noFill/>
+          <a:ln/>
+        </p:spPr>
+        <p:txBody>
+          <a:bodyPr wrap="square" rtlCol="0" anchor="ctr"/>
+          <a:lstStyle/>
+          <a:p>
+            <a:pPr algn="ctr" indent="0" marL="0">
+              <a:buNone/>
+            </a:pPr>
+            <a:r>
+              <a:rPr lang="en-US" sz="850" dirty="0">
+                <a:solidFill>
+                  <a:srgbClr val="1B1B1F"/>
+                </a:solidFill>
+                <a:latin typeface="Helvetica" pitchFamily="34" charset="0"/>
+                <a:ea typeface="Helvetica" pitchFamily="34" charset="-122"/>
+                <a:cs typeface="Helvetica" pitchFamily="34" charset="-120"/>
+              </a:rPr>
+              <a:t>M1</a:t>
+            </a:r>
+            <a:endParaRPr lang="en-US" sz="850" dirty="0"/>
+          </a:p>
+        </p:txBody>
+      </p:sp>
+      <p:sp>
+        <p:nvSpPr>
+          <p:cNvPr id="45" name="Shape 43"/>
+          <p:cNvSpPr/>
+          <p:nvPr/>
+        </p:nvSpPr>
+        <p:spPr>
+          <a:xfrm>
+            <a:off x="5755285" y="5052060"/>
+            <a:ext cx="118872" cy="155448"/>
+          </a:xfrm>
+          <a:prstGeom prst="diamond">
+            <a:avLst/>
+          </a:prstGeom>
+          <a:solidFill>
+            <a:srgbClr val="1B1B1F"/>
+          </a:solidFill>
+          <a:ln w="12700">
+            <a:solidFill>
+              <a:srgbClr val="1B1B1F"/>
+            </a:solidFill>
+            <a:prstDash val="solid"/>
+          </a:ln>
+        </p:spPr>
+      </p:sp>
+      <p:sp>
+        <p:nvSpPr>
+          <p:cNvPr id="46" name="Text 44"/>
+          <p:cNvSpPr/>
+          <p:nvPr/>
+        </p:nvSpPr>
+        <p:spPr>
+          <a:xfrm>
+            <a:off x="5558689" y="5216652"/>
+            <a:ext cx="512064" cy="182880"/>
+          </a:xfrm>
+          <a:prstGeom prst="rect">
+            <a:avLst/>
+          </a:prstGeom>
+          <a:noFill/>
+          <a:ln/>
+        </p:spPr>
+        <p:txBody>
+          <a:bodyPr wrap="square" rtlCol="0" anchor="ctr"/>
+          <a:lstStyle/>
+          <a:p>
+            <a:pPr algn="ctr" indent="0" marL="0">
+              <a:buNone/>
+            </a:pPr>
+            <a:r>
+              <a:rPr lang="en-US" sz="850" dirty="0">
+                <a:solidFill>
+                  <a:srgbClr val="1B1B1F"/>
+                </a:solidFill>
+                <a:latin typeface="Helvetica" pitchFamily="34" charset="0"/>
+                <a:ea typeface="Helvetica" pitchFamily="34" charset="-122"/>
+                <a:cs typeface="Helvetica" pitchFamily="34" charset="-120"/>
+              </a:rPr>
+              <a:t>M2</a:t>
+            </a:r>
+            <a:endParaRPr lang="en-US" sz="850" dirty="0"/>
+          </a:p>
+        </p:txBody>
+      </p:sp>
+      <p:sp>
+        <p:nvSpPr>
+          <p:cNvPr id="47" name="Shape 45"/>
+          <p:cNvSpPr/>
+          <p:nvPr/>
+        </p:nvSpPr>
+        <p:spPr>
+          <a:xfrm>
+            <a:off x="6322300" y="5052060"/>
+            <a:ext cx="118872" cy="155448"/>
+          </a:xfrm>
+          <a:prstGeom prst="diamond">
+            <a:avLst/>
+          </a:prstGeom>
+          <a:solidFill>
+            <a:srgbClr val="1B1B1F"/>
+          </a:solidFill>
+          <a:ln w="12700">
+            <a:solidFill>
+              <a:srgbClr val="1B1B1F"/>
+            </a:solidFill>
+            <a:prstDash val="solid"/>
+          </a:ln>
+        </p:spPr>
+      </p:sp>
+      <p:sp>
+        <p:nvSpPr>
+          <p:cNvPr id="48" name="Text 46"/>
+          <p:cNvSpPr/>
+          <p:nvPr/>
+        </p:nvSpPr>
+        <p:spPr>
+          <a:xfrm>
+            <a:off x="6125704" y="5216652"/>
+            <a:ext cx="512064" cy="182880"/>
+          </a:xfrm>
+          <a:prstGeom prst="rect">
+            <a:avLst/>
+          </a:prstGeom>
+          <a:noFill/>
+          <a:ln/>
+        </p:spPr>
+        <p:txBody>
+          <a:bodyPr wrap="square" rtlCol="0" anchor="ctr"/>
+          <a:lstStyle/>
+          <a:p>
+            <a:pPr algn="ctr" indent="0" marL="0">
+              <a:buNone/>
+            </a:pPr>
+            <a:r>
+              <a:rPr lang="en-US" sz="850" dirty="0">
+                <a:solidFill>
+                  <a:srgbClr val="1B1B1F"/>
+                </a:solidFill>
+                <a:latin typeface="Helvetica" pitchFamily="34" charset="0"/>
+                <a:ea typeface="Helvetica" pitchFamily="34" charset="-122"/>
+                <a:cs typeface="Helvetica" pitchFamily="34" charset="-120"/>
+              </a:rPr>
+              <a:t>M3</a:t>
+            </a:r>
+            <a:endParaRPr lang="en-US" sz="850" dirty="0"/>
+          </a:p>
+        </p:txBody>
+      </p:sp>
+      <p:sp>
+        <p:nvSpPr>
+          <p:cNvPr id="49" name="Shape 47"/>
+          <p:cNvSpPr/>
+          <p:nvPr/>
+        </p:nvSpPr>
+        <p:spPr>
+          <a:xfrm>
+            <a:off x="7456328" y="5052060"/>
+            <a:ext cx="118872" cy="155448"/>
+          </a:xfrm>
+          <a:prstGeom prst="diamond">
+            <a:avLst/>
+          </a:prstGeom>
+          <a:solidFill>
+            <a:srgbClr val="1B1B1F"/>
+          </a:solidFill>
+          <a:ln w="12700">
+            <a:solidFill>
+              <a:srgbClr val="1B1B1F"/>
+            </a:solidFill>
+            <a:prstDash val="solid"/>
+          </a:ln>
+        </p:spPr>
+      </p:sp>
+      <p:sp>
+        <p:nvSpPr>
+          <p:cNvPr id="50" name="Text 48"/>
+          <p:cNvSpPr/>
+          <p:nvPr/>
+        </p:nvSpPr>
+        <p:spPr>
+          <a:xfrm>
+            <a:off x="7259732" y="5216652"/>
+            <a:ext cx="512064" cy="182880"/>
+          </a:xfrm>
+          <a:prstGeom prst="rect">
+            <a:avLst/>
+          </a:prstGeom>
+          <a:noFill/>
+          <a:ln/>
+        </p:spPr>
+        <p:txBody>
+          <a:bodyPr wrap="square" rtlCol="0" anchor="ctr"/>
+          <a:lstStyle/>
+          <a:p>
+            <a:pPr algn="ctr" indent="0" marL="0">
+              <a:buNone/>
+            </a:pPr>
+            <a:r>
+              <a:rPr lang="en-US" sz="850" dirty="0">
+                <a:solidFill>
+                  <a:srgbClr val="1B1B1F"/>
+                </a:solidFill>
+                <a:latin typeface="Helvetica" pitchFamily="34" charset="0"/>
+                <a:ea typeface="Helvetica" pitchFamily="34" charset="-122"/>
+                <a:cs typeface="Helvetica" pitchFamily="34" charset="-120"/>
+              </a:rPr>
+              <a:t>M4</a:t>
+            </a:r>
+            <a:endParaRPr lang="en-US" sz="850" dirty="0"/>
+          </a:p>
+        </p:txBody>
+      </p:sp>
+      <p:sp>
+        <p:nvSpPr>
+          <p:cNvPr id="51" name="Shape 49"/>
+          <p:cNvSpPr/>
+          <p:nvPr/>
+        </p:nvSpPr>
+        <p:spPr>
+          <a:xfrm>
+            <a:off x="8590357" y="5052060"/>
+            <a:ext cx="118872" cy="155448"/>
+          </a:xfrm>
+          <a:prstGeom prst="diamond">
+            <a:avLst/>
+          </a:prstGeom>
+          <a:solidFill>
+            <a:srgbClr val="1B1B1F"/>
+          </a:solidFill>
+          <a:ln w="12700">
+            <a:solidFill>
+              <a:srgbClr val="1B1B1F"/>
+            </a:solidFill>
+            <a:prstDash val="solid"/>
+          </a:ln>
+        </p:spPr>
+      </p:sp>
+      <p:sp>
+        <p:nvSpPr>
+          <p:cNvPr id="52" name="Text 50"/>
+          <p:cNvSpPr/>
+          <p:nvPr/>
+        </p:nvSpPr>
+        <p:spPr>
+          <a:xfrm>
+            <a:off x="8393761" y="5216652"/>
+            <a:ext cx="512064" cy="182880"/>
+          </a:xfrm>
+          <a:prstGeom prst="rect">
+            <a:avLst/>
+          </a:prstGeom>
+          <a:noFill/>
+          <a:ln/>
+        </p:spPr>
+        <p:txBody>
+          <a:bodyPr wrap="square" rtlCol="0" anchor="ctr"/>
+          <a:lstStyle/>
+          <a:p>
+            <a:pPr algn="ctr" indent="0" marL="0">
+              <a:buNone/>
+            </a:pPr>
+            <a:r>
+              <a:rPr lang="en-US" sz="850" dirty="0">
+                <a:solidFill>
+                  <a:srgbClr val="1B1B1F"/>
+                </a:solidFill>
+                <a:latin typeface="Helvetica" pitchFamily="34" charset="0"/>
+                <a:ea typeface="Helvetica" pitchFamily="34" charset="-122"/>
+                <a:cs typeface="Helvetica" pitchFamily="34" charset="-120"/>
+              </a:rPr>
+              <a:t>M5</a:t>
+            </a:r>
+            <a:endParaRPr lang="en-US" sz="850" dirty="0"/>
+          </a:p>
+        </p:txBody>
+      </p:sp>
+      <p:sp>
+        <p:nvSpPr>
+          <p:cNvPr id="53" name="Shape 51"/>
+          <p:cNvSpPr/>
+          <p:nvPr/>
+        </p:nvSpPr>
+        <p:spPr>
+          <a:xfrm>
+            <a:off x="10291399" y="5052060"/>
+            <a:ext cx="118872" cy="155448"/>
+          </a:xfrm>
+          <a:prstGeom prst="diamond">
+            <a:avLst/>
+          </a:prstGeom>
+          <a:solidFill>
+            <a:srgbClr val="1B1B1F"/>
+          </a:solidFill>
+          <a:ln w="12700">
+            <a:solidFill>
+              <a:srgbClr val="1B1B1F"/>
+            </a:solidFill>
+            <a:prstDash val="solid"/>
+          </a:ln>
+        </p:spPr>
+      </p:sp>
+      <p:sp>
+        <p:nvSpPr>
+          <p:cNvPr id="54" name="Text 52"/>
+          <p:cNvSpPr/>
+          <p:nvPr/>
+        </p:nvSpPr>
+        <p:spPr>
+          <a:xfrm>
+            <a:off x="10094803" y="5216652"/>
+            <a:ext cx="512064" cy="182880"/>
+          </a:xfrm>
+          <a:prstGeom prst="rect">
+            <a:avLst/>
+          </a:prstGeom>
+          <a:noFill/>
+          <a:ln/>
+        </p:spPr>
+        <p:txBody>
+          <a:bodyPr wrap="square" rtlCol="0" anchor="ctr"/>
+          <a:lstStyle/>
+          <a:p>
+            <a:pPr algn="ctr" indent="0" marL="0">
+              <a:buNone/>
+            </a:pPr>
+            <a:r>
+              <a:rPr lang="en-US" sz="850" dirty="0">
+                <a:solidFill>
+                  <a:srgbClr val="1B1B1F"/>
+                </a:solidFill>
+                <a:latin typeface="Helvetica" pitchFamily="34" charset="0"/>
+                <a:ea typeface="Helvetica" pitchFamily="34" charset="-122"/>
+                <a:cs typeface="Helvetica" pitchFamily="34" charset="-120"/>
+              </a:rPr>
+              <a:t>M7</a:t>
+            </a:r>
+            <a:endParaRPr lang="en-US" sz="850" dirty="0"/>
+          </a:p>
+        </p:txBody>
+      </p:sp>
+      <p:sp>
+        <p:nvSpPr>
+          <p:cNvPr id="55" name="Shape 53"/>
+          <p:cNvSpPr/>
+          <p:nvPr/>
+        </p:nvSpPr>
+        <p:spPr>
+          <a:xfrm>
+            <a:off x="11425428" y="5052060"/>
+            <a:ext cx="118872" cy="155448"/>
+          </a:xfrm>
+          <a:prstGeom prst="diamond">
+            <a:avLst/>
+          </a:prstGeom>
+          <a:solidFill>
+            <a:srgbClr val="1B1B1F"/>
+          </a:solidFill>
+          <a:ln w="12700">
+            <a:solidFill>
+              <a:srgbClr val="1B1B1F"/>
+            </a:solidFill>
+            <a:prstDash val="solid"/>
+          </a:ln>
+        </p:spPr>
+      </p:sp>
+      <p:sp>
+        <p:nvSpPr>
+          <p:cNvPr id="56" name="Text 54"/>
+          <p:cNvSpPr/>
+          <p:nvPr/>
+        </p:nvSpPr>
+        <p:spPr>
+          <a:xfrm>
+            <a:off x="11228832" y="5216652"/>
+            <a:ext cx="512064" cy="182880"/>
+          </a:xfrm>
+          <a:prstGeom prst="rect">
+            <a:avLst/>
+          </a:prstGeom>
+          <a:noFill/>
+          <a:ln/>
+        </p:spPr>
+        <p:txBody>
+          <a:bodyPr wrap="square" rtlCol="0" anchor="ctr"/>
+          <a:lstStyle/>
+          <a:p>
+            <a:pPr algn="ctr" indent="0" marL="0">
+              <a:buNone/>
+            </a:pPr>
+            <a:r>
+              <a:rPr lang="en-US" sz="850" dirty="0">
+                <a:solidFill>
+                  <a:srgbClr val="1B1B1F"/>
+                </a:solidFill>
+                <a:latin typeface="Helvetica" pitchFamily="34" charset="0"/>
+                <a:ea typeface="Helvetica" pitchFamily="34" charset="-122"/>
+                <a:cs typeface="Helvetica" pitchFamily="34" charset="-120"/>
+              </a:rPr>
+              <a:t>M8</a:t>
+            </a:r>
+            <a:endParaRPr lang="en-US" sz="850" dirty="0"/>
+          </a:p>
+        </p:txBody>
+      </p:sp>
+      <p:sp>
+        <p:nvSpPr>
+          <p:cNvPr id="57" name="Shape 55"/>
+          <p:cNvSpPr/>
+          <p:nvPr/>
+        </p:nvSpPr>
+        <p:spPr>
+          <a:xfrm>
+            <a:off x="4113679" y="1591056"/>
+            <a:ext cx="0" cy="3479292"/>
+          </a:xfrm>
+          <a:prstGeom prst="line">
+            <a:avLst/>
+          </a:prstGeom>
+          <a:noFill/>
+          <a:ln w="19050">
+            <a:solidFill>
+              <a:srgbClr val="B91C1C"/>
+            </a:solidFill>
+            <a:prstDash val="dash"/>
+          </a:ln>
+        </p:spPr>
+      </p:sp>
+      <p:sp>
+        <p:nvSpPr>
+          <p:cNvPr id="58" name="Text 56"/>
+          <p:cNvSpPr/>
+          <p:nvPr/>
+        </p:nvSpPr>
+        <p:spPr>
+          <a:xfrm>
+            <a:off x="3821071" y="1353312"/>
+            <a:ext cx="640080" cy="201168"/>
+          </a:xfrm>
+          <a:prstGeom prst="rect">
+            <a:avLst/>
+          </a:prstGeom>
+          <a:noFill/>
+          <a:ln/>
+        </p:spPr>
+        <p:txBody>
+          <a:bodyPr wrap="square" rtlCol="0" anchor="ctr"/>
+          <a:lstStyle/>
+          <a:p>
+            <a:pPr algn="ctr" indent="0" marL="0">
+              <a:buNone/>
+            </a:pPr>
+            <a:r>
+              <a:rPr lang="en-US" sz="900" b="1" dirty="0">
+                <a:solidFill>
+                  <a:srgbClr val="B91C1C"/>
+                </a:solidFill>
+                <a:latin typeface="Helvetica" pitchFamily="34" charset="0"/>
+                <a:ea typeface="Helvetica" pitchFamily="34" charset="-122"/>
+                <a:cs typeface="Helvetica" pitchFamily="34" charset="-120"/>
+              </a:rPr>
+              <a:t>today</a:t>
+            </a:r>
+            <a:endParaRPr lang="en-US" sz="900" dirty="0"/>
+          </a:p>
+        </p:txBody>
+      </p:sp>
+      <p:sp>
+        <p:nvSpPr>
+          <p:cNvPr id="59" name="Text 57"/>
+          <p:cNvSpPr/>
+          <p:nvPr/>
+        </p:nvSpPr>
+        <p:spPr>
+          <a:xfrm>
+            <a:off x="566928" y="5687568"/>
+            <a:ext cx="11055096" cy="457200"/>
+          </a:xfrm>
+          <a:prstGeom prst="rect">
+            <a:avLst/>
+          </a:prstGeom>
+          <a:noFill/>
+          <a:ln/>
+        </p:spPr>
+        <p:txBody>
+          <a:bodyPr wrap="square" rtlCol="0" anchor="ctr"/>
+          <a:lstStyle/>
+          <a:p>
+            <a:pPr indent="0" marL="0">
+              <a:buNone/>
+            </a:pPr>
+            <a:r>
+              <a:rPr lang="en-US" sz="1200" dirty="0">
                 <a:solidFill>
                   <a:srgbClr val="B45309"/>
                 </a:solidFill>
@@ -5663,204 +5949,15 @@
                 <a:ea typeface="Helvetica" pitchFamily="34" charset="-122"/>
                 <a:cs typeface="Helvetica" pitchFamily="34" charset="-120"/>
               </a:rPr>
-              <a:t>No runnable reconstruction pipeline yet.</a:t>
-            </a:r>
-            <a:endParaRPr lang="en-US" sz="1300" dirty="0"/>
-          </a:p>
-          <a:p>
-            <a:pPr lvl="1" marL="508000" indent="-254000">
-              <a:lnSpc>
-                <a:spcPct val="135000"/>
-              </a:lnSpc>
-              <a:buSzPct val="100000"/>
-              <a:buChar char="▪"/>
-            </a:pPr>
-            <a:r>
-              <a:rPr lang="en-US" sz="1300" dirty="0">
-                <a:solidFill>
-                  <a:srgbClr val="1B1B1F"/>
-                </a:solidFill>
-                <a:latin typeface="Helvetica" pitchFamily="34" charset="0"/>
-                <a:ea typeface="Helvetica" pitchFamily="34" charset="-122"/>
-                <a:cs typeface="Helvetica" pitchFamily="34" charset="-120"/>
-              </a:rPr>
-              <a:t>Two weeks went into foundations and process. That was deliberate — but it means nothing reconstructs a part today.</a:t>
-            </a:r>
-            <a:endParaRPr lang="en-US" sz="1300" dirty="0"/>
-          </a:p>
-          <a:p>
-            <a:pPr marL="342900" indent="-342900">
-              <a:lnSpc>
-                <a:spcPct val="135000"/>
-              </a:lnSpc>
-              <a:buSzPct val="100000"/>
-              <a:buChar char="•"/>
-            </a:pPr>
-            <a:r>
-              <a:rPr lang="en-US" sz="1300" b="1" dirty="0">
-                <a:solidFill>
-                  <a:srgbClr val="B45309"/>
-                </a:solidFill>
-                <a:latin typeface="Helvetica" pitchFamily="34" charset="0"/>
-                <a:ea typeface="Helvetica" pitchFamily="34" charset="-122"/>
-                <a:cs typeface="Helvetica" pitchFamily="34" charset="-120"/>
-              </a:rPr>
-              <a:t>M1 (25 Sept) will not be met as scheduled.</a:t>
-            </a:r>
-            <a:endParaRPr lang="en-US" sz="1300" dirty="0"/>
-          </a:p>
-          <a:p>
-            <a:pPr lvl="1" marL="508000" indent="-254000">
-              <a:lnSpc>
-                <a:spcPct val="135000"/>
-              </a:lnSpc>
-              <a:buSzPct val="100000"/>
-              <a:buChar char="▪"/>
-            </a:pPr>
-            <a:r>
-              <a:rPr lang="en-US" sz="1300" dirty="0">
-                <a:solidFill>
-                  <a:srgbClr val="1B1B1F"/>
-                </a:solidFill>
-                <a:latin typeface="Helvetica" pitchFamily="34" charset="0"/>
-                <a:ea typeface="Helvetica" pitchFamily="34" charset="-122"/>
-                <a:cs typeface="Helvetica" pitchFamily="34" charset="-120"/>
-              </a:rPr>
-              <a:t>The critical-chain arithmetic says early October. We are saying so now, a week before the gate, rather than at it.</a:t>
-            </a:r>
-            <a:endParaRPr lang="en-US" sz="1300" dirty="0"/>
-          </a:p>
-          <a:p>
-            <a:pPr marL="342900" indent="-342900">
-              <a:lnSpc>
-                <a:spcPct val="135000"/>
-              </a:lnSpc>
-              <a:buSzPct val="100000"/>
-              <a:buChar char="•"/>
-            </a:pPr>
-            <a:r>
-              <a:rPr lang="en-US" sz="1300" b="1" dirty="0">
-                <a:solidFill>
-                  <a:srgbClr val="1B1B1F"/>
-                </a:solidFill>
-                <a:latin typeface="Helvetica" pitchFamily="34" charset="0"/>
-                <a:ea typeface="Helvetica" pitchFamily="34" charset="-122"/>
-                <a:cs typeface="Helvetica" pitchFamily="34" charset="-120"/>
-              </a:rPr>
-              <a:t>F-03 took 4.5 hours against a 3-hour estimate.</a:t>
-            </a:r>
-            <a:endParaRPr lang="en-US" sz="1300" dirty="0"/>
-          </a:p>
-          <a:p>
-            <a:pPr lvl="1" marL="508000" indent="-254000">
-              <a:lnSpc>
-                <a:spcPct val="135000"/>
-              </a:lnSpc>
-              <a:buSzPct val="100000"/>
-              <a:buChar char="▪"/>
-            </a:pPr>
-            <a:r>
-              <a:rPr lang="en-US" sz="1300" dirty="0">
-                <a:solidFill>
-                  <a:srgbClr val="1B1B1F"/>
-                </a:solidFill>
-                <a:latin typeface="Helvetica" pitchFamily="34" charset="0"/>
-                <a:ea typeface="Helvetica" pitchFamily="34" charset="-122"/>
-                <a:cs typeface="Helvetica" pitchFamily="34" charset="-120"/>
-              </a:rPr>
-              <a:t>Five API operations, ten worked examples, six tests and a new contributing rule. Recorded as the real number — that is how the next estimate gets less wrong.</a:t>
-            </a:r>
-            <a:endParaRPr lang="en-US" sz="1300" dirty="0"/>
-          </a:p>
-          <a:p>
-            <a:pPr marL="342900" indent="-342900">
-              <a:lnSpc>
-                <a:spcPct val="135000"/>
-              </a:lnSpc>
-              <a:buSzPct val="100000"/>
-              <a:buChar char="•"/>
-            </a:pPr>
-            <a:r>
-              <a:rPr lang="en-US" sz="1300" b="1" dirty="0">
-                <a:solidFill>
-                  <a:srgbClr val="1B1B1F"/>
-                </a:solidFill>
-                <a:latin typeface="Helvetica" pitchFamily="34" charset="0"/>
-                <a:ea typeface="Helvetica" pitchFamily="34" charset="-122"/>
-                <a:cs typeface="Helvetica" pitchFamily="34" charset="-120"/>
-              </a:rPr>
-              <a:t>Two completed stories have no actual hours recorded at all.</a:t>
-            </a:r>
-            <a:endParaRPr lang="en-US" sz="1300" dirty="0"/>
-          </a:p>
-          <a:p>
-            <a:pPr lvl="1" marL="508000" indent="-254000">
-              <a:lnSpc>
-                <a:spcPct val="135000"/>
-              </a:lnSpc>
-              <a:buSzPct val="100000"/>
-              <a:buChar char="▪"/>
-            </a:pPr>
-            <a:r>
-              <a:rPr lang="en-US" sz="1300" dirty="0">
-                <a:solidFill>
-                  <a:srgbClr val="1B1B1F"/>
-                </a:solidFill>
-                <a:latin typeface="Helvetica" pitchFamily="34" charset="0"/>
-                <a:ea typeface="Helvetica" pitchFamily="34" charset="-122"/>
-                <a:cs typeface="Helvetica" pitchFamily="34" charset="-120"/>
-              </a:rPr>
-              <a:t>Caught in review. Now a written rule: measured number, or visibly blank — never the estimate copied across, which looks identical to a real measurement.</a:t>
-            </a:r>
-            <a:endParaRPr lang="en-US" sz="1300" dirty="0"/>
-          </a:p>
-          <a:p>
-            <a:pPr marL="342900" indent="-342900">
-              <a:lnSpc>
-                <a:spcPct val="135000"/>
-              </a:lnSpc>
-              <a:buSzPct val="100000"/>
-              <a:buChar char="•"/>
-            </a:pPr>
-            <a:r>
-              <a:rPr lang="en-US" sz="1300" b="1" dirty="0">
-                <a:solidFill>
-                  <a:srgbClr val="1B1B1F"/>
-                </a:solidFill>
-                <a:latin typeface="Helvetica" pitchFamily="34" charset="0"/>
-                <a:ea typeface="Helvetica" pitchFamily="34" charset="-122"/>
-                <a:cs typeface="Helvetica" pitchFamily="34" charset="-120"/>
-              </a:rPr>
-              <a:t>Golden capture needed three attempts.</a:t>
-            </a:r>
-            <a:endParaRPr lang="en-US" sz="1300" dirty="0"/>
-          </a:p>
-          <a:p>
-            <a:pPr lvl="1" marL="508000" indent="-254000">
-              <a:lnSpc>
-                <a:spcPct val="135000"/>
-              </a:lnSpc>
-              <a:buSzPct val="100000"/>
-              <a:buChar char="▪"/>
-            </a:pPr>
-            <a:r>
-              <a:rPr lang="en-US" sz="1300" dirty="0">
-                <a:solidFill>
-                  <a:srgbClr val="1B1B1F"/>
-                </a:solidFill>
-                <a:latin typeface="Helvetica" pitchFamily="34" charset="0"/>
-                <a:ea typeface="Helvetica" pitchFamily="34" charset="-122"/>
-                <a:cs typeface="Helvetica" pitchFamily="34" charset="-120"/>
-              </a:rPr>
-              <a:t>First set framed the part too small; the retake caught the phone silently switching lenses mid-session, which would have invalidated the camera calibration.</a:t>
-            </a:r>
-            <a:endParaRPr lang="en-US" sz="1300" dirty="0"/>
-          </a:p>
-        </p:txBody>
-      </p:sp>
-      <p:sp>
-        <p:nvSpPr>
-          <p:cNvPr id="6" name="Text 4"/>
+              <a:t>M1 (25 Sept) is at risk. The chain needs ~40 hours to reach a working endpoint — about four and a half weeks from a 3 Sept start, which lands in early October, not late September. We are flagging it now rather than at the gate.</a:t>
+            </a:r>
+            <a:endParaRPr lang="en-US" sz="1200" dirty="0"/>
+          </a:p>
+        </p:txBody>
+      </p:sp>
+      <p:sp>
+        <p:nvSpPr>
+          <p:cNvPr id="60" name="Text 58"/>
           <p:cNvSpPr/>
           <p:nvPr/>
         </p:nvSpPr>
@@ -5899,7 +5996,7 @@
       </p:sp>
       <p:sp>
         <p:nvSpPr>
-          <p:cNvPr id="7" name="Text 5"/>
+          <p:cNvPr id="61" name="Text 59"/>
           <p:cNvSpPr/>
           <p:nvPr/>
         </p:nvSpPr>
@@ -6001,7 +6098,7 @@
                 <a:ea typeface="Helvetica" pitchFamily="34" charset="-122"/>
                 <a:cs typeface="Helvetica" pitchFamily="34" charset="-120"/>
               </a:rPr>
-              <a:t>QUESTION 4 · BY 2 OCTOBER</a:t>
+              <a:t>QUESTION 3</a:t>
             </a:r>
             <a:endParaRPr lang="en-US" sz="1100" dirty="0"/>
           </a:p>
@@ -6040,7 +6137,7 @@
                 <a:ea typeface="Helvetica" pitchFamily="34" charset="-122"/>
                 <a:cs typeface="Helvetica" pitchFamily="34" charset="-120"/>
               </a:rPr>
-              <a:t>What we will have by the next review</a:t>
+              <a:t>What slipped, and why</a:t>
             </a:r>
             <a:endParaRPr lang="en-US" sz="3000" dirty="0"/>
           </a:p>
@@ -6066,9 +6163,449 @@
           <a:ln/>
         </p:spPr>
       </p:sp>
+      <p:sp>
+        <p:nvSpPr>
+          <p:cNvPr id="5" name="Text 3"/>
+          <p:cNvSpPr/>
+          <p:nvPr/>
+        </p:nvSpPr>
+        <p:spPr>
+          <a:xfrm>
+            <a:off x="566928" y="1536192"/>
+            <a:ext cx="11055096" cy="4572000"/>
+          </a:xfrm>
+          <a:prstGeom prst="rect">
+            <a:avLst/>
+          </a:prstGeom>
+          <a:noFill/>
+          <a:ln/>
+        </p:spPr>
+        <p:txBody>
+          <a:bodyPr wrap="square" rtlCol="0" anchor="ctr"/>
+          <a:lstStyle/>
+          <a:p>
+            <a:pPr marL="342900" indent="-342900">
+              <a:lnSpc>
+                <a:spcPct val="135000"/>
+              </a:lnSpc>
+              <a:buSzPct val="100000"/>
+              <a:buChar char="•"/>
+            </a:pPr>
+            <a:r>
+              <a:rPr lang="en-US" sz="1300" b="1" dirty="0">
+                <a:solidFill>
+                  <a:srgbClr val="B45309"/>
+                </a:solidFill>
+                <a:latin typeface="Helvetica" pitchFamily="34" charset="0"/>
+                <a:ea typeface="Helvetica" pitchFamily="34" charset="-122"/>
+                <a:cs typeface="Helvetica" pitchFamily="34" charset="-120"/>
+              </a:rPr>
+              <a:t>No runnable reconstruction pipeline yet.</a:t>
+            </a:r>
+            <a:endParaRPr lang="en-US" sz="1300" dirty="0"/>
+          </a:p>
+          <a:p>
+            <a:pPr lvl="1" marL="508000" indent="-254000">
+              <a:lnSpc>
+                <a:spcPct val="135000"/>
+              </a:lnSpc>
+              <a:buSzPct val="100000"/>
+              <a:buChar char="▪"/>
+            </a:pPr>
+            <a:r>
+              <a:rPr lang="en-US" sz="1300" dirty="0">
+                <a:solidFill>
+                  <a:srgbClr val="1B1B1F"/>
+                </a:solidFill>
+                <a:latin typeface="Helvetica" pitchFamily="34" charset="0"/>
+                <a:ea typeface="Helvetica" pitchFamily="34" charset="-122"/>
+                <a:cs typeface="Helvetica" pitchFamily="34" charset="-120"/>
+              </a:rPr>
+              <a:t>Two weeks went into foundations and process. That was deliberate — but it means nothing reconstructs a part today.</a:t>
+            </a:r>
+            <a:endParaRPr lang="en-US" sz="1300" dirty="0"/>
+          </a:p>
+          <a:p>
+            <a:pPr marL="342900" indent="-342900">
+              <a:lnSpc>
+                <a:spcPct val="135000"/>
+              </a:lnSpc>
+              <a:buSzPct val="100000"/>
+              <a:buChar char="•"/>
+            </a:pPr>
+            <a:r>
+              <a:rPr lang="en-US" sz="1300" b="1" dirty="0">
+                <a:solidFill>
+                  <a:srgbClr val="B45309"/>
+                </a:solidFill>
+                <a:latin typeface="Helvetica" pitchFamily="34" charset="0"/>
+                <a:ea typeface="Helvetica" pitchFamily="34" charset="-122"/>
+                <a:cs typeface="Helvetica" pitchFamily="34" charset="-120"/>
+              </a:rPr>
+              <a:t>M1 (25 Sept) will not be met as scheduled.</a:t>
+            </a:r>
+            <a:endParaRPr lang="en-US" sz="1300" dirty="0"/>
+          </a:p>
+          <a:p>
+            <a:pPr lvl="1" marL="508000" indent="-254000">
+              <a:lnSpc>
+                <a:spcPct val="135000"/>
+              </a:lnSpc>
+              <a:buSzPct val="100000"/>
+              <a:buChar char="▪"/>
+            </a:pPr>
+            <a:r>
+              <a:rPr lang="en-US" sz="1300" dirty="0">
+                <a:solidFill>
+                  <a:srgbClr val="1B1B1F"/>
+                </a:solidFill>
+                <a:latin typeface="Helvetica" pitchFamily="34" charset="0"/>
+                <a:ea typeface="Helvetica" pitchFamily="34" charset="-122"/>
+                <a:cs typeface="Helvetica" pitchFamily="34" charset="-120"/>
+              </a:rPr>
+              <a:t>The critical-chain arithmetic says early October. We are saying so now, a week before the gate, rather than at it.</a:t>
+            </a:r>
+            <a:endParaRPr lang="en-US" sz="1300" dirty="0"/>
+          </a:p>
+          <a:p>
+            <a:pPr marL="342900" indent="-342900">
+              <a:lnSpc>
+                <a:spcPct val="135000"/>
+              </a:lnSpc>
+              <a:buSzPct val="100000"/>
+              <a:buChar char="•"/>
+            </a:pPr>
+            <a:r>
+              <a:rPr lang="en-US" sz="1300" b="1" dirty="0">
+                <a:solidFill>
+                  <a:srgbClr val="1B1B1F"/>
+                </a:solidFill>
+                <a:latin typeface="Helvetica" pitchFamily="34" charset="0"/>
+                <a:ea typeface="Helvetica" pitchFamily="34" charset="-122"/>
+                <a:cs typeface="Helvetica" pitchFamily="34" charset="-120"/>
+              </a:rPr>
+              <a:t>F-03 took 4.5 hours against a 3-hour estimate.</a:t>
+            </a:r>
+            <a:endParaRPr lang="en-US" sz="1300" dirty="0"/>
+          </a:p>
+          <a:p>
+            <a:pPr lvl="1" marL="508000" indent="-254000">
+              <a:lnSpc>
+                <a:spcPct val="135000"/>
+              </a:lnSpc>
+              <a:buSzPct val="100000"/>
+              <a:buChar char="▪"/>
+            </a:pPr>
+            <a:r>
+              <a:rPr lang="en-US" sz="1300" dirty="0">
+                <a:solidFill>
+                  <a:srgbClr val="1B1B1F"/>
+                </a:solidFill>
+                <a:latin typeface="Helvetica" pitchFamily="34" charset="0"/>
+                <a:ea typeface="Helvetica" pitchFamily="34" charset="-122"/>
+                <a:cs typeface="Helvetica" pitchFamily="34" charset="-120"/>
+              </a:rPr>
+              <a:t>Five API operations, ten worked examples, six tests and a new contributing rule. Recorded as the real number — that is how the next estimate gets less wrong.</a:t>
+            </a:r>
+            <a:endParaRPr lang="en-US" sz="1300" dirty="0"/>
+          </a:p>
+          <a:p>
+            <a:pPr marL="342900" indent="-342900">
+              <a:lnSpc>
+                <a:spcPct val="135000"/>
+              </a:lnSpc>
+              <a:buSzPct val="100000"/>
+              <a:buChar char="•"/>
+            </a:pPr>
+            <a:r>
+              <a:rPr lang="en-US" sz="1300" b="1" dirty="0">
+                <a:solidFill>
+                  <a:srgbClr val="1B1B1F"/>
+                </a:solidFill>
+                <a:latin typeface="Helvetica" pitchFamily="34" charset="0"/>
+                <a:ea typeface="Helvetica" pitchFamily="34" charset="-122"/>
+                <a:cs typeface="Helvetica" pitchFamily="34" charset="-120"/>
+              </a:rPr>
+              <a:t>Two completed stories have no actual hours recorded at all.</a:t>
+            </a:r>
+            <a:endParaRPr lang="en-US" sz="1300" dirty="0"/>
+          </a:p>
+          <a:p>
+            <a:pPr lvl="1" marL="508000" indent="-254000">
+              <a:lnSpc>
+                <a:spcPct val="135000"/>
+              </a:lnSpc>
+              <a:buSzPct val="100000"/>
+              <a:buChar char="▪"/>
+            </a:pPr>
+            <a:r>
+              <a:rPr lang="en-US" sz="1300" dirty="0">
+                <a:solidFill>
+                  <a:srgbClr val="1B1B1F"/>
+                </a:solidFill>
+                <a:latin typeface="Helvetica" pitchFamily="34" charset="0"/>
+                <a:ea typeface="Helvetica" pitchFamily="34" charset="-122"/>
+                <a:cs typeface="Helvetica" pitchFamily="34" charset="-120"/>
+              </a:rPr>
+              <a:t>Caught in review. Now a written rule: measured number, or visibly blank — never the estimate copied across, which looks identical to a real measurement.</a:t>
+            </a:r>
+            <a:endParaRPr lang="en-US" sz="1300" dirty="0"/>
+          </a:p>
+          <a:p>
+            <a:pPr marL="342900" indent="-342900">
+              <a:lnSpc>
+                <a:spcPct val="135000"/>
+              </a:lnSpc>
+              <a:buSzPct val="100000"/>
+              <a:buChar char="•"/>
+            </a:pPr>
+            <a:r>
+              <a:rPr lang="en-US" sz="1300" b="1" dirty="0">
+                <a:solidFill>
+                  <a:srgbClr val="1B1B1F"/>
+                </a:solidFill>
+                <a:latin typeface="Helvetica" pitchFamily="34" charset="0"/>
+                <a:ea typeface="Helvetica" pitchFamily="34" charset="-122"/>
+                <a:cs typeface="Helvetica" pitchFamily="34" charset="-120"/>
+              </a:rPr>
+              <a:t>Golden capture needed three attempts.</a:t>
+            </a:r>
+            <a:endParaRPr lang="en-US" sz="1300" dirty="0"/>
+          </a:p>
+          <a:p>
+            <a:pPr lvl="1" marL="508000" indent="-254000">
+              <a:lnSpc>
+                <a:spcPct val="135000"/>
+              </a:lnSpc>
+              <a:buSzPct val="100000"/>
+              <a:buChar char="▪"/>
+            </a:pPr>
+            <a:r>
+              <a:rPr lang="en-US" sz="1300" dirty="0">
+                <a:solidFill>
+                  <a:srgbClr val="1B1B1F"/>
+                </a:solidFill>
+                <a:latin typeface="Helvetica" pitchFamily="34" charset="0"/>
+                <a:ea typeface="Helvetica" pitchFamily="34" charset="-122"/>
+                <a:cs typeface="Helvetica" pitchFamily="34" charset="-120"/>
+              </a:rPr>
+              <a:t>First set framed the part too small; the retake caught the phone silently switching lenses mid-session, which would have invalidated the camera calibration.</a:t>
+            </a:r>
+            <a:endParaRPr lang="en-US" sz="1300" dirty="0"/>
+          </a:p>
+        </p:txBody>
+      </p:sp>
+      <p:sp>
+        <p:nvSpPr>
+          <p:cNvPr id="6" name="Text 4"/>
+          <p:cNvSpPr/>
+          <p:nvPr/>
+        </p:nvSpPr>
+        <p:spPr>
+          <a:xfrm>
+            <a:off x="566928" y="6400800"/>
+            <a:ext cx="5486400" cy="274320"/>
+          </a:xfrm>
+          <a:prstGeom prst="rect">
+            <a:avLst/>
+          </a:prstGeom>
+          <a:noFill/>
+          <a:ln/>
+        </p:spPr>
+        <p:txBody>
+          <a:bodyPr wrap="square" rtlCol="0" anchor="ctr"/>
+          <a:lstStyle/>
+          <a:p>
+            <a:pPr indent="0" marL="0">
+              <a:buNone/>
+            </a:pPr>
+            <a:r>
+              <a:rPr lang="en-US" sz="950" dirty="0">
+                <a:solidFill>
+                  <a:srgbClr val="6B7280"/>
+                </a:solidFill>
+                <a:latin typeface="Helvetica" pitchFamily="34" charset="0"/>
+                <a:ea typeface="Helvetica" pitchFamily="34" charset="-122"/>
+                <a:cs typeface="Helvetica" pitchFamily="34" charset="-120"/>
+              </a:rPr>
+              <a:t>ProofShape · CS595 · 18 Sept 2026</a:t>
+            </a:r>
+            <a:endParaRPr lang="en-US" sz="950" dirty="0"/>
+          </a:p>
+        </p:txBody>
+      </p:sp>
+      <p:sp>
+        <p:nvSpPr>
+          <p:cNvPr id="7" name="Text 5"/>
+          <p:cNvSpPr/>
+          <p:nvPr/>
+        </p:nvSpPr>
+        <p:spPr>
+          <a:xfrm>
+            <a:off x="11073384" y="6400800"/>
+            <a:ext cx="548640" cy="274320"/>
+          </a:xfrm>
+          <a:prstGeom prst="rect">
+            <a:avLst/>
+          </a:prstGeom>
+          <a:noFill/>
+          <a:ln/>
+        </p:spPr>
+        <p:txBody>
+          <a:bodyPr wrap="square" rtlCol="0" anchor="ctr"/>
+          <a:lstStyle/>
+          <a:p>
+            <a:pPr algn="r" indent="0" marL="0">
+              <a:buNone/>
+            </a:pPr>
+            <a:r>
+              <a:rPr lang="en-US" sz="950" dirty="0">
+                <a:solidFill>
+                  <a:srgbClr val="6B7280"/>
+                </a:solidFill>
+                <a:latin typeface="Helvetica" pitchFamily="34" charset="0"/>
+                <a:ea typeface="Helvetica" pitchFamily="34" charset="-122"/>
+                <a:cs typeface="Helvetica" pitchFamily="34" charset="-120"/>
+              </a:rPr>
+              <a:t>13</a:t>
+            </a:r>
+            <a:endParaRPr lang="en-US" sz="950" dirty="0"/>
+          </a:p>
+        </p:txBody>
+      </p:sp>
+    </p:spTree>
+  </p:cSld>
+  <p:clrMapOvr>
+    <a:masterClrMapping/>
+  </p:clrMapOvr>
+</p:sld>
+</file>
+
+<file path=ppt/slides/slide14.xml><?xml version="1.0" encoding="utf-8"?>
+<p:sld xmlns:a="http://schemas.openxmlformats.org/drawingml/2006/main" xmlns:r="http://schemas.openxmlformats.org/officeDocument/2006/relationships" xmlns:p="http://schemas.openxmlformats.org/presentationml/2006/main">
+  <p:cSld name="Slide 14">
+    <p:bg>
+      <p:bgPr>
+        <a:solidFill>
+          <a:srgbClr val="FFFFFF"/>
+        </a:solidFill>
+      </p:bgPr>
+    </p:bg>
+    <p:spTree>
+      <p:nvGrpSpPr>
+        <p:cNvPr id="1" name=""/>
+        <p:cNvGrpSpPr/>
+        <p:nvPr/>
+      </p:nvGrpSpPr>
+      <p:grpSpPr>
+        <a:xfrm>
+          <a:off x="0" y="0"/>
+          <a:ext cx="0" cy="0"/>
+          <a:chOff x="0" y="0"/>
+          <a:chExt cx="0" cy="0"/>
+        </a:xfrm>
+      </p:grpSpPr>
+      <p:sp>
+        <p:nvSpPr>
+          <p:cNvPr id="2" name="Text 0"/>
+          <p:cNvSpPr/>
+          <p:nvPr/>
+        </p:nvSpPr>
+        <p:spPr>
+          <a:xfrm>
+            <a:off x="566928" y="310896"/>
+            <a:ext cx="11055096" cy="237744"/>
+          </a:xfrm>
+          <a:prstGeom prst="rect">
+            <a:avLst/>
+          </a:prstGeom>
+          <a:noFill/>
+          <a:ln/>
+        </p:spPr>
+        <p:txBody>
+          <a:bodyPr wrap="square" rtlCol="0" anchor="ctr"/>
+          <a:lstStyle/>
+          <a:p>
+            <a:pPr indent="0" marL="0">
+              <a:buNone/>
+            </a:pPr>
+            <a:r>
+              <a:rPr lang="en-US" sz="1100" b="1" spc="160" kern="0" dirty="0">
+                <a:solidFill>
+                  <a:srgbClr val="16697A"/>
+                </a:solidFill>
+                <a:latin typeface="Helvetica" pitchFamily="34" charset="0"/>
+                <a:ea typeface="Helvetica" pitchFamily="34" charset="-122"/>
+                <a:cs typeface="Helvetica" pitchFamily="34" charset="-120"/>
+              </a:rPr>
+              <a:t>QUESTION 4 · BY 2 OCTOBER</a:t>
+            </a:r>
+            <a:endParaRPr lang="en-US" sz="1100" dirty="0"/>
+          </a:p>
+        </p:txBody>
+      </p:sp>
+      <p:sp>
+        <p:nvSpPr>
+          <p:cNvPr id="3" name="Text 1"/>
+          <p:cNvSpPr/>
+          <p:nvPr/>
+        </p:nvSpPr>
+        <p:spPr>
+          <a:xfrm>
+            <a:off x="566928" y="566928"/>
+            <a:ext cx="11055096" cy="566928"/>
+          </a:xfrm>
+          <a:prstGeom prst="rect">
+            <a:avLst/>
+          </a:prstGeom>
+          <a:noFill/>
+          <a:ln/>
+        </p:spPr>
+        <p:txBody>
+          <a:bodyPr wrap="square" rtlCol="0" anchor="ctr"/>
+          <a:lstStyle/>
+          <a:p>
+            <a:pPr indent="0" marL="0">
+              <a:buNone/>
+            </a:pPr>
+            <a:r>
+              <a:rPr lang="en-US" sz="3000" b="1" dirty="0">
+                <a:solidFill>
+                  <a:srgbClr val="1B1B1F"/>
+                </a:solidFill>
+                <a:latin typeface="Helvetica" pitchFamily="34" charset="0"/>
+                <a:ea typeface="Helvetica" pitchFamily="34" charset="-122"/>
+                <a:cs typeface="Helvetica" pitchFamily="34" charset="-120"/>
+              </a:rPr>
+              <a:t>What we will have by the next review</a:t>
+            </a:r>
+            <a:endParaRPr lang="en-US" sz="3000" dirty="0"/>
+          </a:p>
+        </p:txBody>
+      </p:sp>
+      <p:sp>
+        <p:nvSpPr>
+          <p:cNvPr id="4" name="Shape 2"/>
+          <p:cNvSpPr/>
+          <p:nvPr/>
+        </p:nvSpPr>
+        <p:spPr>
+          <a:xfrm>
+            <a:off x="566928" y="1188720"/>
+            <a:ext cx="1371600" cy="41148"/>
+          </a:xfrm>
+          <a:prstGeom prst="rect">
+            <a:avLst/>
+          </a:prstGeom>
+          <a:solidFill>
+            <a:srgbClr val="16697A"/>
+          </a:solidFill>
+          <a:ln/>
+        </p:spPr>
+      </p:sp>
       <p:graphicFrame>
         <p:nvGraphicFramePr>
-          <p:cNvPr id="14" name="Table 0"/>
+          <p:cNvPr id="15" name="Table 0"/>
           <p:cNvGraphicFramePr>
             <a:graphicFrameLocks noGrp="1"/>
           </p:cNvGraphicFramePr>
@@ -7689,7 +8226,7 @@
                 <a:ea typeface="Helvetica" pitchFamily="34" charset="-122"/>
                 <a:cs typeface="Helvetica" pitchFamily="34" charset="-120"/>
               </a:rPr>
-              <a:t>13</a:t>
+              <a:t>14</a:t>
             </a:r>
             <a:endParaRPr lang="en-US" sz="950" dirty="0"/>
           </a:p>
@@ -7703,9 +8240,9 @@
 </p:sld>
 </file>
 
-<file path=ppt/slides/slide14.xml><?xml version="1.0" encoding="utf-8"?>
+<file path=ppt/slides/slide15.xml><?xml version="1.0" encoding="utf-8"?>
 <p:sld xmlns:a="http://schemas.openxmlformats.org/drawingml/2006/main" xmlns:r="http://schemas.openxmlformats.org/officeDocument/2006/relationships" xmlns:p="http://schemas.openxmlformats.org/presentationml/2006/main">
-  <p:cSld name="Slide 14">
+  <p:cSld name="Slide 15">
     <p:bg>
       <p:bgPr>
         <a:solidFill>
@@ -8258,7 +8795,7 @@
                 <a:ea typeface="Helvetica" pitchFamily="34" charset="-122"/>
                 <a:cs typeface="Helvetica" pitchFamily="34" charset="-120"/>
               </a:rPr>
-              <a:t>slides 6</a:t>
+              <a:t>slide 6</a:t>
             </a:r>
             <a:endParaRPr lang="en-US" sz="1250" dirty="0"/>
           </a:p>
@@ -8402,7 +8939,7 @@
                 <a:ea typeface="Helvetica" pitchFamily="34" charset="-122"/>
                 <a:cs typeface="Helvetica" pitchFamily="34" charset="-120"/>
               </a:rPr>
-              <a:t>slides 7–9</a:t>
+              <a:t>slides 7–10</a:t>
             </a:r>
             <a:endParaRPr lang="en-US" sz="1250" dirty="0"/>
           </a:p>
@@ -8546,7 +9083,7 @@
                 <a:ea typeface="Helvetica" pitchFamily="34" charset="-122"/>
                 <a:cs typeface="Helvetica" pitchFamily="34" charset="-120"/>
               </a:rPr>
-              <a:t>slide 12</a:t>
+              <a:t>slide 13</a:t>
             </a:r>
             <a:endParaRPr lang="en-US" sz="1250" dirty="0"/>
           </a:p>
@@ -8690,7 +9227,7 @@
                 <a:ea typeface="Helvetica" pitchFamily="34" charset="-122"/>
                 <a:cs typeface="Helvetica" pitchFamily="34" charset="-120"/>
               </a:rPr>
-              <a:t>slide 13</a:t>
+              <a:t>slide 14</a:t>
             </a:r>
             <a:endParaRPr lang="en-US" sz="1250" dirty="0"/>
           </a:p>
@@ -8913,7 +9450,7 @@
         <p:spPr>
           <a:xfrm>
             <a:off x="566928" y="1572768"/>
-            <a:ext cx="11055096" cy="4206240"/>
+            <a:ext cx="5806440" cy="4206240"/>
           </a:xfrm>
           <a:prstGeom prst="rect">
             <a:avLst/>
@@ -8933,7 +9470,7 @@
               <a:buChar char="•"/>
             </a:pPr>
             <a:r>
-              <a:rPr lang="en-US" sz="1550" b="1" dirty="0">
+              <a:rPr lang="en-US" sz="1400" b="1" dirty="0">
                 <a:solidFill>
                   <a:srgbClr val="1B1B1F"/>
                 </a:solidFill>
@@ -8943,7 +9480,7 @@
               </a:rPr>
               <a:t>One story = one pull request = one or two work sessions.</a:t>
             </a:r>
-            <a:endParaRPr lang="en-US" sz="1550" dirty="0"/>
+            <a:endParaRPr lang="en-US" sz="1400" dirty="0"/>
           </a:p>
           <a:p>
             <a:pPr lvl="1" marL="508000" indent="-254000">
@@ -8954,7 +9491,7 @@
               <a:buChar char="▪"/>
             </a:pPr>
             <a:r>
-              <a:rPr lang="en-US" sz="1550" dirty="0">
+              <a:rPr lang="en-US" sz="1400" dirty="0">
                 <a:solidFill>
                   <a:srgbClr val="1B1B1F"/>
                 </a:solidFill>
@@ -8962,9 +9499,9 @@
                 <a:ea typeface="Helvetica" pitchFamily="34" charset="-122"/>
                 <a:cs typeface="Helvetica" pitchFamily="34" charset="-120"/>
               </a:rPr>
-              <a:t>If it grows past that, it gets split. Review quality collapses on large diffs.</a:t>
-            </a:r>
-            <a:endParaRPr lang="en-US" sz="1550" dirty="0"/>
+              <a:t>If it grows past that, it gets split — review quality collapses on large diffs.</a:t>
+            </a:r>
+            <a:endParaRPr lang="en-US" sz="1400" dirty="0"/>
           </a:p>
           <a:p>
             <a:pPr marL="342900" indent="-342900">
@@ -8975,7 +9512,7 @@
               <a:buChar char="•"/>
             </a:pPr>
             <a:r>
-              <a:rPr lang="en-US" sz="1550" b="1" dirty="0">
+              <a:rPr lang="en-US" sz="1400" b="1" dirty="0">
                 <a:solidFill>
                   <a:srgbClr val="1B1B1F"/>
                 </a:solidFill>
@@ -8983,9 +9520,9 @@
                 <a:ea typeface="Helvetica" pitchFamily="34" charset="-122"/>
                 <a:cs typeface="Helvetica" pitchFamily="34" charset="-120"/>
               </a:rPr>
-              <a:t>22 stories written out in full — 7 foundations, 15 reconstruction engine.</a:t>
-            </a:r>
-            <a:endParaRPr lang="en-US" sz="1550" dirty="0"/>
+              <a:t>22 stories written out in full.</a:t>
+            </a:r>
+            <a:endParaRPr lang="en-US" sz="1400" dirty="0"/>
           </a:p>
           <a:p>
             <a:pPr lvl="1" marL="508000" indent="-254000">
@@ -8996,7 +9533,7 @@
               <a:buChar char="▪"/>
             </a:pPr>
             <a:r>
-              <a:rPr lang="en-US" sz="1550" dirty="0">
+              <a:rPr lang="en-US" sz="1400" dirty="0">
                 <a:solidFill>
                   <a:srgbClr val="1B1B1F"/>
                 </a:solidFill>
@@ -9004,9 +9541,9 @@
                 <a:ea typeface="Helvetica" pitchFamily="34" charset="-122"/>
                 <a:cs typeface="Helvetica" pitchFamily="34" charset="-120"/>
               </a:rPr>
-              <a:t>Later phases are titles only, elaborated one sprint ahead. Most detail written in September would be wrong by November.</a:t>
-            </a:r>
-            <a:endParaRPr lang="en-US" sz="1550" dirty="0"/>
+              <a:t>7 foundations, 15 reconstruction engine. Later phases are titles only, elaborated one sprint ahead — most detail written in September would be wrong by November.</a:t>
+            </a:r>
+            <a:endParaRPr lang="en-US" sz="1400" dirty="0"/>
           </a:p>
           <a:p>
             <a:pPr marL="342900" indent="-342900">
@@ -9017,7 +9554,7 @@
               <a:buChar char="•"/>
             </a:pPr>
             <a:r>
-              <a:rPr lang="en-US" sz="1550" b="1" dirty="0">
+              <a:rPr lang="en-US" sz="1400" b="1" dirty="0">
                 <a:solidFill>
                   <a:srgbClr val="1B1B1F"/>
                 </a:solidFill>
@@ -9027,7 +9564,7 @@
               </a:rPr>
               <a:t>The ID says where the work lives, not its priority.</a:t>
             </a:r>
-            <a:endParaRPr lang="en-US" sz="1550" dirty="0"/>
+            <a:endParaRPr lang="en-US" sz="1400" dirty="0"/>
           </a:p>
           <a:p>
             <a:pPr lvl="1" marL="508000" indent="-254000">
@@ -9038,7 +9575,7 @@
               <a:buChar char="▪"/>
             </a:pPr>
             <a:r>
-              <a:rPr lang="en-US" sz="1550" dirty="0">
+              <a:rPr lang="en-US" sz="1400" dirty="0">
                 <a:solidFill>
                   <a:srgbClr val="1B1B1F"/>
                 </a:solidFill>
@@ -9046,9 +9583,9 @@
                 <a:ea typeface="Helvetica" pitchFamily="34" charset="-122"/>
                 <a:cs typeface="Helvetica" pitchFamily="34" charset="-120"/>
               </a:rPr>
-              <a:t>F = foundations, R = reconstruction, C = capture, I = inspection, A = generative AI. R-04 is not "step 4" — the Depends-on line is the only ordering that matters.</a:t>
-            </a:r>
-            <a:endParaRPr lang="en-US" sz="1550" dirty="0"/>
+              <a:t>F foundations · R reconstruction · C capture · I inspection · A generative AI. R-04 is not "step 4" — the Depends-on line is the only ordering that matters.</a:t>
+            </a:r>
+            <a:endParaRPr lang="en-US" sz="1400" dirty="0"/>
           </a:p>
           <a:p>
             <a:pPr marL="342900" indent="-342900">
@@ -9059,7 +9596,7 @@
               <a:buChar char="•"/>
             </a:pPr>
             <a:r>
-              <a:rPr lang="en-US" sz="1550" b="1" dirty="0">
+              <a:rPr lang="en-US" sz="1400" b="1" dirty="0">
                 <a:solidFill>
                   <a:srgbClr val="1B1B1F"/>
                 </a:solidFill>
@@ -9067,9 +9604,9 @@
                 <a:ea typeface="Helvetica" pitchFamily="34" charset="-122"/>
                 <a:cs typeface="Helvetica" pitchFamily="34" charset="-120"/>
               </a:rPr>
-              <a:t>Every story carries a state, and a script checks they stay honest.</a:t>
-            </a:r>
-            <a:endParaRPr lang="en-US" sz="1550" dirty="0"/>
+              <a:t>Every story carries a state, and a script keeps them honest.</a:t>
+            </a:r>
+            <a:endParaRPr lang="en-US" sz="1400" dirty="0"/>
           </a:p>
           <a:p>
             <a:pPr lvl="1" marL="508000" indent="-254000">
@@ -9080,7 +9617,7 @@
               <a:buChar char="▪"/>
             </a:pPr>
             <a:r>
-              <a:rPr lang="en-US" sz="1550" dirty="0">
+              <a:rPr lang="en-US" sz="1400" dirty="0">
                 <a:solidFill>
                   <a:srgbClr val="1B1B1F"/>
                 </a:solidFill>
@@ -9088,15 +9625,103 @@
                 <a:ea typeface="Helvetica" pitchFamily="34" charset="-122"/>
                 <a:cs typeface="Helvetica" pitchFamily="34" charset="-120"/>
               </a:rPr>
-              <a:t>Blocked → Ready → Claimed → In review → Done. Ready means nobody has claimed it and nothing blocks it, so anyone can take it without asking.</a:t>
-            </a:r>
-            <a:endParaRPr lang="en-US" sz="1550" dirty="0"/>
-          </a:p>
-        </p:txBody>
-      </p:sp>
-      <p:sp>
-        <p:nvSpPr>
-          <p:cNvPr id="6" name="Text 4"/>
+              <a:t>Blocked → Ready → Claimed → In review → Done.</a:t>
+            </a:r>
+            <a:endParaRPr lang="en-US" sz="1400" dirty="0"/>
+          </a:p>
+        </p:txBody>
+      </p:sp>
+      <p:sp>
+        <p:nvSpPr>
+          <p:cNvPr id="6" name="Shape 4"/>
+          <p:cNvSpPr/>
+          <p:nvPr/>
+        </p:nvSpPr>
+        <p:spPr>
+          <a:xfrm>
+            <a:off x="6688836" y="1595628"/>
+            <a:ext cx="4965192" cy="3200400"/>
+          </a:xfrm>
+          <a:prstGeom prst="rect">
+            <a:avLst/>
+          </a:prstGeom>
+          <a:solidFill>
+            <a:srgbClr val="E6ECF0"/>
+          </a:solidFill>
+          <a:ln w="9525">
+            <a:solidFill>
+              <a:srgbClr val="D3DCE3"/>
+            </a:solidFill>
+            <a:prstDash val="solid"/>
+          </a:ln>
+        </p:spPr>
+      </p:sp>
+      <p:pic>
+        <p:nvPicPr>
+          <p:cNvPr id="7" name="Image 0" descr="/Users/tabeenraoof/Desktop/SFBU/semester04/CS595/ProofShape/submissions/assets/2026-09-18/story-file-anatomy.jpg">    </p:cNvPr>
+          <p:cNvPicPr>
+            <a:picLocks noChangeAspect="1"/>
+          </p:cNvPicPr>
+          <p:nvPr/>
+        </p:nvPicPr>
+        <p:blipFill>
+          <a:blip r:embed="rId1"/>
+          <a:stretch>
+            <a:fillRect/>
+          </a:stretch>
+        </p:blipFill>
+        <p:spPr>
+          <a:xfrm>
+            <a:off x="6720840" y="1627632"/>
+            <a:ext cx="4901184" cy="3136392"/>
+          </a:xfrm>
+          <a:prstGeom prst="rect">
+            <a:avLst/>
+          </a:prstGeom>
+        </p:spPr>
+      </p:pic>
+      <p:sp>
+        <p:nvSpPr>
+          <p:cNvPr id="8" name="Text 5"/>
+          <p:cNvSpPr/>
+          <p:nvPr/>
+        </p:nvSpPr>
+        <p:spPr>
+          <a:xfrm>
+            <a:off x="6688836" y="4846320"/>
+            <a:ext cx="4965192" cy="384048"/>
+          </a:xfrm>
+          <a:prstGeom prst="rect">
+            <a:avLst/>
+          </a:prstGeom>
+          <a:noFill/>
+          <a:ln/>
+        </p:spPr>
+        <p:txBody>
+          <a:bodyPr wrap="square" rtlCol="0" anchor="t"/>
+          <a:lstStyle/>
+          <a:p>
+            <a:pPr algn="l" indent="0" marL="0">
+              <a:buNone/>
+            </a:pPr>
+            <a:r>
+              <a:rPr lang="en-US" sz="1050" dirty="0">
+                <a:solidFill>
+                  <a:srgbClr val="6B7280"/>
+                </a:solidFill>
+                <a:latin typeface="Helvetica" pitchFamily="34" charset="0"/>
+                <a:ea typeface="Helvetica" pitchFamily="34" charset="-122"/>
+                <a:cs typeface="Helvetica" pitchFamily="34" charset="-120"/>
+              </a:rPr>
+              <a:t>Every story is a file with the same shape: dependencies, state, owner, testable acceptance criteria, working notes, and a completion record that takes real hours — not the estimate copied across.</a:t>
+            </a:r>
+            <a:endParaRPr lang="en-US" sz="1050" dirty="0"/>
+          </a:p>
+        </p:txBody>
+      </p:sp>
+      <p:sp>
+        <p:nvSpPr>
+          <p:cNvPr id="9" name="Text 6"/>
           <p:cNvSpPr/>
           <p:nvPr/>
         </p:nvSpPr>
@@ -9135,7 +9760,7 @@
       </p:sp>
       <p:sp>
         <p:nvSpPr>
-          <p:cNvPr id="7" name="Text 5"/>
+          <p:cNvPr id="10" name="Text 7"/>
           <p:cNvSpPr/>
           <p:nvPr/>
         </p:nvSpPr>
@@ -11357,7 +11982,7 @@
         <p:spPr>
           <a:xfrm>
             <a:off x="566928" y="2962656"/>
-            <a:ext cx="11055096" cy="3017520"/>
+            <a:ext cx="5806440" cy="2926080"/>
           </a:xfrm>
           <a:prstGeom prst="rect">
             <a:avLst/>
@@ -11377,7 +12002,7 @@
               <a:buChar char="•"/>
             </a:pPr>
             <a:r>
-              <a:rPr lang="en-US" sz="1450" b="1" dirty="0">
+              <a:rPr lang="en-US" sz="1350" b="1" dirty="0">
                 <a:solidFill>
                   <a:srgbClr val="1B1B1F"/>
                 </a:solidFill>
@@ -11387,7 +12012,7 @@
               </a:rPr>
               <a:t>A decision without its reasoning gets reversed by whoever forgets it.</a:t>
             </a:r>
-            <a:endParaRPr lang="en-US" sz="1450" dirty="0"/>
+            <a:endParaRPr lang="en-US" sz="1350" dirty="0"/>
           </a:p>
           <a:p>
             <a:pPr lvl="1" marL="508000" indent="-254000">
@@ -11398,7 +12023,7 @@
               <a:buChar char="▪"/>
             </a:pPr>
             <a:r>
-              <a:rPr lang="en-US" sz="1450" dirty="0">
+              <a:rPr lang="en-US" sz="1350" dirty="0">
                 <a:solidFill>
                   <a:srgbClr val="1B1B1F"/>
                 </a:solidFill>
@@ -11406,9 +12031,9 @@
                 <a:ea typeface="Helvetica" pitchFamily="34" charset="-122"/>
                 <a:cs typeface="Helvetica" pitchFamily="34" charset="-120"/>
               </a:rPr>
-              <a:t>Example — D-005, the hard rule: geometry the camera did not see can never pass or fail a part. It may only trigger a Rescan. Enforced structurally in the data format, with a test that fails the build if a report violates it.</a:t>
-            </a:r>
-            <a:endParaRPr lang="en-US" sz="1450" dirty="0"/>
+              <a:t>D-005, the hard rule: geometry the camera did not see can never pass or fail a part — only trigger a Rescan. Enforced in the data format, with a test that fails the build if a report violates it.</a:t>
+            </a:r>
+            <a:endParaRPr lang="en-US" sz="1350" dirty="0"/>
           </a:p>
           <a:p>
             <a:pPr marL="342900" indent="-342900">
@@ -11419,7 +12044,7 @@
               <a:buChar char="•"/>
             </a:pPr>
             <a:r>
-              <a:rPr lang="en-US" sz="1450" b="1" dirty="0">
+              <a:rPr lang="en-US" sz="1350" b="1" dirty="0">
                 <a:solidFill>
                   <a:srgbClr val="1B1B1F"/>
                 </a:solidFill>
@@ -11429,7 +12054,7 @@
               </a:rPr>
               <a:t>Where a rule could be a script, it is a script.</a:t>
             </a:r>
-            <a:endParaRPr lang="en-US" sz="1450" dirty="0"/>
+            <a:endParaRPr lang="en-US" sz="1350" dirty="0"/>
           </a:p>
           <a:p>
             <a:pPr lvl="1" marL="508000" indent="-254000">
@@ -11440,7 +12065,7 @@
               <a:buChar char="▪"/>
             </a:pPr>
             <a:r>
-              <a:rPr lang="en-US" sz="1450" dirty="0">
+              <a:rPr lang="en-US" sz="1350" dirty="0">
                 <a:solidFill>
                   <a:srgbClr val="1B1B1F"/>
                 </a:solidFill>
@@ -11448,9 +12073,9 @@
                 <a:ea typeface="Helvetica" pitchFamily="34" charset="-122"/>
                 <a:cs typeface="Helvetica" pitchFamily="34" charset="-120"/>
               </a:rPr>
-              <a:t>check_story_states.py reads the dependency graph and flags any story whose file and index disagree, or that is stuck Blocked when its dependencies are Done. A checklist raises the odds a person does the right thing; it does not verify they did.</a:t>
-            </a:r>
-            <a:endParaRPr lang="en-US" sz="1450" dirty="0"/>
+              <a:t>A checklist raises the odds a person does the right thing; it does not verify they did.</a:t>
+            </a:r>
+            <a:endParaRPr lang="en-US" sz="1350" dirty="0"/>
           </a:p>
           <a:p>
             <a:pPr marL="342900" indent="-342900">
@@ -11461,7 +12086,7 @@
               <a:buChar char="•"/>
             </a:pPr>
             <a:r>
-              <a:rPr lang="en-US" sz="1450" b="1" dirty="0">
+              <a:rPr lang="en-US" sz="1350" b="1" dirty="0">
                 <a:solidFill>
                   <a:srgbClr val="1B1B1F"/>
                 </a:solidFill>
@@ -11469,9 +12094,9 @@
                 <a:ea typeface="Helvetica" pitchFamily="34" charset="-122"/>
                 <a:cs typeface="Helvetica" pitchFamily="34" charset="-120"/>
               </a:rPr>
-              <a:t>Tests are written during implementation — a joint obligation of engineer and AI assistant.</a:t>
-            </a:r>
-            <a:endParaRPr lang="en-US" sz="1450" dirty="0"/>
+              <a:t>Tests are written during implementation — a joint obligation.</a:t>
+            </a:r>
+            <a:endParaRPr lang="en-US" sz="1350" dirty="0"/>
           </a:p>
           <a:p>
             <a:pPr lvl="1" marL="508000" indent="-254000">
@@ -11482,7 +12107,7 @@
               <a:buChar char="▪"/>
             </a:pPr>
             <a:r>
-              <a:rPr lang="en-US" sz="1450" dirty="0">
+              <a:rPr lang="en-US" sz="1350" dirty="0">
                 <a:solidFill>
                   <a:srgbClr val="1B1B1F"/>
                 </a:solidFill>
@@ -11490,15 +12115,103 @@
                 <a:ea typeface="Helvetica" pitchFamily="34" charset="-122"/>
                 <a:cs typeface="Helvetica" pitchFamily="34" charset="-120"/>
               </a:rPr>
-              <a:t>Not before as a batch, not after, and never deferred to a follow-up story.</a:t>
-            </a:r>
-            <a:endParaRPr lang="en-US" sz="1450" dirty="0"/>
-          </a:p>
-        </p:txBody>
-      </p:sp>
-      <p:sp>
-        <p:nvSpPr>
-          <p:cNvPr id="18" name="Text 16"/>
+              <a:t>Engineer and AI assistant both. Never deferred to a follow-up story.</a:t>
+            </a:r>
+            <a:endParaRPr lang="en-US" sz="1350" dirty="0"/>
+          </a:p>
+        </p:txBody>
+      </p:sp>
+      <p:sp>
+        <p:nvSpPr>
+          <p:cNvPr id="18" name="Shape 16"/>
+          <p:cNvSpPr/>
+          <p:nvPr/>
+        </p:nvSpPr>
+        <p:spPr>
+          <a:xfrm>
+            <a:off x="6688836" y="2985516"/>
+            <a:ext cx="4965192" cy="2313432"/>
+          </a:xfrm>
+          <a:prstGeom prst="rect">
+            <a:avLst/>
+          </a:prstGeom>
+          <a:solidFill>
+            <a:srgbClr val="E6ECF0"/>
+          </a:solidFill>
+          <a:ln w="9525">
+            <a:solidFill>
+              <a:srgbClr val="D3DCE3"/>
+            </a:solidFill>
+            <a:prstDash val="solid"/>
+          </a:ln>
+        </p:spPr>
+      </p:sp>
+      <p:pic>
+        <p:nvPicPr>
+          <p:cNvPr id="19" name="Image 0" descr="/Users/tabeenraoof/Desktop/SFBU/semester04/CS595/ProofShape/submissions/assets/2026-09-18/dod-checklist.jpg">    </p:cNvPr>
+          <p:cNvPicPr>
+            <a:picLocks noChangeAspect="1"/>
+          </p:cNvPicPr>
+          <p:nvPr/>
+        </p:nvPicPr>
+        <p:blipFill>
+          <a:blip r:embed="rId1"/>
+          <a:stretch>
+            <a:fillRect/>
+          </a:stretch>
+        </p:blipFill>
+        <p:spPr>
+          <a:xfrm>
+            <a:off x="6720840" y="3017520"/>
+            <a:ext cx="4901184" cy="2249424"/>
+          </a:xfrm>
+          <a:prstGeom prst="rect">
+            <a:avLst/>
+          </a:prstGeom>
+        </p:spPr>
+      </p:pic>
+      <p:sp>
+        <p:nvSpPr>
+          <p:cNvPr id="20" name="Text 17"/>
+          <p:cNvSpPr/>
+          <p:nvPr/>
+        </p:nvSpPr>
+        <p:spPr>
+          <a:xfrm>
+            <a:off x="6688836" y="5349240"/>
+            <a:ext cx="4965192" cy="384048"/>
+          </a:xfrm>
+          <a:prstGeom prst="rect">
+            <a:avLst/>
+          </a:prstGeom>
+          <a:noFill/>
+          <a:ln/>
+        </p:spPr>
+        <p:txBody>
+          <a:bodyPr wrap="square" rtlCol="0" anchor="t"/>
+          <a:lstStyle/>
+          <a:p>
+            <a:pPr algn="l" indent="0" marL="0">
+              <a:buNone/>
+            </a:pPr>
+            <a:r>
+              <a:rPr lang="en-US" sz="1050" dirty="0">
+                <a:solidFill>
+                  <a:srgbClr val="6B7280"/>
+                </a:solidFill>
+                <a:latin typeface="Helvetica" pitchFamily="34" charset="0"/>
+                <a:ea typeface="Helvetica" pitchFamily="34" charset="-122"/>
+                <a:cs typeface="Helvetica" pitchFamily="34" charset="-120"/>
+              </a:rPr>
+              <a:t>The definition-of-done checklist on a live pull request — unticked boxes are the point. This one is held open because D-031 requires both other members to approve a change to the file that rule itself governs.</a:t>
+            </a:r>
+            <a:endParaRPr lang="en-US" sz="1050" dirty="0"/>
+          </a:p>
+        </p:txBody>
+      </p:sp>
+      <p:sp>
+        <p:nvSpPr>
+          <p:cNvPr id="21" name="Text 18"/>
           <p:cNvSpPr/>
           <p:nvPr/>
         </p:nvSpPr>
@@ -11537,7 +12250,7 @@
       </p:sp>
       <p:sp>
         <p:nvSpPr>
-          <p:cNvPr id="19" name="Text 17"/>
+          <p:cNvPr id="22" name="Text 19"/>
           <p:cNvSpPr/>
           <p:nvPr/>
         </p:nvSpPr>
@@ -12917,7 +13630,7 @@
                 <a:ea typeface="Helvetica" pitchFamily="34" charset="-122"/>
                 <a:cs typeface="Helvetica" pitchFamily="34" charset="-120"/>
               </a:rPr>
-              <a:t>QUESTION 2 · THE DETAIL</a:t>
+              <a:t>QUESTION 2 · EVIDENCE, NOT CLAIMS</a:t>
             </a:r>
             <a:endParaRPr lang="en-US" sz="1100" dirty="0"/>
           </a:p>
@@ -12956,7 +13669,7 @@
                 <a:ea typeface="Helvetica" pitchFamily="34" charset="-122"/>
                 <a:cs typeface="Helvetica" pitchFamily="34" charset="-120"/>
               </a:rPr>
-              <a:t>Foundations, story by story</a:t>
+              <a:t>The parts that are real today</a:t>
             </a:r>
             <a:endParaRPr lang="en-US" sz="3000" dirty="0"/>
           </a:p>
@@ -12982,9 +13695,496 @@
           <a:ln/>
         </p:spPr>
       </p:sp>
+      <p:sp>
+        <p:nvSpPr>
+          <p:cNvPr id="5" name="Shape 3"/>
+          <p:cNvSpPr/>
+          <p:nvPr/>
+        </p:nvSpPr>
+        <p:spPr>
+          <a:xfrm>
+            <a:off x="534924" y="1595628"/>
+            <a:ext cx="5550408" cy="2852928"/>
+          </a:xfrm>
+          <a:prstGeom prst="rect">
+            <a:avLst/>
+          </a:prstGeom>
+          <a:solidFill>
+            <a:srgbClr val="E6ECF0"/>
+          </a:solidFill>
+          <a:ln w="9525">
+            <a:solidFill>
+              <a:srgbClr val="D3DCE3"/>
+            </a:solidFill>
+            <a:prstDash val="solid"/>
+          </a:ln>
+        </p:spPr>
+      </p:sp>
+      <p:pic>
+        <p:nvPicPr>
+          <p:cNvPr id="6" name="Image 0" descr="/Users/tabeenraoof/Desktop/SFBU/semester04/CS595/ProofShape/submissions/assets/2026-09-18/gpu-smoke-test-pass.jpg">    </p:cNvPr>
+          <p:cNvPicPr>
+            <a:picLocks noChangeAspect="1"/>
+          </p:cNvPicPr>
+          <p:nvPr/>
+        </p:nvPicPr>
+        <p:blipFill>
+          <a:blip r:embed="rId1"/>
+          <a:stretch>
+            <a:fillRect/>
+          </a:stretch>
+        </p:blipFill>
+        <p:spPr>
+          <a:xfrm>
+            <a:off x="566928" y="1627632"/>
+            <a:ext cx="5486400" cy="2788920"/>
+          </a:xfrm>
+          <a:prstGeom prst="rect">
+            <a:avLst/>
+          </a:prstGeom>
+        </p:spPr>
+      </p:pic>
+      <p:sp>
+        <p:nvSpPr>
+          <p:cNvPr id="7" name="Text 4"/>
+          <p:cNvSpPr/>
+          <p:nvPr/>
+        </p:nvSpPr>
+        <p:spPr>
+          <a:xfrm>
+            <a:off x="534924" y="4498848"/>
+            <a:ext cx="5550408" cy="384048"/>
+          </a:xfrm>
+          <a:prstGeom prst="rect">
+            <a:avLst/>
+          </a:prstGeom>
+          <a:noFill/>
+          <a:ln/>
+        </p:spPr>
+        <p:txBody>
+          <a:bodyPr wrap="square" rtlCol="0" anchor="t"/>
+          <a:lstStyle/>
+          <a:p>
+            <a:pPr algn="l" indent="0" marL="0">
+              <a:buNone/>
+            </a:pPr>
+            <a:r>
+              <a:rPr lang="en-US" sz="1050" dirty="0">
+                <a:solidFill>
+                  <a:srgbClr val="6B7280"/>
+                </a:solidFill>
+                <a:latin typeface="Helvetica" pitchFamily="34" charset="0"/>
+                <a:ea typeface="Helvetica" pitchFamily="34" charset="-122"/>
+                <a:cs typeface="Helvetica" pitchFamily="34" charset="-120"/>
+              </a:rPr>
+              <a:t>GPU workspace running the shared smoke test: Tesla T4, PyTorch 2.8.0+cu128, CUDA available, GPU CHECK: PASS.</a:t>
+            </a:r>
+            <a:endParaRPr lang="en-US" sz="1050" dirty="0"/>
+          </a:p>
+        </p:txBody>
+      </p:sp>
+      <p:sp>
+        <p:nvSpPr>
+          <p:cNvPr id="8" name="Shape 5"/>
+          <p:cNvSpPr/>
+          <p:nvPr/>
+        </p:nvSpPr>
+        <p:spPr>
+          <a:xfrm>
+            <a:off x="6368796" y="1595628"/>
+            <a:ext cx="5285232" cy="2852928"/>
+          </a:xfrm>
+          <a:prstGeom prst="rect">
+            <a:avLst/>
+          </a:prstGeom>
+          <a:solidFill>
+            <a:srgbClr val="E6ECF0"/>
+          </a:solidFill>
+          <a:ln w="9525">
+            <a:solidFill>
+              <a:srgbClr val="D3DCE3"/>
+            </a:solidFill>
+            <a:prstDash val="solid"/>
+          </a:ln>
+        </p:spPr>
+      </p:sp>
+      <p:pic>
+        <p:nvPicPr>
+          <p:cNvPr id="9" name="Image 1" descr="/Users/tabeenraoof/Desktop/SFBU/semester04/CS595/ProofShape/submissions/assets/2026-09-18/golden-capture-lock.jpg">    </p:cNvPr>
+          <p:cNvPicPr>
+            <a:picLocks noChangeAspect="1"/>
+          </p:cNvPicPr>
+          <p:nvPr/>
+        </p:nvPicPr>
+        <p:blipFill>
+          <a:blip r:embed="rId2"/>
+          <a:stretch>
+            <a:fillRect/>
+          </a:stretch>
+        </p:blipFill>
+        <p:spPr>
+          <a:xfrm>
+            <a:off x="6400800" y="1627632"/>
+            <a:ext cx="5221224" cy="2788920"/>
+          </a:xfrm>
+          <a:prstGeom prst="rect">
+            <a:avLst/>
+          </a:prstGeom>
+        </p:spPr>
+      </p:pic>
+      <p:sp>
+        <p:nvSpPr>
+          <p:cNvPr id="10" name="Text 6"/>
+          <p:cNvSpPr/>
+          <p:nvPr/>
+        </p:nvSpPr>
+        <p:spPr>
+          <a:xfrm>
+            <a:off x="6368796" y="4498848"/>
+            <a:ext cx="5285232" cy="384048"/>
+          </a:xfrm>
+          <a:prstGeom prst="rect">
+            <a:avLst/>
+          </a:prstGeom>
+          <a:noFill/>
+          <a:ln/>
+        </p:spPr>
+        <p:txBody>
+          <a:bodyPr wrap="square" rtlCol="0" anchor="t"/>
+          <a:lstStyle/>
+          <a:p>
+            <a:pPr algn="l" indent="0" marL="0">
+              <a:buNone/>
+            </a:pPr>
+            <a:r>
+              <a:rPr lang="en-US" sz="1050" dirty="0">
+                <a:solidFill>
+                  <a:srgbClr val="6B7280"/>
+                </a:solidFill>
+                <a:latin typeface="Helvetica" pitchFamily="34" charset="0"/>
+                <a:ea typeface="Helvetica" pitchFamily="34" charset="-122"/>
+                <a:cs typeface="Helvetica" pitchFamily="34" charset="-120"/>
+              </a:rPr>
+              <a:t>Golden capture in progress — printed ChArUco board verified at 100% scale with calipers, part centred, whole sheet in frame.</a:t>
+            </a:r>
+            <a:endParaRPr lang="en-US" sz="1050" dirty="0"/>
+          </a:p>
+        </p:txBody>
+      </p:sp>
+      <p:sp>
+        <p:nvSpPr>
+          <p:cNvPr id="11" name="Text 7"/>
+          <p:cNvSpPr/>
+          <p:nvPr/>
+        </p:nvSpPr>
+        <p:spPr>
+          <a:xfrm>
+            <a:off x="566928" y="4956048"/>
+            <a:ext cx="5486400" cy="292608"/>
+          </a:xfrm>
+          <a:prstGeom prst="rect">
+            <a:avLst/>
+          </a:prstGeom>
+          <a:noFill/>
+          <a:ln/>
+        </p:spPr>
+        <p:txBody>
+          <a:bodyPr wrap="square" rtlCol="0" anchor="ctr"/>
+          <a:lstStyle/>
+          <a:p>
+            <a:pPr indent="0" marL="0">
+              <a:buNone/>
+            </a:pPr>
+            <a:r>
+              <a:rPr lang="en-US" sz="1500" b="1" dirty="0">
+                <a:solidFill>
+                  <a:srgbClr val="B45309"/>
+                </a:solidFill>
+                <a:latin typeface="Helvetica" pitchFamily="34" charset="0"/>
+                <a:ea typeface="Helvetica" pitchFamily="34" charset="-122"/>
+                <a:cs typeface="Helvetica" pitchFamily="34" charset="-120"/>
+              </a:rPr>
+              <a:t>Both are honestly incomplete</a:t>
+            </a:r>
+            <a:endParaRPr lang="en-US" sz="1500" dirty="0"/>
+          </a:p>
+        </p:txBody>
+      </p:sp>
+      <p:sp>
+        <p:nvSpPr>
+          <p:cNvPr id="12" name="Text 8"/>
+          <p:cNvSpPr/>
+          <p:nvPr/>
+        </p:nvSpPr>
+        <p:spPr>
+          <a:xfrm>
+            <a:off x="566928" y="5248656"/>
+            <a:ext cx="11055096" cy="1143000"/>
+          </a:xfrm>
+          <a:prstGeom prst="rect">
+            <a:avLst/>
+          </a:prstGeom>
+          <a:noFill/>
+          <a:ln/>
+        </p:spPr>
+        <p:txBody>
+          <a:bodyPr wrap="square" rtlCol="0" anchor="ctr"/>
+          <a:lstStyle/>
+          <a:p>
+            <a:pPr marL="342900" indent="-342900">
+              <a:lnSpc>
+                <a:spcPct val="135000"/>
+              </a:lnSpc>
+              <a:buSzPct val="100000"/>
+              <a:buChar char="•"/>
+            </a:pPr>
+            <a:r>
+              <a:rPr lang="en-US" sz="1200" dirty="0">
+                <a:solidFill>
+                  <a:srgbClr val="1B1B1F"/>
+                </a:solidFill>
+                <a:latin typeface="Helvetica" pitchFamily="34" charset="0"/>
+                <a:ea typeface="Helvetica" pitchFamily="34" charset="-122"/>
+                <a:cs typeface="Helvetica" pitchFamily="34" charset="-120"/>
+              </a:rPr>
+              <a:t>F-05 — GPU access is proven for one member, not three. RunPod needed a payment method for the network volume, so Lightning AI was evaluated as a no-upfront-cost alternative. Which platform we standardise on is an open team decision, and the story stays Claimed until all three can connect and re-provisioning has been rehearsed.</a:t>
+            </a:r>
+            <a:endParaRPr lang="en-US" sz="1200" dirty="0"/>
+          </a:p>
+          <a:p>
+            <a:pPr marL="342900" indent="-342900">
+              <a:lnSpc>
+                <a:spcPct val="135000"/>
+              </a:lnSpc>
+              <a:buSzPct val="100000"/>
+              <a:buChar char="•"/>
+            </a:pPr>
+            <a:r>
+              <a:rPr lang="en-US" sz="1200" dirty="0">
+                <a:solidFill>
+                  <a:srgbClr val="1B1B1F"/>
+                </a:solidFill>
+                <a:latin typeface="Helvetica" pitchFamily="34" charset="0"/>
+                <a:ea typeface="Helvetica" pitchFamily="34" charset="-122"/>
+                <a:cs typeface="Helvetica" pitchFamily="34" charset="-120"/>
+              </a:rPr>
+              <a:t>F-06 — two of three objects shot, 79 frames, both lighting conditions done for the lock. Still needed: a third object and a CAD model for at least one of them.</a:t>
+            </a:r>
+            <a:endParaRPr lang="en-US" sz="1200" dirty="0"/>
+          </a:p>
+        </p:txBody>
+      </p:sp>
+      <p:sp>
+        <p:nvSpPr>
+          <p:cNvPr id="13" name="Text 9"/>
+          <p:cNvSpPr/>
+          <p:nvPr/>
+        </p:nvSpPr>
+        <p:spPr>
+          <a:xfrm>
+            <a:off x="566928" y="6400800"/>
+            <a:ext cx="5486400" cy="274320"/>
+          </a:xfrm>
+          <a:prstGeom prst="rect">
+            <a:avLst/>
+          </a:prstGeom>
+          <a:noFill/>
+          <a:ln/>
+        </p:spPr>
+        <p:txBody>
+          <a:bodyPr wrap="square" rtlCol="0" anchor="ctr"/>
+          <a:lstStyle/>
+          <a:p>
+            <a:pPr indent="0" marL="0">
+              <a:buNone/>
+            </a:pPr>
+            <a:r>
+              <a:rPr lang="en-US" sz="950" dirty="0">
+                <a:solidFill>
+                  <a:srgbClr val="6B7280"/>
+                </a:solidFill>
+                <a:latin typeface="Helvetica" pitchFamily="34" charset="0"/>
+                <a:ea typeface="Helvetica" pitchFamily="34" charset="-122"/>
+                <a:cs typeface="Helvetica" pitchFamily="34" charset="-120"/>
+              </a:rPr>
+              <a:t>ProofShape · CS595 · 18 Sept 2026</a:t>
+            </a:r>
+            <a:endParaRPr lang="en-US" sz="950" dirty="0"/>
+          </a:p>
+        </p:txBody>
+      </p:sp>
+      <p:sp>
+        <p:nvSpPr>
+          <p:cNvPr id="14" name="Text 10"/>
+          <p:cNvSpPr/>
+          <p:nvPr/>
+        </p:nvSpPr>
+        <p:spPr>
+          <a:xfrm>
+            <a:off x="11073384" y="6400800"/>
+            <a:ext cx="548640" cy="274320"/>
+          </a:xfrm>
+          <a:prstGeom prst="rect">
+            <a:avLst/>
+          </a:prstGeom>
+          <a:noFill/>
+          <a:ln/>
+        </p:spPr>
+        <p:txBody>
+          <a:bodyPr wrap="square" rtlCol="0" anchor="ctr"/>
+          <a:lstStyle/>
+          <a:p>
+            <a:pPr algn="r" indent="0" marL="0">
+              <a:buNone/>
+            </a:pPr>
+            <a:r>
+              <a:rPr lang="en-US" sz="950" dirty="0">
+                <a:solidFill>
+                  <a:srgbClr val="6B7280"/>
+                </a:solidFill>
+                <a:latin typeface="Helvetica" pitchFamily="34" charset="0"/>
+                <a:ea typeface="Helvetica" pitchFamily="34" charset="-122"/>
+                <a:cs typeface="Helvetica" pitchFamily="34" charset="-120"/>
+              </a:rPr>
+              <a:t>8</a:t>
+            </a:r>
+            <a:endParaRPr lang="en-US" sz="950" dirty="0"/>
+          </a:p>
+        </p:txBody>
+      </p:sp>
+    </p:spTree>
+  </p:cSld>
+  <p:clrMapOvr>
+    <a:masterClrMapping/>
+  </p:clrMapOvr>
+</p:sld>
+</file>
+
+<file path=ppt/slides/slide9.xml><?xml version="1.0" encoding="utf-8"?>
+<p:sld xmlns:a="http://schemas.openxmlformats.org/drawingml/2006/main" xmlns:r="http://schemas.openxmlformats.org/officeDocument/2006/relationships" xmlns:p="http://schemas.openxmlformats.org/presentationml/2006/main">
+  <p:cSld name="Slide 9">
+    <p:bg>
+      <p:bgPr>
+        <a:solidFill>
+          <a:srgbClr val="FFFFFF"/>
+        </a:solidFill>
+      </p:bgPr>
+    </p:bg>
+    <p:spTree>
+      <p:nvGrpSpPr>
+        <p:cNvPr id="1" name=""/>
+        <p:cNvGrpSpPr/>
+        <p:nvPr/>
+      </p:nvGrpSpPr>
+      <p:grpSpPr>
+        <a:xfrm>
+          <a:off x="0" y="0"/>
+          <a:ext cx="0" cy="0"/>
+          <a:chOff x="0" y="0"/>
+          <a:chExt cx="0" cy="0"/>
+        </a:xfrm>
+      </p:grpSpPr>
+      <p:sp>
+        <p:nvSpPr>
+          <p:cNvPr id="2" name="Text 0"/>
+          <p:cNvSpPr/>
+          <p:nvPr/>
+        </p:nvSpPr>
+        <p:spPr>
+          <a:xfrm>
+            <a:off x="566928" y="310896"/>
+            <a:ext cx="11055096" cy="237744"/>
+          </a:xfrm>
+          <a:prstGeom prst="rect">
+            <a:avLst/>
+          </a:prstGeom>
+          <a:noFill/>
+          <a:ln/>
+        </p:spPr>
+        <p:txBody>
+          <a:bodyPr wrap="square" rtlCol="0" anchor="ctr"/>
+          <a:lstStyle/>
+          <a:p>
+            <a:pPr indent="0" marL="0">
+              <a:buNone/>
+            </a:pPr>
+            <a:r>
+              <a:rPr lang="en-US" sz="1100" b="1" spc="160" kern="0" dirty="0">
+                <a:solidFill>
+                  <a:srgbClr val="16697A"/>
+                </a:solidFill>
+                <a:latin typeface="Helvetica" pitchFamily="34" charset="0"/>
+                <a:ea typeface="Helvetica" pitchFamily="34" charset="-122"/>
+                <a:cs typeface="Helvetica" pitchFamily="34" charset="-120"/>
+              </a:rPr>
+              <a:t>QUESTION 2 · THE DETAIL</a:t>
+            </a:r>
+            <a:endParaRPr lang="en-US" sz="1100" dirty="0"/>
+          </a:p>
+        </p:txBody>
+      </p:sp>
+      <p:sp>
+        <p:nvSpPr>
+          <p:cNvPr id="3" name="Text 1"/>
+          <p:cNvSpPr/>
+          <p:nvPr/>
+        </p:nvSpPr>
+        <p:spPr>
+          <a:xfrm>
+            <a:off x="566928" y="566928"/>
+            <a:ext cx="11055096" cy="566928"/>
+          </a:xfrm>
+          <a:prstGeom prst="rect">
+            <a:avLst/>
+          </a:prstGeom>
+          <a:noFill/>
+          <a:ln/>
+        </p:spPr>
+        <p:txBody>
+          <a:bodyPr wrap="square" rtlCol="0" anchor="ctr"/>
+          <a:lstStyle/>
+          <a:p>
+            <a:pPr indent="0" marL="0">
+              <a:buNone/>
+            </a:pPr>
+            <a:r>
+              <a:rPr lang="en-US" sz="3000" b="1" dirty="0">
+                <a:solidFill>
+                  <a:srgbClr val="1B1B1F"/>
+                </a:solidFill>
+                <a:latin typeface="Helvetica" pitchFamily="34" charset="0"/>
+                <a:ea typeface="Helvetica" pitchFamily="34" charset="-122"/>
+                <a:cs typeface="Helvetica" pitchFamily="34" charset="-120"/>
+              </a:rPr>
+              <a:t>Foundations, story by story</a:t>
+            </a:r>
+            <a:endParaRPr lang="en-US" sz="3000" dirty="0"/>
+          </a:p>
+        </p:txBody>
+      </p:sp>
+      <p:sp>
+        <p:nvSpPr>
+          <p:cNvPr id="4" name="Shape 2"/>
+          <p:cNvSpPr/>
+          <p:nvPr/>
+        </p:nvSpPr>
+        <p:spPr>
+          <a:xfrm>
+            <a:off x="566928" y="1188720"/>
+            <a:ext cx="1371600" cy="41148"/>
+          </a:xfrm>
+          <a:prstGeom prst="rect">
+            <a:avLst/>
+          </a:prstGeom>
+          <a:solidFill>
+            <a:srgbClr val="16697A"/>
+          </a:solidFill>
+          <a:ln/>
+        </p:spPr>
+      </p:sp>
       <p:graphicFrame>
         <p:nvGraphicFramePr>
-          <p:cNvPr id="9" name="Table 0"/>
+          <p:cNvPr id="10" name="Table 0"/>
           <p:cNvGraphicFramePr>
             <a:graphicFrameLocks noGrp="1"/>
           </p:cNvGraphicFramePr>
@@ -16377,383 +17577,6 @@
       <p:sp>
         <p:nvSpPr>
           <p:cNvPr id="8" name="Text 5"/>
-          <p:cNvSpPr/>
-          <p:nvPr/>
-        </p:nvSpPr>
-        <p:spPr>
-          <a:xfrm>
-            <a:off x="11073384" y="6400800"/>
-            <a:ext cx="548640" cy="274320"/>
-          </a:xfrm>
-          <a:prstGeom prst="rect">
-            <a:avLst/>
-          </a:prstGeom>
-          <a:noFill/>
-          <a:ln/>
-        </p:spPr>
-        <p:txBody>
-          <a:bodyPr wrap="square" rtlCol="0" anchor="ctr"/>
-          <a:lstStyle/>
-          <a:p>
-            <a:pPr algn="r" indent="0" marL="0">
-              <a:buNone/>
-            </a:pPr>
-            <a:r>
-              <a:rPr lang="en-US" sz="950" dirty="0">
-                <a:solidFill>
-                  <a:srgbClr val="6B7280"/>
-                </a:solidFill>
-                <a:latin typeface="Helvetica" pitchFamily="34" charset="0"/>
-                <a:ea typeface="Helvetica" pitchFamily="34" charset="-122"/>
-                <a:cs typeface="Helvetica" pitchFamily="34" charset="-120"/>
-              </a:rPr>
-              <a:t>8</a:t>
-            </a:r>
-            <a:endParaRPr lang="en-US" sz="950" dirty="0"/>
-          </a:p>
-        </p:txBody>
-      </p:sp>
-    </p:spTree>
-  </p:cSld>
-  <p:clrMapOvr>
-    <a:masterClrMapping/>
-  </p:clrMapOvr>
-</p:sld>
-</file>
-
-<file path=ppt/slides/slide9.xml><?xml version="1.0" encoding="utf-8"?>
-<p:sld xmlns:a="http://schemas.openxmlformats.org/drawingml/2006/main" xmlns:r="http://schemas.openxmlformats.org/officeDocument/2006/relationships" xmlns:p="http://schemas.openxmlformats.org/presentationml/2006/main">
-  <p:cSld name="Slide 9">
-    <p:bg>
-      <p:bgPr>
-        <a:solidFill>
-          <a:srgbClr val="FFFFFF"/>
-        </a:solidFill>
-      </p:bgPr>
-    </p:bg>
-    <p:spTree>
-      <p:nvGrpSpPr>
-        <p:cNvPr id="1" name=""/>
-        <p:cNvGrpSpPr/>
-        <p:nvPr/>
-      </p:nvGrpSpPr>
-      <p:grpSpPr>
-        <a:xfrm>
-          <a:off x="0" y="0"/>
-          <a:ext cx="0" cy="0"/>
-          <a:chOff x="0" y="0"/>
-          <a:chExt cx="0" cy="0"/>
-        </a:xfrm>
-      </p:grpSpPr>
-      <p:sp>
-        <p:nvSpPr>
-          <p:cNvPr id="2" name="Text 0"/>
-          <p:cNvSpPr/>
-          <p:nvPr/>
-        </p:nvSpPr>
-        <p:spPr>
-          <a:xfrm>
-            <a:off x="566928" y="310896"/>
-            <a:ext cx="11055096" cy="237744"/>
-          </a:xfrm>
-          <a:prstGeom prst="rect">
-            <a:avLst/>
-          </a:prstGeom>
-          <a:noFill/>
-          <a:ln/>
-        </p:spPr>
-        <p:txBody>
-          <a:bodyPr wrap="square" rtlCol="0" anchor="ctr"/>
-          <a:lstStyle/>
-          <a:p>
-            <a:pPr indent="0" marL="0">
-              <a:buNone/>
-            </a:pPr>
-            <a:r>
-              <a:rPr lang="en-US" sz="1100" b="1" spc="160" kern="0" dirty="0">
-                <a:solidFill>
-                  <a:srgbClr val="16697A"/>
-                </a:solidFill>
-                <a:latin typeface="Helvetica" pitchFamily="34" charset="0"/>
-                <a:ea typeface="Helvetica" pitchFamily="34" charset="-122"/>
-                <a:cs typeface="Helvetica" pitchFamily="34" charset="-120"/>
-              </a:rPr>
-              <a:t>QUESTION 2 · THE PROCESS WORKING</a:t>
-            </a:r>
-            <a:endParaRPr lang="en-US" sz="1100" dirty="0"/>
-          </a:p>
-        </p:txBody>
-      </p:sp>
-      <p:sp>
-        <p:nvSpPr>
-          <p:cNvPr id="3" name="Text 1"/>
-          <p:cNvSpPr/>
-          <p:nvPr/>
-        </p:nvSpPr>
-        <p:spPr>
-          <a:xfrm>
-            <a:off x="566928" y="566928"/>
-            <a:ext cx="11055096" cy="566928"/>
-          </a:xfrm>
-          <a:prstGeom prst="rect">
-            <a:avLst/>
-          </a:prstGeom>
-          <a:noFill/>
-          <a:ln/>
-        </p:spPr>
-        <p:txBody>
-          <a:bodyPr wrap="square" rtlCol="0" anchor="ctr"/>
-          <a:lstStyle/>
-          <a:p>
-            <a:pPr indent="0" marL="0">
-              <a:buNone/>
-            </a:pPr>
-            <a:r>
-              <a:rPr lang="en-US" sz="3000" b="1" dirty="0">
-                <a:solidFill>
-                  <a:srgbClr val="1B1B1F"/>
-                </a:solidFill>
-                <a:latin typeface="Helvetica" pitchFamily="34" charset="0"/>
-                <a:ea typeface="Helvetica" pitchFamily="34" charset="-122"/>
-                <a:cs typeface="Helvetica" pitchFamily="34" charset="-120"/>
-              </a:rPr>
-              <a:t>Every change was reviewed — including the ones we got wrong</a:t>
-            </a:r>
-            <a:endParaRPr lang="en-US" sz="3000" dirty="0"/>
-          </a:p>
-        </p:txBody>
-      </p:sp>
-      <p:sp>
-        <p:nvSpPr>
-          <p:cNvPr id="4" name="Shape 2"/>
-          <p:cNvSpPr/>
-          <p:nvPr/>
-        </p:nvSpPr>
-        <p:spPr>
-          <a:xfrm>
-            <a:off x="566928" y="1188720"/>
-            <a:ext cx="1371600" cy="41148"/>
-          </a:xfrm>
-          <a:prstGeom prst="rect">
-            <a:avLst/>
-          </a:prstGeom>
-          <a:solidFill>
-            <a:srgbClr val="16697A"/>
-          </a:solidFill>
-          <a:ln/>
-        </p:spPr>
-      </p:sp>
-      <p:sp>
-        <p:nvSpPr>
-          <p:cNvPr id="5" name="Text 3"/>
-          <p:cNvSpPr/>
-          <p:nvPr/>
-        </p:nvSpPr>
-        <p:spPr>
-          <a:xfrm>
-            <a:off x="566928" y="1600200"/>
-            <a:ext cx="11055096" cy="4114800"/>
-          </a:xfrm>
-          <a:prstGeom prst="rect">
-            <a:avLst/>
-          </a:prstGeom>
-          <a:noFill/>
-          <a:ln/>
-        </p:spPr>
-        <p:txBody>
-          <a:bodyPr wrap="square" rtlCol="0" anchor="ctr"/>
-          <a:lstStyle/>
-          <a:p>
-            <a:pPr marL="342900" indent="-342900">
-              <a:lnSpc>
-                <a:spcPct val="135000"/>
-              </a:lnSpc>
-              <a:buSzPct val="100000"/>
-              <a:buChar char="•"/>
-            </a:pPr>
-            <a:r>
-              <a:rPr lang="en-US" sz="1400" b="1" dirty="0">
-                <a:solidFill>
-                  <a:srgbClr val="1B1B1F"/>
-                </a:solidFill>
-                <a:latin typeface="Helvetica" pitchFamily="34" charset="0"/>
-                <a:ea typeface="Helvetica" pitchFamily="34" charset="-122"/>
-                <a:cs typeface="Helvetica" pitchFamily="34" charset="-120"/>
-              </a:rPr>
-              <a:t>Review caught real defects, not typos:</a:t>
-            </a:r>
-            <a:endParaRPr lang="en-US" sz="1400" dirty="0"/>
-          </a:p>
-          <a:p>
-            <a:pPr lvl="1" marL="508000" indent="-254000">
-              <a:lnSpc>
-                <a:spcPct val="135000"/>
-              </a:lnSpc>
-              <a:buSzPct val="100000"/>
-              <a:buChar char="▪"/>
-            </a:pPr>
-            <a:r>
-              <a:rPr lang="en-US" sz="1400" dirty="0">
-                <a:solidFill>
-                  <a:srgbClr val="1B1B1F"/>
-                </a:solidFill>
-                <a:latin typeface="Helvetica" pitchFamily="34" charset="0"/>
-                <a:ea typeface="Helvetica" pitchFamily="34" charset="-122"/>
-                <a:cs typeface="Helvetica" pitchFamily="34" charset="-120"/>
-              </a:rPr>
-              <a:t>A clean merge silently duplicated a story's status block — GitHub reported it mergeable, and it was still corrupt. Found by reading both parents of the merge.</a:t>
-            </a:r>
-            <a:endParaRPr lang="en-US" sz="1400" dirty="0"/>
-          </a:p>
-          <a:p>
-            <a:pPr lvl="1" marL="508000" indent="-254000">
-              <a:lnSpc>
-                <a:spcPct val="135000"/>
-              </a:lnSpc>
-              <a:buSzPct val="100000"/>
-              <a:buChar char="▪"/>
-            </a:pPr>
-            <a:r>
-              <a:rPr lang="en-US" sz="1400" dirty="0">
-                <a:solidFill>
-                  <a:srgbClr val="1B1B1F"/>
-                </a:solidFill>
-                <a:latin typeface="Helvetica" pitchFamily="34" charset="0"/>
-                <a:ea typeface="Helvetica" pitchFamily="34" charset="-122"/>
-                <a:cs typeface="Helvetica" pitchFamily="34" charset="-120"/>
-              </a:rPr>
-              <a:t>A second clean merge silently dropped an entire decision entry. Found by a routine cross-branch check computing the true maximum decision number.</a:t>
-            </a:r>
-            <a:endParaRPr lang="en-US" sz="1400" dirty="0"/>
-          </a:p>
-          <a:p>
-            <a:pPr lvl="1" marL="508000" indent="-254000">
-              <a:lnSpc>
-                <a:spcPct val="135000"/>
-              </a:lnSpc>
-              <a:buSzPct val="100000"/>
-              <a:buChar char="▪"/>
-            </a:pPr>
-            <a:r>
-              <a:rPr lang="en-US" sz="1400" dirty="0">
-                <a:solidFill>
-                  <a:srgbClr val="1B1B1F"/>
-                </a:solidFill>
-                <a:latin typeface="Helvetica" pitchFamily="34" charset="0"/>
-                <a:ea typeface="Helvetica" pitchFamily="34" charset="-122"/>
-                <a:cs typeface="Helvetica" pitchFamily="34" charset="-120"/>
-              </a:rPr>
-              <a:t>Three separate branches independently claimed the same decision number. Now there is a documented check before claiming one.</a:t>
-            </a:r>
-            <a:endParaRPr lang="en-US" sz="1400" dirty="0"/>
-          </a:p>
-          <a:p>
-            <a:pPr marL="342900" indent="-342900">
-              <a:lnSpc>
-                <a:spcPct val="135000"/>
-              </a:lnSpc>
-              <a:buSzPct val="100000"/>
-              <a:buChar char="•"/>
-            </a:pPr>
-            <a:r>
-              <a:rPr lang="en-US" sz="1400" b="1" dirty="0">
-                <a:solidFill>
-                  <a:srgbClr val="1B1B1F"/>
-                </a:solidFill>
-                <a:latin typeface="Helvetica" pitchFamily="34" charset="0"/>
-                <a:ea typeface="Helvetica" pitchFamily="34" charset="-122"/>
-                <a:cs typeface="Helvetica" pitchFamily="34" charset="-120"/>
-              </a:rPr>
-              <a:t>Two pull requests were closed rather than merged.</a:t>
-            </a:r>
-            <a:endParaRPr lang="en-US" sz="1400" dirty="0"/>
-          </a:p>
-          <a:p>
-            <a:pPr lvl="1" marL="508000" indent="-254000">
-              <a:lnSpc>
-                <a:spcPct val="135000"/>
-              </a:lnSpc>
-              <a:buSzPct val="100000"/>
-              <a:buChar char="▪"/>
-            </a:pPr>
-            <a:r>
-              <a:rPr lang="en-US" sz="1400" dirty="0">
-                <a:solidFill>
-                  <a:srgbClr val="1B1B1F"/>
-                </a:solidFill>
-                <a:latin typeface="Helvetica" pitchFamily="34" charset="0"/>
-                <a:ea typeface="Helvetica" pitchFamily="34" charset="-122"/>
-                <a:cs typeface="Helvetica" pitchFamily="34" charset="-120"/>
-              </a:rPr>
-              <a:t>#9 was redundant. #16 proposed keeping a story open based on a misreading of our own approval rule — that rule scopes to changes after the contract is frozen, and the PR in question was the freeze itself.</a:t>
-            </a:r>
-            <a:endParaRPr lang="en-US" sz="1400" dirty="0"/>
-          </a:p>
-          <a:p>
-            <a:pPr lvl="1" marL="508000" indent="-254000">
-              <a:lnSpc>
-                <a:spcPct val="135000"/>
-              </a:lnSpc>
-              <a:buSzPct val="100000"/>
-              <a:buChar char="▪"/>
-            </a:pPr>
-            <a:r>
-              <a:rPr lang="en-US" sz="1400" dirty="0">
-                <a:solidFill>
-                  <a:srgbClr val="16697A"/>
-                </a:solidFill>
-                <a:latin typeface="Helvetica" pitchFamily="34" charset="0"/>
-                <a:ea typeface="Helvetica" pitchFamily="34" charset="-122"/>
-                <a:cs typeface="Helvetica" pitchFamily="34" charset="-120"/>
-              </a:rPr>
-              <a:t>The disagreement was settled by quoting the rule, not by seniority.</a:t>
-            </a:r>
-            <a:endParaRPr lang="en-US" sz="1400" dirty="0"/>
-          </a:p>
-        </p:txBody>
-      </p:sp>
-      <p:sp>
-        <p:nvSpPr>
-          <p:cNvPr id="6" name="Text 4"/>
-          <p:cNvSpPr/>
-          <p:nvPr/>
-        </p:nvSpPr>
-        <p:spPr>
-          <a:xfrm>
-            <a:off x="566928" y="6400800"/>
-            <a:ext cx="5486400" cy="274320"/>
-          </a:xfrm>
-          <a:prstGeom prst="rect">
-            <a:avLst/>
-          </a:prstGeom>
-          <a:noFill/>
-          <a:ln/>
-        </p:spPr>
-        <p:txBody>
-          <a:bodyPr wrap="square" rtlCol="0" anchor="ctr"/>
-          <a:lstStyle/>
-          <a:p>
-            <a:pPr indent="0" marL="0">
-              <a:buNone/>
-            </a:pPr>
-            <a:r>
-              <a:rPr lang="en-US" sz="950" dirty="0">
-                <a:solidFill>
-                  <a:srgbClr val="6B7280"/>
-                </a:solidFill>
-                <a:latin typeface="Helvetica" pitchFamily="34" charset="0"/>
-                <a:ea typeface="Helvetica" pitchFamily="34" charset="-122"/>
-                <a:cs typeface="Helvetica" pitchFamily="34" charset="-120"/>
-              </a:rPr>
-              <a:t>ProofShape · CS595 · 18 Sept 2026</a:t>
-            </a:r>
-            <a:endParaRPr lang="en-US" sz="950" dirty="0"/>
-          </a:p>
-        </p:txBody>
-      </p:sp>
-      <p:sp>
-        <p:nvSpPr>
-          <p:cNvPr id="7" name="Text 5"/>
           <p:cNvSpPr/>
           <p:nvPr/>
         </p:nvSpPr>
